--- a/docs/实习答辩PPT_AgentCoMonitor_真实项目版_V2.1.pptx
+++ b/docs/实习答辩PPT_AgentCoMonitor_真实项目版_V2.1.pptx
@@ -1,25 +1,25 @@
 
 <file path=ppt/presentation.xml><?xml version="1.0" encoding="utf-8"?>
-<p:presentation xmlns:a="http://schemas.openxmlformats.org/drawingml/2006/main" xmlns:r="http://schemas.openxmlformats.org/officeDocument/2006/relationships" xmlns:p="http://schemas.openxmlformats.org/presentationml/2006/main" saveSubsetFonts="1" autoCompressPictures="0">
+<p:presentation xmlns:a="http://schemas.openxmlformats.org/drawingml/2006/main" xmlns:r="http://schemas.openxmlformats.org/officeDocument/2006/relationships" xmlns:p="http://schemas.openxmlformats.org/presentationml/2006/main" autoCompressPictures="0">
   <p:sldMasterIdLst>
     <p:sldMasterId id="2147483648" r:id="rId1"/>
   </p:sldMasterIdLst>
+  <p:notesMasterIdLst>
+    <p:notesMasterId r:id="rId4"/>
+  </p:notesMasterIdLst>
   <p:sldIdLst>
-    <p:sldId id="256" r:id="rId2"/>
-    <p:sldId id="257" r:id="rId3"/>
-    <p:sldId id="258" r:id="rId4"/>
-    <p:sldId id="259" r:id="rId5"/>
-    <p:sldId id="260" r:id="rId6"/>
-    <p:sldId id="261" r:id="rId7"/>
-    <p:sldId id="262" r:id="rId8"/>
-    <p:sldId id="263" r:id="rId9"/>
-    <p:sldId id="264" r:id="rId10"/>
-    <p:sldId id="265" r:id="rId11"/>
-    <p:sldId id="266" r:id="rId12"/>
+    <p:sldId id="256" r:id="rId3"/>
+    <p:sldId id="257" r:id="rId5"/>
+    <p:sldId id="258" r:id="rId6"/>
+    <p:sldId id="259" r:id="rId7"/>
+    <p:sldId id="260" r:id="rId8"/>
+    <p:sldId id="261" r:id="rId9"/>
+    <p:sldId id="262" r:id="rId10"/>
+    <p:sldId id="263" r:id="rId11"/>
+    <p:sldId id="264" r:id="rId12"/>
+    <p:sldId id="265" r:id="rId13"/>
+    <p:sldId id="266" r:id="rId14"/>
   </p:sldIdLst>
-  <p:notesMasterIdLst>
-    <p:notesMasterId r:id="rId13"/>
-  </p:notesMasterIdLst>
   <p:sldSz cx="12192000" cy="6858000"/>
   <p:notesSz cx="6858000" cy="12192000"/>
   <p:defaultTextStyle>
@@ -199,7 +199,6 @@
           <a:p>
             <a:fld id="{5282F153-3F37-0F45-9E97-73ACFA13230C}" type="datetimeFigureOut">
               <a:rPr lang="en-US"/>
-              <a:t>7/23/19</a:t>
             </a:fld>
             <a:endParaRPr lang="en-US"/>
           </a:p>
@@ -266,6 +265,7 @@
               <a:rPr lang="en-US"/>
               <a:t>Click to edit Master text styles</a:t>
             </a:r>
+            <a:endParaRPr lang="en-US"/>
           </a:p>
           <a:p>
             <a:pPr lvl="1"/>
@@ -273,6 +273,7 @@
               <a:rPr lang="en-US"/>
               <a:t>Second level</a:t>
             </a:r>
+            <a:endParaRPr lang="en-US"/>
           </a:p>
           <a:p>
             <a:pPr lvl="2"/>
@@ -280,6 +281,7 @@
               <a:rPr lang="en-US"/>
               <a:t>Third level</a:t>
             </a:r>
+            <a:endParaRPr lang="en-US"/>
           </a:p>
           <a:p>
             <a:pPr lvl="3"/>
@@ -287,6 +289,7 @@
               <a:rPr lang="en-US"/>
               <a:t>Fourth level</a:t>
             </a:r>
+            <a:endParaRPr lang="en-US"/>
           </a:p>
           <a:p>
             <a:pPr lvl="4"/>
@@ -294,6 +297,7 @@
               <a:rPr lang="en-US"/>
               <a:t>Fifth level</a:t>
             </a:r>
+            <a:endParaRPr lang="en-US"/>
           </a:p>
         </p:txBody>
       </p:sp>
@@ -357,18 +361,12 @@
           <a:p>
             <a:fld id="{CE5E9CC1-C706-0F49-92D6-E571CC5EEA8F}" type="slidenum">
               <a:rPr lang="en-US"/>
-              <a:t>‹#›</a:t>
             </a:fld>
             <a:endParaRPr lang="en-US"/>
           </a:p>
         </p:txBody>
       </p:sp>
     </p:spTree>
-    <p:extLst>
-      <p:ext uri="{BB962C8B-B14F-4D97-AF65-F5344CB8AC3E}">
-        <p14:creationId xmlns:p14="http://schemas.microsoft.com/office/powerpoint/2010/main" val="1024086991"/>
-      </p:ext>
-    </p:extLst>
   </p:cSld>
   <p:clrMap bg1="lt1" tx1="dk1" bg2="lt2" tx2="dk2" accent1="accent1" accent2="accent2" accent3="accent3" accent4="accent4" accent5="accent5" accent6="accent6" hlink="hlink" folHlink="folHlink"/>
   <p:notesStyle>
@@ -510,10 +508,6 @@
           <a:bodyPr/>
           <a:lstStyle/>
           <a:p>
-            <a:r>
-              <a:rPr lang="en-US" dirty="0"/>
-              <a:t/>
-            </a:r>
             <a:endParaRPr lang="en-US" dirty="0"/>
           </a:p>
         </p:txBody>
@@ -535,18 +529,12 @@
           <a:p>
             <a:fld id="{F7021451-1387-4CA6-816F-3879F97B5CBC}" type="slidenum">
               <a:rPr lang="en-US"/>
-              <a:t>1</a:t>
             </a:fld>
             <a:endParaRPr lang="en-US"/>
           </a:p>
         </p:txBody>
       </p:sp>
     </p:spTree>
-    <p:extLst>
-      <p:ext uri="{BB962C8B-B14F-4D97-AF65-F5344CB8AC3E}">
-        <p14:creationId xmlns:p14="http://schemas.microsoft.com/office/powerpoint/2010/main" val="1024086991"/>
-      </p:ext>
-    </p:extLst>
   </p:cSld>
   <p:clrMapOvr>
     <a:masterClrMapping/>
@@ -598,10 +586,6 @@
           <a:bodyPr/>
           <a:lstStyle/>
           <a:p>
-            <a:r>
-              <a:rPr lang="en-US" dirty="0"/>
-              <a:t/>
-            </a:r>
             <a:endParaRPr lang="en-US" dirty="0"/>
           </a:p>
         </p:txBody>
@@ -623,18 +607,12 @@
           <a:p>
             <a:fld id="{F7021451-1387-4CA6-816F-3879F97B5CBC}" type="slidenum">
               <a:rPr lang="en-US"/>
-              <a:t>10</a:t>
             </a:fld>
             <a:endParaRPr lang="en-US"/>
           </a:p>
         </p:txBody>
       </p:sp>
     </p:spTree>
-    <p:extLst>
-      <p:ext uri="{BB962C8B-B14F-4D97-AF65-F5344CB8AC3E}">
-        <p14:creationId xmlns:p14="http://schemas.microsoft.com/office/powerpoint/2010/main" val="1024086991"/>
-      </p:ext>
-    </p:extLst>
   </p:cSld>
   <p:clrMapOvr>
     <a:masterClrMapping/>
@@ -686,10 +664,6 @@
           <a:bodyPr/>
           <a:lstStyle/>
           <a:p>
-            <a:r>
-              <a:rPr lang="en-US" dirty="0"/>
-              <a:t/>
-            </a:r>
             <a:endParaRPr lang="en-US" dirty="0"/>
           </a:p>
         </p:txBody>
@@ -711,18 +685,12 @@
           <a:p>
             <a:fld id="{F7021451-1387-4CA6-816F-3879F97B5CBC}" type="slidenum">
               <a:rPr lang="en-US"/>
-              <a:t>11</a:t>
             </a:fld>
             <a:endParaRPr lang="en-US"/>
           </a:p>
         </p:txBody>
       </p:sp>
     </p:spTree>
-    <p:extLst>
-      <p:ext uri="{BB962C8B-B14F-4D97-AF65-F5344CB8AC3E}">
-        <p14:creationId xmlns:p14="http://schemas.microsoft.com/office/powerpoint/2010/main" val="1024086991"/>
-      </p:ext>
-    </p:extLst>
   </p:cSld>
   <p:clrMapOvr>
     <a:masterClrMapping/>
@@ -774,10 +742,6 @@
           <a:bodyPr/>
           <a:lstStyle/>
           <a:p>
-            <a:r>
-              <a:rPr lang="en-US" dirty="0"/>
-              <a:t/>
-            </a:r>
             <a:endParaRPr lang="en-US" dirty="0"/>
           </a:p>
         </p:txBody>
@@ -799,18 +763,12 @@
           <a:p>
             <a:fld id="{F7021451-1387-4CA6-816F-3879F97B5CBC}" type="slidenum">
               <a:rPr lang="en-US"/>
-              <a:t>2</a:t>
             </a:fld>
             <a:endParaRPr lang="en-US"/>
           </a:p>
         </p:txBody>
       </p:sp>
     </p:spTree>
-    <p:extLst>
-      <p:ext uri="{BB962C8B-B14F-4D97-AF65-F5344CB8AC3E}">
-        <p14:creationId xmlns:p14="http://schemas.microsoft.com/office/powerpoint/2010/main" val="1024086991"/>
-      </p:ext>
-    </p:extLst>
   </p:cSld>
   <p:clrMapOvr>
     <a:masterClrMapping/>
@@ -862,10 +820,6 @@
           <a:bodyPr/>
           <a:lstStyle/>
           <a:p>
-            <a:r>
-              <a:rPr lang="en-US" dirty="0"/>
-              <a:t/>
-            </a:r>
             <a:endParaRPr lang="en-US" dirty="0"/>
           </a:p>
         </p:txBody>
@@ -887,18 +841,12 @@
           <a:p>
             <a:fld id="{F7021451-1387-4CA6-816F-3879F97B5CBC}" type="slidenum">
               <a:rPr lang="en-US"/>
-              <a:t>3</a:t>
             </a:fld>
             <a:endParaRPr lang="en-US"/>
           </a:p>
         </p:txBody>
       </p:sp>
     </p:spTree>
-    <p:extLst>
-      <p:ext uri="{BB962C8B-B14F-4D97-AF65-F5344CB8AC3E}">
-        <p14:creationId xmlns:p14="http://schemas.microsoft.com/office/powerpoint/2010/main" val="1024086991"/>
-      </p:ext>
-    </p:extLst>
   </p:cSld>
   <p:clrMapOvr>
     <a:masterClrMapping/>
@@ -950,10 +898,6 @@
           <a:bodyPr/>
           <a:lstStyle/>
           <a:p>
-            <a:r>
-              <a:rPr lang="en-US" dirty="0"/>
-              <a:t/>
-            </a:r>
             <a:endParaRPr lang="en-US" dirty="0"/>
           </a:p>
         </p:txBody>
@@ -975,18 +919,12 @@
           <a:p>
             <a:fld id="{F7021451-1387-4CA6-816F-3879F97B5CBC}" type="slidenum">
               <a:rPr lang="en-US"/>
-              <a:t>4</a:t>
             </a:fld>
             <a:endParaRPr lang="en-US"/>
           </a:p>
         </p:txBody>
       </p:sp>
     </p:spTree>
-    <p:extLst>
-      <p:ext uri="{BB962C8B-B14F-4D97-AF65-F5344CB8AC3E}">
-        <p14:creationId xmlns:p14="http://schemas.microsoft.com/office/powerpoint/2010/main" val="1024086991"/>
-      </p:ext>
-    </p:extLst>
   </p:cSld>
   <p:clrMapOvr>
     <a:masterClrMapping/>
@@ -1038,10 +976,6 @@
           <a:bodyPr/>
           <a:lstStyle/>
           <a:p>
-            <a:r>
-              <a:rPr lang="en-US" dirty="0"/>
-              <a:t/>
-            </a:r>
             <a:endParaRPr lang="en-US" dirty="0"/>
           </a:p>
         </p:txBody>
@@ -1063,18 +997,12 @@
           <a:p>
             <a:fld id="{F7021451-1387-4CA6-816F-3879F97B5CBC}" type="slidenum">
               <a:rPr lang="en-US"/>
-              <a:t>5</a:t>
             </a:fld>
             <a:endParaRPr lang="en-US"/>
           </a:p>
         </p:txBody>
       </p:sp>
     </p:spTree>
-    <p:extLst>
-      <p:ext uri="{BB962C8B-B14F-4D97-AF65-F5344CB8AC3E}">
-        <p14:creationId xmlns:p14="http://schemas.microsoft.com/office/powerpoint/2010/main" val="1024086991"/>
-      </p:ext>
-    </p:extLst>
   </p:cSld>
   <p:clrMapOvr>
     <a:masterClrMapping/>
@@ -1126,10 +1054,6 @@
           <a:bodyPr/>
           <a:lstStyle/>
           <a:p>
-            <a:r>
-              <a:rPr lang="en-US" dirty="0"/>
-              <a:t/>
-            </a:r>
             <a:endParaRPr lang="en-US" dirty="0"/>
           </a:p>
         </p:txBody>
@@ -1151,18 +1075,12 @@
           <a:p>
             <a:fld id="{F7021451-1387-4CA6-816F-3879F97B5CBC}" type="slidenum">
               <a:rPr lang="en-US"/>
-              <a:t>6</a:t>
             </a:fld>
             <a:endParaRPr lang="en-US"/>
           </a:p>
         </p:txBody>
       </p:sp>
     </p:spTree>
-    <p:extLst>
-      <p:ext uri="{BB962C8B-B14F-4D97-AF65-F5344CB8AC3E}">
-        <p14:creationId xmlns:p14="http://schemas.microsoft.com/office/powerpoint/2010/main" val="1024086991"/>
-      </p:ext>
-    </p:extLst>
   </p:cSld>
   <p:clrMapOvr>
     <a:masterClrMapping/>
@@ -1214,10 +1132,6 @@
           <a:bodyPr/>
           <a:lstStyle/>
           <a:p>
-            <a:r>
-              <a:rPr lang="en-US" dirty="0"/>
-              <a:t/>
-            </a:r>
             <a:endParaRPr lang="en-US" dirty="0"/>
           </a:p>
         </p:txBody>
@@ -1239,18 +1153,12 @@
           <a:p>
             <a:fld id="{F7021451-1387-4CA6-816F-3879F97B5CBC}" type="slidenum">
               <a:rPr lang="en-US"/>
-              <a:t>7</a:t>
             </a:fld>
             <a:endParaRPr lang="en-US"/>
           </a:p>
         </p:txBody>
       </p:sp>
     </p:spTree>
-    <p:extLst>
-      <p:ext uri="{BB962C8B-B14F-4D97-AF65-F5344CB8AC3E}">
-        <p14:creationId xmlns:p14="http://schemas.microsoft.com/office/powerpoint/2010/main" val="1024086991"/>
-      </p:ext>
-    </p:extLst>
   </p:cSld>
   <p:clrMapOvr>
     <a:masterClrMapping/>
@@ -1303,10 +1211,22 @@
           <a:lstStyle/>
           <a:p>
             <a:r>
-              <a:rPr lang="en-US" dirty="0"/>
-              <a:t/>
-            </a:r>
-            <a:endParaRPr lang="en-US" dirty="0"/>
+              <a:rPr lang="zh-CN" altLang="en-US" dirty="0"/>
+              <a:t>注入违规</a:t>
+            </a:r>
+            <a:r>
+              <a:rPr lang="en-US" altLang="zh-CN" dirty="0"/>
+              <a:t> </a:t>
+            </a:r>
+            <a:r>
+              <a:rPr lang="zh-CN" altLang="en-US" dirty="0"/>
+              <a:t>需要</a:t>
+            </a:r>
+            <a:r>
+              <a:rPr lang="zh-CN" altLang="en-US" dirty="0"/>
+              <a:t>解释</a:t>
+            </a:r>
+            <a:endParaRPr lang="zh-CN" altLang="en-US" dirty="0"/>
           </a:p>
         </p:txBody>
       </p:sp>
@@ -1327,18 +1247,12 @@
           <a:p>
             <a:fld id="{F7021451-1387-4CA6-816F-3879F97B5CBC}" type="slidenum">
               <a:rPr lang="en-US"/>
-              <a:t>8</a:t>
             </a:fld>
             <a:endParaRPr lang="en-US"/>
           </a:p>
         </p:txBody>
       </p:sp>
     </p:spTree>
-    <p:extLst>
-      <p:ext uri="{BB962C8B-B14F-4D97-AF65-F5344CB8AC3E}">
-        <p14:creationId xmlns:p14="http://schemas.microsoft.com/office/powerpoint/2010/main" val="1024086991"/>
-      </p:ext>
-    </p:extLst>
   </p:cSld>
   <p:clrMapOvr>
     <a:masterClrMapping/>
@@ -1390,10 +1304,6 @@
           <a:bodyPr/>
           <a:lstStyle/>
           <a:p>
-            <a:r>
-              <a:rPr lang="en-US" dirty="0"/>
-              <a:t/>
-            </a:r>
             <a:endParaRPr lang="en-US" dirty="0"/>
           </a:p>
         </p:txBody>
@@ -1415,18 +1325,12 @@
           <a:p>
             <a:fld id="{F7021451-1387-4CA6-816F-3879F97B5CBC}" type="slidenum">
               <a:rPr lang="en-US"/>
-              <a:t>9</a:t>
             </a:fld>
             <a:endParaRPr lang="en-US"/>
           </a:p>
         </p:txBody>
       </p:sp>
     </p:spTree>
-    <p:extLst>
-      <p:ext uri="{BB962C8B-B14F-4D97-AF65-F5344CB8AC3E}">
-        <p14:creationId xmlns:p14="http://schemas.microsoft.com/office/powerpoint/2010/main" val="1024086991"/>
-      </p:ext>
-    </p:extLst>
   </p:cSld>
   <p:clrMapOvr>
     <a:masterClrMapping/>
@@ -1467,6 +1371,11 @@
 <file path=ppt/slideMasters/slideMaster1.xml><?xml version="1.0" encoding="utf-8"?>
 <p:sldMaster xmlns:a="http://schemas.openxmlformats.org/drawingml/2006/main" xmlns:r="http://schemas.openxmlformats.org/officeDocument/2006/relationships" xmlns:p="http://schemas.openxmlformats.org/presentationml/2006/main">
   <p:cSld>
+    <p:bg>
+      <p:bgRef idx="1001">
+        <a:schemeClr val="bg1"/>
+      </p:bgRef>
+    </p:bg>
     <p:spTree>
       <p:nvGrpSpPr>
         <p:cNvPr id="1" name=""/>
@@ -1510,7 +1419,7 @@
         <a:spcBef>
           <a:spcPct val="20000"/>
         </a:spcBef>
-        <a:buFont typeface="Arial" pitchFamily="34" charset="0"/>
+        <a:buFont typeface="Arial" panose="020B0604020202020204" pitchFamily="34" charset="0"/>
         <a:buChar char="•"/>
         <a:defRPr sz="3200" kern="1200">
           <a:solidFill>
@@ -1525,7 +1434,7 @@
         <a:spcBef>
           <a:spcPct val="20000"/>
         </a:spcBef>
-        <a:buFont typeface="Arial" pitchFamily="34" charset="0"/>
+        <a:buFont typeface="Arial" panose="020B0604020202020204" pitchFamily="34" charset="0"/>
         <a:buChar char="–"/>
         <a:defRPr sz="2800" kern="1200">
           <a:solidFill>
@@ -1540,7 +1449,7 @@
         <a:spcBef>
           <a:spcPct val="20000"/>
         </a:spcBef>
-        <a:buFont typeface="Arial" pitchFamily="34" charset="0"/>
+        <a:buFont typeface="Arial" panose="020B0604020202020204" pitchFamily="34" charset="0"/>
         <a:buChar char="•"/>
         <a:defRPr sz="2400" kern="1200">
           <a:solidFill>
@@ -1555,7 +1464,7 @@
         <a:spcBef>
           <a:spcPct val="20000"/>
         </a:spcBef>
-        <a:buFont typeface="Arial" pitchFamily="34" charset="0"/>
+        <a:buFont typeface="Arial" panose="020B0604020202020204" pitchFamily="34" charset="0"/>
         <a:buChar char="–"/>
         <a:defRPr sz="2000" kern="1200">
           <a:solidFill>
@@ -1570,7 +1479,7 @@
         <a:spcBef>
           <a:spcPct val="20000"/>
         </a:spcBef>
-        <a:buFont typeface="Arial" pitchFamily="34" charset="0"/>
+        <a:buFont typeface="Arial" panose="020B0604020202020204" pitchFamily="34" charset="0"/>
         <a:buChar char="»"/>
         <a:defRPr sz="2000" kern="1200">
           <a:solidFill>
@@ -1585,7 +1494,7 @@
         <a:spcBef>
           <a:spcPct val="20000"/>
         </a:spcBef>
-        <a:buFont typeface="Arial" pitchFamily="34" charset="0"/>
+        <a:buFont typeface="Arial" panose="020B0604020202020204" pitchFamily="34" charset="0"/>
         <a:buChar char="•"/>
         <a:defRPr sz="2000" kern="1200">
           <a:solidFill>
@@ -1600,7 +1509,7 @@
         <a:spcBef>
           <a:spcPct val="20000"/>
         </a:spcBef>
-        <a:buFont typeface="Arial" pitchFamily="34" charset="0"/>
+        <a:buFont typeface="Arial" panose="020B0604020202020204" pitchFamily="34" charset="0"/>
         <a:buChar char="•"/>
         <a:defRPr sz="2000" kern="1200">
           <a:solidFill>
@@ -1615,7 +1524,7 @@
         <a:spcBef>
           <a:spcPct val="20000"/>
         </a:spcBef>
-        <a:buFont typeface="Arial" pitchFamily="34" charset="0"/>
+        <a:buFont typeface="Arial" panose="020B0604020202020204" pitchFamily="34" charset="0"/>
         <a:buChar char="•"/>
         <a:defRPr sz="2000" kern="1200">
           <a:solidFill>
@@ -1630,7 +1539,7 @@
         <a:spcBef>
           <a:spcPct val="20000"/>
         </a:spcBef>
-        <a:buFont typeface="Arial" pitchFamily="34" charset="0"/>
+        <a:buFont typeface="Arial" panose="020B0604020202020204" pitchFamily="34" charset="0"/>
         <a:buChar char="•"/>
         <a:defRPr sz="2000" kern="1200">
           <a:solidFill>
@@ -1743,12 +1652,13 @@
 
 <file path=ppt/slides/slide1.xml><?xml version="1.0" encoding="utf-8"?>
 <p:sld xmlns:a="http://schemas.openxmlformats.org/drawingml/2006/main" xmlns:r="http://schemas.openxmlformats.org/officeDocument/2006/relationships" xmlns:p="http://schemas.openxmlformats.org/presentationml/2006/main">
-  <p:cSld name="Slide 1">
+  <p:cSld>
     <p:bg>
       <p:bgPr>
         <a:solidFill>
           <a:srgbClr val="F7F9FB"/>
         </a:solidFill>
+        <a:effectLst/>
       </p:bgPr>
     </p:bg>
     <p:spTree>
@@ -1984,13 +1894,12 @@
             <a:avLst/>
           </a:prstGeom>
           <a:noFill/>
-          <a:ln/>
         </p:spPr>
         <p:txBody>
           <a:bodyPr wrap="square" lIns="0" tIns="0" rIns="0" bIns="0" rtlCol="0" anchor="ctr"/>
           <a:lstStyle/>
           <a:p>
-            <a:pPr indent="0" marL="0">
+            <a:pPr marL="0" indent="0">
               <a:buNone/>
             </a:pPr>
             <a:r>
@@ -2020,17 +1929,16 @@
             <a:avLst/>
           </a:prstGeom>
           <a:noFill/>
-          <a:ln/>
         </p:spPr>
         <p:txBody>
           <a:bodyPr wrap="square" lIns="0" tIns="0" rIns="0" bIns="0" rtlCol="0" anchor="ctr"/>
           <a:lstStyle/>
           <a:p>
-            <a:pPr indent="0" marL="0">
-              <a:buNone/>
-            </a:pPr>
-            <a:r>
-              <a:rPr lang="en-US" sz="600" spc="200" kern="0" dirty="0">
+            <a:pPr marL="0" indent="0">
+              <a:buNone/>
+            </a:pPr>
+            <a:r>
+              <a:rPr lang="en-US" sz="600" kern="0" spc="200" dirty="0">
                 <a:solidFill>
                   <a:srgbClr val="B8C7D1"/>
                 </a:solidFill>
@@ -2056,13 +1964,12 @@
             <a:avLst/>
           </a:prstGeom>
           <a:noFill/>
-          <a:ln/>
         </p:spPr>
         <p:txBody>
           <a:bodyPr wrap="square" lIns="0" tIns="0" rIns="0" bIns="0" rtlCol="0" anchor="ctr"/>
           <a:lstStyle/>
           <a:p>
-            <a:pPr indent="0" marL="0">
+            <a:pPr marL="0" indent="0">
               <a:buNone/>
             </a:pPr>
             <a:r>
@@ -2076,7 +1983,7 @@
             <a:endParaRPr lang="en-US" sz="2700" dirty="0"/>
           </a:p>
           <a:p>
-            <a:pPr indent="0" marL="0">
+            <a:pPr marL="0" indent="0">
               <a:buNone/>
             </a:pPr>
             <a:r>
@@ -2087,7 +1994,14 @@
               </a:rPr>
               <a:t>智能监控与结果筛选优化研究</a:t>
             </a:r>
-            <a:endParaRPr lang="en-US" sz="2700" dirty="0"/>
+            <a:endParaRPr lang="en-US" altLang="zh-CN" sz="1600" b="1" dirty="0">
+              <a:solidFill>
+                <a:schemeClr val="tx1">
+                  <a:lumMod val="65000"/>
+                  <a:lumOff val="35000"/>
+                </a:schemeClr>
+              </a:solidFill>
+            </a:endParaRPr>
           </a:p>
         </p:txBody>
       </p:sp>
@@ -2106,13 +2020,12 @@
             <a:avLst/>
           </a:prstGeom>
           <a:noFill/>
-          <a:ln/>
         </p:spPr>
         <p:txBody>
           <a:bodyPr wrap="square" lIns="0" tIns="0" rIns="0" bIns="0" rtlCol="0" anchor="ctr"/>
           <a:lstStyle/>
           <a:p>
-            <a:pPr indent="0" marL="0">
+            <a:pPr marL="0" indent="0">
               <a:buNone/>
             </a:pPr>
             <a:r>
@@ -2165,13 +2078,12 @@
             <a:avLst/>
           </a:prstGeom>
           <a:noFill/>
-          <a:ln/>
         </p:spPr>
         <p:txBody>
           <a:bodyPr wrap="square" lIns="0" tIns="0" rIns="0" bIns="0" rtlCol="0" anchor="ctr"/>
           <a:lstStyle/>
           <a:p>
-            <a:pPr indent="0" marL="0">
+            <a:pPr marL="0" indent="0">
               <a:buNone/>
             </a:pPr>
             <a:r>
@@ -2180,12 +2092,20 @@
                   <a:srgbClr val="66727D"/>
                 </a:solidFill>
               </a:rPr>
-              <a:t>汇报人：【待填写】    实习部门：【待填写】</a:t>
+              <a:t>汇报人：</a:t>
+            </a:r>
+            <a:r>
+              <a:rPr lang="en-US" sz="1000" dirty="0">
+                <a:solidFill>
+                  <a:srgbClr val="66727D"/>
+                </a:solidFill>
+              </a:rPr>
+              <a:t>谢佳妮    实习部门：电 商</a:t>
             </a:r>
             <a:endParaRPr lang="en-US" sz="1000" dirty="0"/>
           </a:p>
           <a:p>
-            <a:pPr indent="0" marL="0">
+            <a:pPr marL="0" indent="0">
               <a:buNone/>
             </a:pPr>
             <a:r>
@@ -2194,9 +2114,13 @@
                   <a:srgbClr val="66727D"/>
                 </a:solidFill>
               </a:rPr>
-              <a:t>实习时间：【待填写】    实习辅导员：【待填写】</a:t>
-            </a:r>
-            <a:endParaRPr lang="en-US" sz="1000" dirty="0"/>
+              <a:t>实习时间：2026.07.08-2026.09.08</a:t>
+            </a:r>
+            <a:endParaRPr lang="zh-CN" altLang="en-US" sz="1000" dirty="0">
+              <a:solidFill>
+                <a:srgbClr val="66727D"/>
+              </a:solidFill>
+            </a:endParaRPr>
           </a:p>
         </p:txBody>
       </p:sp>
@@ -2210,12 +2134,13 @@
 
 <file path=ppt/slides/slide10.xml><?xml version="1.0" encoding="utf-8"?>
 <p:sld xmlns:a="http://schemas.openxmlformats.org/drawingml/2006/main" xmlns:r="http://schemas.openxmlformats.org/officeDocument/2006/relationships" xmlns:p="http://schemas.openxmlformats.org/presentationml/2006/main">
-  <p:cSld name="Slide 10">
+  <p:cSld>
     <p:bg>
       <p:bgPr>
         <a:solidFill>
           <a:srgbClr val="F7F9FB"/>
         </a:solidFill>
+        <a:effectLst/>
       </p:bgPr>
     </p:bg>
     <p:spTree>
@@ -2272,23 +2197,22 @@
             <a:avLst/>
           </a:prstGeom>
           <a:noFill/>
-          <a:ln/>
         </p:spPr>
         <p:txBody>
           <a:bodyPr wrap="square" rtlCol="0" anchor="ctr"/>
           <a:lstStyle/>
           <a:p>
-            <a:pPr indent="0" marL="0">
-              <a:buNone/>
-            </a:pPr>
-            <a:r>
-              <a:rPr lang="en-US" sz="850" b="1" spc="120" kern="0" dirty="0">
+            <a:pPr marL="0" indent="0">
+              <a:buNone/>
+            </a:pPr>
+            <a:r>
+              <a:rPr lang="en-US" sz="850" b="1" kern="0" spc="120" dirty="0">
                 <a:solidFill>
                   <a:srgbClr val="B7192E"/>
                 </a:solidFill>
-                <a:latin typeface="Microsoft YaHei" pitchFamily="34" charset="0"/>
-                <a:ea typeface="Microsoft YaHei" pitchFamily="34" charset="-122"/>
-                <a:cs typeface="Microsoft YaHei" pitchFamily="34" charset="-120"/>
+                <a:latin typeface="微软雅黑" panose="020B0503020204020204" pitchFamily="34" charset="-122"/>
+                <a:ea typeface="微软雅黑" panose="020B0503020204020204" pitchFamily="34" charset="-122"/>
+                <a:cs typeface="微软雅黑" panose="020B0503020204020204" pitchFamily="34" charset="-120"/>
               </a:rPr>
               <a:t>04  辅导员寄语</a:t>
             </a:r>
@@ -2311,13 +2235,12 @@
             <a:avLst/>
           </a:prstGeom>
           <a:noFill/>
-          <a:ln/>
         </p:spPr>
         <p:txBody>
           <a:bodyPr wrap="square" lIns="0" tIns="0" rIns="0" bIns="0" rtlCol="0" anchor="ctr"/>
           <a:lstStyle/>
           <a:p>
-            <a:pPr indent="0" marL="0">
+            <a:pPr marL="0" indent="0">
               <a:buNone/>
             </a:pPr>
             <a:r>
@@ -2326,7 +2249,7 @@
                   <a:srgbClr val="18232D"/>
                 </a:solidFill>
               </a:rPr>
-              <a:t>实习辅导员寄语</a:t>
+              <a:t>辅导员寄语</a:t>
             </a:r>
             <a:endParaRPr lang="en-US" sz="2300" dirty="0"/>
           </a:p>
@@ -2347,13 +2270,12 @@
             <a:avLst/>
           </a:prstGeom>
           <a:noFill/>
-          <a:ln/>
         </p:spPr>
         <p:txBody>
           <a:bodyPr wrap="square" lIns="0" tIns="0" rIns="0" bIns="0" rtlCol="0" anchor="ctr"/>
           <a:lstStyle/>
           <a:p>
-            <a:pPr indent="0" marL="0">
+            <a:pPr marL="0" indent="0">
               <a:buNone/>
             </a:pPr>
             <a:r>
@@ -2383,13 +2305,12 @@
             <a:avLst/>
           </a:prstGeom>
           <a:noFill/>
-          <a:ln/>
         </p:spPr>
         <p:txBody>
           <a:bodyPr wrap="square" lIns="0" tIns="0" rIns="0" bIns="0" rtlCol="0" anchor="ctr"/>
           <a:lstStyle/>
           <a:p>
-            <a:pPr indent="0" marL="0">
+            <a:pPr marL="0" indent="0">
               <a:buNone/>
             </a:pPr>
             <a:r>
@@ -2446,13 +2367,12 @@
             <a:avLst/>
           </a:prstGeom>
           <a:noFill/>
-          <a:ln/>
         </p:spPr>
         <p:txBody>
           <a:bodyPr wrap="square" lIns="0" tIns="0" rIns="0" bIns="0" rtlCol="0" anchor="ctr"/>
           <a:lstStyle/>
           <a:p>
-            <a:pPr indent="0" marL="0">
+            <a:pPr marL="0" indent="0">
               <a:buNone/>
             </a:pPr>
             <a:r>
@@ -2464,78 +2384,6 @@
               <a:t>“</a:t>
             </a:r>
             <a:endParaRPr lang="en-US" sz="3800" dirty="0"/>
-          </a:p>
-        </p:txBody>
-      </p:sp>
-      <p:sp>
-        <p:nvSpPr>
-          <p:cNvPr id="9" name="Text 7"/>
-          <p:cNvSpPr/>
-          <p:nvPr/>
-        </p:nvSpPr>
-        <p:spPr>
-          <a:xfrm>
-            <a:off x="1508760" y="2240280"/>
-            <a:ext cx="6766560" cy="502920"/>
-          </a:xfrm>
-          <a:prstGeom prst="rect">
-            <a:avLst/>
-          </a:prstGeom>
-          <a:noFill/>
-          <a:ln/>
-        </p:spPr>
-        <p:txBody>
-          <a:bodyPr wrap="square" lIns="0" tIns="0" rIns="0" bIns="0" rtlCol="0" anchor="ctr"/>
-          <a:lstStyle/>
-          <a:p>
-            <a:pPr algn="ctr" indent="0" marL="0">
-              <a:buNone/>
-            </a:pPr>
-            <a:r>
-              <a:rPr lang="en-US" sz="2000" b="1" dirty="0">
-                <a:solidFill>
-                  <a:srgbClr val="18232D"/>
-                </a:solidFill>
-              </a:rPr>
-              <a:t>【待辅导员填写寄语】</a:t>
-            </a:r>
-            <a:endParaRPr lang="en-US" sz="2000" dirty="0"/>
-          </a:p>
-        </p:txBody>
-      </p:sp>
-      <p:sp>
-        <p:nvSpPr>
-          <p:cNvPr id="10" name="Text 8"/>
-          <p:cNvSpPr/>
-          <p:nvPr/>
-        </p:nvSpPr>
-        <p:spPr>
-          <a:xfrm>
-            <a:off x="1508760" y="3154680"/>
-            <a:ext cx="6766560" cy="274320"/>
-          </a:xfrm>
-          <a:prstGeom prst="rect">
-            <a:avLst/>
-          </a:prstGeom>
-          <a:noFill/>
-          <a:ln/>
-        </p:spPr>
-        <p:txBody>
-          <a:bodyPr wrap="square" lIns="0" tIns="0" rIns="0" bIns="0" rtlCol="0" anchor="ctr"/>
-          <a:lstStyle/>
-          <a:p>
-            <a:pPr algn="ctr" indent="0" marL="0">
-              <a:buNone/>
-            </a:pPr>
-            <a:r>
-              <a:rPr lang="en-US" sz="900" dirty="0">
-                <a:solidFill>
-                  <a:srgbClr val="66727D"/>
-                </a:solidFill>
-              </a:rPr>
-              <a:t>建议控制在 80–150 字，可包含：学习态度、技术成长、工作方式、未来期待。</a:t>
-            </a:r>
-            <a:endParaRPr lang="en-US" sz="900" dirty="0"/>
           </a:p>
         </p:txBody>
       </p:sp>
@@ -2554,13 +2402,12 @@
             <a:avLst/>
           </a:prstGeom>
           <a:noFill/>
-          <a:ln/>
         </p:spPr>
         <p:txBody>
           <a:bodyPr wrap="square" lIns="0" tIns="0" rIns="0" bIns="0" rtlCol="0" anchor="ctr"/>
           <a:lstStyle/>
           <a:p>
-            <a:pPr algn="r" indent="0" marL="0">
+            <a:pPr marL="0" indent="0" algn="r">
               <a:buNone/>
             </a:pPr>
             <a:r>
@@ -2569,9 +2416,21 @@
                   <a:srgbClr val="66727D"/>
                 </a:solidFill>
               </a:rPr>
-              <a:t>— 实习辅导员：【待填写】</a:t>
-            </a:r>
-            <a:endParaRPr lang="en-US" sz="900" dirty="0"/>
+              <a:t>— 实习辅导员：</a:t>
+            </a:r>
+            <a:r>
+              <a:rPr lang="zh-CN" altLang="en-US" sz="900" dirty="0">
+                <a:solidFill>
+                  <a:srgbClr val="66727D"/>
+                </a:solidFill>
+              </a:rPr>
+              <a:t>刘一勰</a:t>
+            </a:r>
+            <a:endParaRPr lang="zh-CN" altLang="en-US" sz="900" dirty="0">
+              <a:solidFill>
+                <a:srgbClr val="66727D"/>
+              </a:solidFill>
+            </a:endParaRPr>
           </a:p>
         </p:txBody>
       </p:sp>
@@ -2617,13 +2476,12 @@
             <a:avLst/>
           </a:prstGeom>
           <a:noFill/>
-          <a:ln/>
         </p:spPr>
         <p:txBody>
           <a:bodyPr wrap="square" lIns="0" tIns="0" rIns="0" bIns="0" rtlCol="0" anchor="ctr"/>
           <a:lstStyle/>
           <a:p>
-            <a:pPr algn="ctr" indent="0" marL="0">
+            <a:pPr marL="0" indent="0" algn="ctr">
               <a:buNone/>
             </a:pPr>
             <a:r>
@@ -2637,7 +2495,7 @@
             <a:endParaRPr lang="en-US" sz="1200" dirty="0"/>
           </a:p>
           <a:p>
-            <a:pPr algn="ctr" indent="0" marL="0">
+            <a:pPr marL="0" indent="0" algn="ctr">
               <a:buNone/>
             </a:pPr>
             <a:r>
@@ -2667,13 +2525,12 @@
             <a:avLst/>
           </a:prstGeom>
           <a:noFill/>
-          <a:ln/>
         </p:spPr>
         <p:txBody>
           <a:bodyPr wrap="square" lIns="0" tIns="0" rIns="0" bIns="0" rtlCol="0" anchor="ctr"/>
           <a:lstStyle/>
           <a:p>
-            <a:pPr algn="ctr" indent="0" marL="0">
+            <a:pPr marL="0" indent="0" algn="ctr">
               <a:buNone/>
             </a:pPr>
             <a:r>
@@ -2698,12 +2555,13 @@
 
 <file path=ppt/slides/slide11.xml><?xml version="1.0" encoding="utf-8"?>
 <p:sld xmlns:a="http://schemas.openxmlformats.org/drawingml/2006/main" xmlns:r="http://schemas.openxmlformats.org/officeDocument/2006/relationships" xmlns:p="http://schemas.openxmlformats.org/presentationml/2006/main">
-  <p:cSld name="Slide 11">
+  <p:cSld>
     <p:bg>
       <p:bgPr>
         <a:solidFill>
           <a:srgbClr val="F7F9FB"/>
         </a:solidFill>
+        <a:effectLst/>
       </p:bgPr>
     </p:bg>
     <p:spTree>
@@ -2760,23 +2618,22 @@
             <a:avLst/>
           </a:prstGeom>
           <a:noFill/>
-          <a:ln/>
         </p:spPr>
         <p:txBody>
           <a:bodyPr wrap="square" rtlCol="0" anchor="ctr"/>
           <a:lstStyle/>
           <a:p>
-            <a:pPr indent="0" marL="0">
-              <a:buNone/>
-            </a:pPr>
-            <a:r>
-              <a:rPr lang="en-US" sz="850" b="1" spc="120" kern="0" dirty="0">
+            <a:pPr marL="0" indent="0">
+              <a:buNone/>
+            </a:pPr>
+            <a:r>
+              <a:rPr lang="en-US" sz="850" b="1" kern="0" spc="120" dirty="0">
                 <a:solidFill>
                   <a:srgbClr val="B7192E"/>
                 </a:solidFill>
-                <a:latin typeface="Microsoft YaHei" pitchFamily="34" charset="0"/>
-                <a:ea typeface="Microsoft YaHei" pitchFamily="34" charset="-122"/>
-                <a:cs typeface="Microsoft YaHei" pitchFamily="34" charset="-120"/>
+                <a:latin typeface="微软雅黑" panose="020B0503020204020204" pitchFamily="34" charset="-122"/>
+                <a:ea typeface="微软雅黑" panose="020B0503020204020204" pitchFamily="34" charset="-122"/>
+                <a:cs typeface="微软雅黑" panose="020B0503020204020204" pitchFamily="34" charset="-120"/>
               </a:rPr>
               <a:t>Q&amp;A  答辩</a:t>
             </a:r>
@@ -2799,13 +2656,12 @@
             <a:avLst/>
           </a:prstGeom>
           <a:noFill/>
-          <a:ln/>
         </p:spPr>
         <p:txBody>
           <a:bodyPr wrap="square" lIns="0" tIns="0" rIns="0" bIns="0" rtlCol="0" anchor="ctr"/>
           <a:lstStyle/>
           <a:p>
-            <a:pPr indent="0" marL="0">
+            <a:pPr marL="0" indent="0">
               <a:buNone/>
             </a:pPr>
             <a:r>
@@ -2835,13 +2691,12 @@
             <a:avLst/>
           </a:prstGeom>
           <a:noFill/>
-          <a:ln/>
         </p:spPr>
         <p:txBody>
           <a:bodyPr wrap="square" lIns="0" tIns="0" rIns="0" bIns="0" rtlCol="0" anchor="ctr"/>
           <a:lstStyle/>
           <a:p>
-            <a:pPr indent="0" marL="0">
+            <a:pPr marL="0" indent="0">
               <a:buNone/>
             </a:pPr>
             <a:r>
@@ -2871,13 +2726,12 @@
             <a:avLst/>
           </a:prstGeom>
           <a:noFill/>
-          <a:ln/>
         </p:spPr>
         <p:txBody>
           <a:bodyPr wrap="square" lIns="0" tIns="0" rIns="0" bIns="0" rtlCol="0" anchor="ctr"/>
           <a:lstStyle/>
           <a:p>
-            <a:pPr indent="0" marL="0">
+            <a:pPr marL="0" indent="0">
               <a:buNone/>
             </a:pPr>
             <a:r>
@@ -2934,13 +2788,12 @@
             <a:avLst/>
           </a:prstGeom>
           <a:noFill/>
-          <a:ln/>
         </p:spPr>
         <p:txBody>
           <a:bodyPr wrap="square" lIns="0" tIns="0" rIns="0" bIns="0" rtlCol="0" anchor="ctr"/>
           <a:lstStyle/>
           <a:p>
-            <a:pPr indent="0" marL="0">
+            <a:pPr marL="0" indent="0">
               <a:buNone/>
             </a:pPr>
             <a:r>
@@ -2970,7 +2823,6 @@
             <a:avLst/>
           </a:prstGeom>
           <a:noFill/>
-          <a:ln/>
         </p:spPr>
         <p:txBody>
           <a:bodyPr wrap="square" lIns="0" tIns="0" rIns="0" bIns="0" rtlCol="0" anchor="ctr">
@@ -2978,7 +2830,7 @@
           </a:bodyPr>
           <a:lstStyle/>
           <a:p>
-            <a:pPr indent="0" marL="0">
+            <a:pPr marL="0" indent="0">
               <a:buNone/>
             </a:pPr>
             <a:r>
@@ -3035,13 +2887,12 @@
             <a:avLst/>
           </a:prstGeom>
           <a:noFill/>
-          <a:ln/>
         </p:spPr>
         <p:txBody>
           <a:bodyPr wrap="square" lIns="0" tIns="0" rIns="0" bIns="0" rtlCol="0" anchor="ctr"/>
           <a:lstStyle/>
           <a:p>
-            <a:pPr indent="0" marL="0">
+            <a:pPr marL="0" indent="0">
               <a:buNone/>
             </a:pPr>
             <a:r>
@@ -3071,7 +2922,6 @@
             <a:avLst/>
           </a:prstGeom>
           <a:noFill/>
-          <a:ln/>
         </p:spPr>
         <p:txBody>
           <a:bodyPr wrap="square" lIns="0" tIns="0" rIns="0" bIns="0" rtlCol="0" anchor="ctr">
@@ -3079,7 +2929,7 @@
           </a:bodyPr>
           <a:lstStyle/>
           <a:p>
-            <a:pPr indent="0" marL="0">
+            <a:pPr marL="0" indent="0">
               <a:buNone/>
             </a:pPr>
             <a:r>
@@ -3136,13 +2986,12 @@
             <a:avLst/>
           </a:prstGeom>
           <a:noFill/>
-          <a:ln/>
         </p:spPr>
         <p:txBody>
           <a:bodyPr wrap="square" lIns="0" tIns="0" rIns="0" bIns="0" rtlCol="0" anchor="ctr"/>
           <a:lstStyle/>
           <a:p>
-            <a:pPr indent="0" marL="0">
+            <a:pPr marL="0" indent="0">
               <a:buNone/>
             </a:pPr>
             <a:r>
@@ -3172,7 +3021,6 @@
             <a:avLst/>
           </a:prstGeom>
           <a:noFill/>
-          <a:ln/>
         </p:spPr>
         <p:txBody>
           <a:bodyPr wrap="square" lIns="0" tIns="0" rIns="0" bIns="0" rtlCol="0" anchor="ctr">
@@ -3180,7 +3028,7 @@
           </a:bodyPr>
           <a:lstStyle/>
           <a:p>
-            <a:pPr indent="0" marL="0">
+            <a:pPr marL="0" indent="0">
               <a:buNone/>
             </a:pPr>
             <a:r>
@@ -3237,13 +3085,12 @@
             <a:avLst/>
           </a:prstGeom>
           <a:noFill/>
-          <a:ln/>
         </p:spPr>
         <p:txBody>
           <a:bodyPr wrap="square" lIns="0" tIns="0" rIns="0" bIns="0" rtlCol="0" anchor="ctr"/>
           <a:lstStyle/>
           <a:p>
-            <a:pPr indent="0" marL="0">
+            <a:pPr marL="0" indent="0">
               <a:buNone/>
             </a:pPr>
             <a:r>
@@ -3273,7 +3120,6 @@
             <a:avLst/>
           </a:prstGeom>
           <a:noFill/>
-          <a:ln/>
         </p:spPr>
         <p:txBody>
           <a:bodyPr wrap="square" lIns="0" tIns="0" rIns="0" bIns="0" rtlCol="0" anchor="ctr">
@@ -3281,7 +3127,7 @@
           </a:bodyPr>
           <a:lstStyle/>
           <a:p>
-            <a:pPr indent="0" marL="0">
+            <a:pPr marL="0" indent="0">
               <a:buNone/>
             </a:pPr>
             <a:r>
@@ -3338,13 +3184,12 @@
             <a:avLst/>
           </a:prstGeom>
           <a:noFill/>
-          <a:ln/>
         </p:spPr>
         <p:txBody>
           <a:bodyPr wrap="square" lIns="0" tIns="0" rIns="0" bIns="0" rtlCol="0" anchor="ctr"/>
           <a:lstStyle/>
           <a:p>
-            <a:pPr indent="0" marL="0">
+            <a:pPr marL="0" indent="0">
               <a:buNone/>
             </a:pPr>
             <a:r>
@@ -3374,7 +3219,6 @@
             <a:avLst/>
           </a:prstGeom>
           <a:noFill/>
-          <a:ln/>
         </p:spPr>
         <p:txBody>
           <a:bodyPr wrap="square" lIns="0" tIns="0" rIns="0" bIns="0" rtlCol="0" anchor="ctr">
@@ -3382,7 +3226,7 @@
           </a:bodyPr>
           <a:lstStyle/>
           <a:p>
-            <a:pPr indent="0" marL="0">
+            <a:pPr marL="0" indent="0">
               <a:buNone/>
             </a:pPr>
             <a:r>
@@ -3439,13 +3283,12 @@
             <a:avLst/>
           </a:prstGeom>
           <a:noFill/>
-          <a:ln/>
         </p:spPr>
         <p:txBody>
           <a:bodyPr wrap="square" lIns="0" tIns="0" rIns="0" bIns="0" rtlCol="0" anchor="ctr"/>
           <a:lstStyle/>
           <a:p>
-            <a:pPr indent="0" marL="0">
+            <a:pPr marL="0" indent="0">
               <a:buNone/>
             </a:pPr>
             <a:r>
@@ -3475,7 +3318,6 @@
             <a:avLst/>
           </a:prstGeom>
           <a:noFill/>
-          <a:ln/>
         </p:spPr>
         <p:txBody>
           <a:bodyPr wrap="square" lIns="0" tIns="0" rIns="0" bIns="0" rtlCol="0" anchor="ctr">
@@ -3483,7 +3325,7 @@
           </a:bodyPr>
           <a:lstStyle/>
           <a:p>
-            <a:pPr indent="0" marL="0">
+            <a:pPr marL="0" indent="0">
               <a:buNone/>
             </a:pPr>
             <a:r>
@@ -3513,13 +3355,12 @@
             <a:avLst/>
           </a:prstGeom>
           <a:noFill/>
-          <a:ln/>
         </p:spPr>
         <p:txBody>
           <a:bodyPr wrap="square" lIns="0" tIns="0" rIns="0" bIns="0" rtlCol="0" anchor="ctr"/>
           <a:lstStyle/>
           <a:p>
-            <a:pPr algn="ctr" indent="0" marL="0">
+            <a:pPr marL="0" indent="0" algn="ctr">
               <a:buNone/>
             </a:pPr>
             <a:r>
@@ -3544,12 +3385,13 @@
 
 <file path=ppt/slides/slide2.xml><?xml version="1.0" encoding="utf-8"?>
 <p:sld xmlns:a="http://schemas.openxmlformats.org/drawingml/2006/main" xmlns:r="http://schemas.openxmlformats.org/officeDocument/2006/relationships" xmlns:p="http://schemas.openxmlformats.org/presentationml/2006/main">
-  <p:cSld name="Slide 2">
+  <p:cSld>
     <p:bg>
       <p:bgPr>
         <a:solidFill>
           <a:srgbClr val="F7F9FB"/>
         </a:solidFill>
+        <a:effectLst/>
       </p:bgPr>
     </p:bg>
     <p:spTree>
@@ -3606,23 +3448,22 @@
             <a:avLst/>
           </a:prstGeom>
           <a:noFill/>
-          <a:ln/>
         </p:spPr>
         <p:txBody>
           <a:bodyPr wrap="square" rtlCol="0" anchor="ctr"/>
           <a:lstStyle/>
           <a:p>
-            <a:pPr indent="0" marL="0">
-              <a:buNone/>
-            </a:pPr>
-            <a:r>
-              <a:rPr lang="en-US" sz="850" b="1" spc="120" kern="0" dirty="0">
+            <a:pPr marL="0" indent="0">
+              <a:buNone/>
+            </a:pPr>
+            <a:r>
+              <a:rPr lang="en-US" sz="850" b="1" kern="0" spc="120" dirty="0">
                 <a:solidFill>
                   <a:srgbClr val="B7192E"/>
                 </a:solidFill>
-                <a:latin typeface="Microsoft YaHei" pitchFamily="34" charset="0"/>
-                <a:ea typeface="Microsoft YaHei" pitchFamily="34" charset="-122"/>
-                <a:cs typeface="Microsoft YaHei" pitchFamily="34" charset="-120"/>
+                <a:latin typeface="微软雅黑" panose="020B0503020204020204" pitchFamily="34" charset="-122"/>
+                <a:ea typeface="微软雅黑" panose="020B0503020204020204" pitchFamily="34" charset="-122"/>
+                <a:cs typeface="微软雅黑" panose="020B0503020204020204" pitchFamily="34" charset="-120"/>
               </a:rPr>
               <a:t>01  实习内容</a:t>
             </a:r>
@@ -3645,13 +3486,12 @@
             <a:avLst/>
           </a:prstGeom>
           <a:noFill/>
-          <a:ln/>
         </p:spPr>
         <p:txBody>
           <a:bodyPr wrap="square" lIns="0" tIns="0" rIns="0" bIns="0" rtlCol="0" anchor="ctr"/>
           <a:lstStyle/>
           <a:p>
-            <a:pPr indent="0" marL="0">
+            <a:pPr marL="0" indent="0">
               <a:buNone/>
             </a:pPr>
             <a:r>
@@ -3681,13 +3521,12 @@
             <a:avLst/>
           </a:prstGeom>
           <a:noFill/>
-          <a:ln/>
         </p:spPr>
         <p:txBody>
           <a:bodyPr wrap="square" lIns="0" tIns="0" rIns="0" bIns="0" rtlCol="0" anchor="ctr"/>
           <a:lstStyle/>
           <a:p>
-            <a:pPr indent="0" marL="0">
+            <a:pPr marL="0" indent="0">
               <a:buNone/>
             </a:pPr>
             <a:r>
@@ -3717,13 +3556,12 @@
             <a:avLst/>
           </a:prstGeom>
           <a:noFill/>
-          <a:ln/>
         </p:spPr>
         <p:txBody>
           <a:bodyPr wrap="square" lIns="0" tIns="0" rIns="0" bIns="0" rtlCol="0" anchor="ctr"/>
           <a:lstStyle/>
           <a:p>
-            <a:pPr indent="0" marL="0">
+            <a:pPr marL="0" indent="0">
               <a:buNone/>
             </a:pPr>
             <a:r>
@@ -3805,13 +3643,12 @@
             <a:avLst/>
           </a:prstGeom>
           <a:noFill/>
-          <a:ln/>
         </p:spPr>
         <p:txBody>
           <a:bodyPr wrap="square" lIns="0" tIns="0" rIns="0" bIns="0" rtlCol="0" anchor="ctr"/>
           <a:lstStyle/>
           <a:p>
-            <a:pPr indent="0" marL="0">
+            <a:pPr marL="0" indent="0">
               <a:buNone/>
             </a:pPr>
             <a:r>
@@ -3841,13 +3678,12 @@
             <a:avLst/>
           </a:prstGeom>
           <a:noFill/>
-          <a:ln/>
         </p:spPr>
         <p:txBody>
           <a:bodyPr wrap="square" lIns="0" tIns="0" rIns="0" bIns="0" rtlCol="0" anchor="ctr"/>
           <a:lstStyle/>
           <a:p>
-            <a:pPr indent="0" marL="0">
+            <a:pPr marL="0" indent="0">
               <a:buNone/>
             </a:pPr>
             <a:r>
@@ -3877,13 +3713,12 @@
             <a:avLst/>
           </a:prstGeom>
           <a:noFill/>
-          <a:ln/>
         </p:spPr>
         <p:txBody>
           <a:bodyPr wrap="square" lIns="254" tIns="254" rIns="254" bIns="254" rtlCol="0" anchor="ctr"/>
           <a:lstStyle/>
           <a:p>
-            <a:pPr indent="0" marL="0">
+            <a:pPr marL="0" indent="0">
               <a:buNone/>
             </a:pPr>
             <a:r>
@@ -3897,7 +3732,7 @@
             <a:endParaRPr lang="en-US" sz="1350" dirty="0"/>
           </a:p>
           <a:p>
-            <a:pPr indent="0" marL="0">
+            <a:pPr marL="0" indent="0">
               <a:buNone/>
             </a:pPr>
             <a:r>
@@ -3911,7 +3746,7 @@
             <a:endParaRPr lang="en-US" sz="1350" dirty="0"/>
           </a:p>
           <a:p>
-            <a:pPr indent="0" marL="0">
+            <a:pPr marL="0" indent="0">
               <a:buNone/>
             </a:pPr>
             <a:r>
@@ -3925,7 +3760,7 @@
             <a:endParaRPr lang="en-US" sz="1350" dirty="0"/>
           </a:p>
           <a:p>
-            <a:pPr indent="0" marL="0">
+            <a:pPr marL="0" indent="0">
               <a:buNone/>
             </a:pPr>
             <a:r>
@@ -3978,13 +3813,12 @@
             <a:avLst/>
           </a:prstGeom>
           <a:noFill/>
-          <a:ln/>
         </p:spPr>
         <p:txBody>
           <a:bodyPr wrap="square" lIns="254" tIns="254" rIns="254" bIns="254" rtlCol="0" anchor="ctr"/>
           <a:lstStyle/>
           <a:p>
-            <a:pPr indent="0" marL="0">
+            <a:pPr marL="0" indent="0">
               <a:buNone/>
             </a:pPr>
             <a:r>
@@ -4066,13 +3900,12 @@
             <a:avLst/>
           </a:prstGeom>
           <a:noFill/>
-          <a:ln/>
         </p:spPr>
         <p:txBody>
           <a:bodyPr wrap="square" lIns="0" tIns="0" rIns="0" bIns="0" rtlCol="0" anchor="ctr"/>
           <a:lstStyle/>
           <a:p>
-            <a:pPr indent="0" marL="0">
+            <a:pPr marL="0" indent="0">
               <a:buNone/>
             </a:pPr>
             <a:r>
@@ -4102,13 +3935,12 @@
             <a:avLst/>
           </a:prstGeom>
           <a:noFill/>
-          <a:ln/>
         </p:spPr>
         <p:txBody>
           <a:bodyPr wrap="square" lIns="0" tIns="0" rIns="0" bIns="0" rtlCol="0" anchor="ctr"/>
           <a:lstStyle/>
           <a:p>
-            <a:pPr indent="0" marL="0">
+            <a:pPr marL="0" indent="0">
               <a:buNone/>
             </a:pPr>
             <a:r>
@@ -4138,13 +3970,12 @@
             <a:avLst/>
           </a:prstGeom>
           <a:noFill/>
-          <a:ln/>
         </p:spPr>
         <p:txBody>
           <a:bodyPr wrap="square" lIns="254" tIns="254" rIns="254" bIns="254" rtlCol="0" anchor="ctr"/>
           <a:lstStyle/>
           <a:p>
-            <a:pPr indent="0" marL="0">
+            <a:pPr marL="0" indent="0">
               <a:buNone/>
             </a:pPr>
             <a:r>
@@ -4158,7 +3989,7 @@
             <a:endParaRPr lang="en-US" sz="1500" dirty="0"/>
           </a:p>
           <a:p>
-            <a:pPr indent="0" marL="0">
+            <a:pPr marL="0" indent="0">
               <a:buNone/>
             </a:pPr>
             <a:r>
@@ -4211,13 +4042,12 @@
             <a:avLst/>
           </a:prstGeom>
           <a:noFill/>
-          <a:ln/>
         </p:spPr>
         <p:txBody>
           <a:bodyPr wrap="square" lIns="254" tIns="254" rIns="254" bIns="254" rtlCol="0" anchor="ctr"/>
           <a:lstStyle/>
           <a:p>
-            <a:pPr indent="0" marL="0">
+            <a:pPr marL="0" indent="0">
               <a:buNone/>
             </a:pPr>
             <a:r>
@@ -4231,7 +4061,7 @@
             <a:endParaRPr lang="en-US" sz="1050" dirty="0"/>
           </a:p>
           <a:p>
-            <a:pPr indent="0" marL="0">
+            <a:pPr marL="0" indent="0">
               <a:buNone/>
             </a:pPr>
             <a:r>
@@ -4313,13 +4143,12 @@
             <a:avLst/>
           </a:prstGeom>
           <a:noFill/>
-          <a:ln/>
         </p:spPr>
         <p:txBody>
           <a:bodyPr wrap="square" lIns="0" tIns="0" rIns="0" bIns="0" rtlCol="0" anchor="ctr"/>
           <a:lstStyle/>
           <a:p>
-            <a:pPr indent="0" marL="0">
+            <a:pPr marL="0" indent="0">
               <a:buNone/>
             </a:pPr>
             <a:r>
@@ -4349,13 +4178,12 @@
             <a:avLst/>
           </a:prstGeom>
           <a:noFill/>
-          <a:ln/>
         </p:spPr>
         <p:txBody>
           <a:bodyPr wrap="square" lIns="0" tIns="0" rIns="0" bIns="0" rtlCol="0" anchor="ctr"/>
           <a:lstStyle/>
           <a:p>
-            <a:pPr indent="0" marL="0">
+            <a:pPr marL="0" indent="0">
               <a:buNone/>
             </a:pPr>
             <a:r>
@@ -4385,13 +4213,12 @@
             <a:avLst/>
           </a:prstGeom>
           <a:noFill/>
-          <a:ln/>
         </p:spPr>
         <p:txBody>
           <a:bodyPr wrap="square" lIns="254" tIns="254" rIns="254" bIns="254" rtlCol="0" anchor="ctr"/>
           <a:lstStyle/>
           <a:p>
-            <a:pPr indent="0" marL="0">
+            <a:pPr marL="0" indent="0">
               <a:buNone/>
             </a:pPr>
             <a:r>
@@ -4405,7 +4232,7 @@
             <a:endParaRPr lang="en-US" sz="1350" dirty="0"/>
           </a:p>
           <a:p>
-            <a:pPr indent="0" marL="0">
+            <a:pPr marL="0" indent="0">
               <a:buNone/>
             </a:pPr>
             <a:r>
@@ -4419,7 +4246,7 @@
             <a:endParaRPr lang="en-US" sz="1350" dirty="0"/>
           </a:p>
           <a:p>
-            <a:pPr indent="0" marL="0">
+            <a:pPr marL="0" indent="0">
               <a:buNone/>
             </a:pPr>
             <a:r>
@@ -4433,7 +4260,7 @@
             <a:endParaRPr lang="en-US" sz="1350" dirty="0"/>
           </a:p>
           <a:p>
-            <a:pPr indent="0" marL="0">
+            <a:pPr marL="0" indent="0">
               <a:buNone/>
             </a:pPr>
             <a:r>
@@ -4486,13 +4313,12 @@
             <a:avLst/>
           </a:prstGeom>
           <a:noFill/>
-          <a:ln/>
         </p:spPr>
         <p:txBody>
           <a:bodyPr wrap="square" lIns="254" tIns="254" rIns="254" bIns="254" rtlCol="0" anchor="ctr"/>
           <a:lstStyle/>
           <a:p>
-            <a:pPr indent="0" marL="0">
+            <a:pPr marL="0" indent="0">
               <a:buNone/>
             </a:pPr>
             <a:r>
@@ -4522,13 +4348,12 @@
             <a:avLst/>
           </a:prstGeom>
           <a:noFill/>
-          <a:ln/>
         </p:spPr>
         <p:txBody>
           <a:bodyPr wrap="square" lIns="0" tIns="0" rIns="0" bIns="0" rtlCol="0" anchor="ctr"/>
           <a:lstStyle/>
           <a:p>
-            <a:pPr algn="ctr" indent="0" marL="0">
+            <a:pPr marL="0" indent="0" algn="ctr">
               <a:buNone/>
             </a:pPr>
             <a:r>
@@ -4553,12 +4378,13 @@
 
 <file path=ppt/slides/slide3.xml><?xml version="1.0" encoding="utf-8"?>
 <p:sld xmlns:a="http://schemas.openxmlformats.org/drawingml/2006/main" xmlns:r="http://schemas.openxmlformats.org/officeDocument/2006/relationships" xmlns:p="http://schemas.openxmlformats.org/presentationml/2006/main">
-  <p:cSld name="Slide 3">
+  <p:cSld>
     <p:bg>
       <p:bgPr>
         <a:solidFill>
           <a:srgbClr val="F7F9FB"/>
         </a:solidFill>
+        <a:effectLst/>
       </p:bgPr>
     </p:bg>
     <p:spTree>
@@ -4615,23 +4441,22 @@
             <a:avLst/>
           </a:prstGeom>
           <a:noFill/>
-          <a:ln/>
         </p:spPr>
         <p:txBody>
           <a:bodyPr wrap="square" rtlCol="0" anchor="ctr"/>
           <a:lstStyle/>
           <a:p>
-            <a:pPr indent="0" marL="0">
-              <a:buNone/>
-            </a:pPr>
-            <a:r>
-              <a:rPr lang="en-US" sz="850" b="1" spc="120" kern="0" dirty="0">
+            <a:pPr marL="0" indent="0">
+              <a:buNone/>
+            </a:pPr>
+            <a:r>
+              <a:rPr lang="en-US" sz="850" b="1" kern="0" spc="120" dirty="0">
                 <a:solidFill>
                   <a:srgbClr val="B7192E"/>
                 </a:solidFill>
-                <a:latin typeface="Microsoft YaHei" pitchFamily="34" charset="0"/>
-                <a:ea typeface="Microsoft YaHei" pitchFamily="34" charset="-122"/>
-                <a:cs typeface="Microsoft YaHei" pitchFamily="34" charset="-120"/>
+                <a:latin typeface="微软雅黑" panose="020B0503020204020204" pitchFamily="34" charset="-122"/>
+                <a:ea typeface="微软雅黑" panose="020B0503020204020204" pitchFamily="34" charset="-122"/>
+                <a:cs typeface="微软雅黑" panose="020B0503020204020204" pitchFamily="34" charset="-120"/>
               </a:rPr>
               <a:t>02  核心项目</a:t>
             </a:r>
@@ -4654,13 +4479,12 @@
             <a:avLst/>
           </a:prstGeom>
           <a:noFill/>
-          <a:ln/>
         </p:spPr>
         <p:txBody>
           <a:bodyPr wrap="square" lIns="0" tIns="0" rIns="0" bIns="0" rtlCol="0" anchor="ctr"/>
           <a:lstStyle/>
           <a:p>
-            <a:pPr indent="0" marL="0">
+            <a:pPr marL="0" indent="0">
               <a:buNone/>
             </a:pPr>
             <a:r>
@@ -4690,13 +4514,12 @@
             <a:avLst/>
           </a:prstGeom>
           <a:noFill/>
-          <a:ln/>
         </p:spPr>
         <p:txBody>
           <a:bodyPr wrap="square" lIns="0" tIns="0" rIns="0" bIns="0" rtlCol="0" anchor="ctr"/>
           <a:lstStyle/>
           <a:p>
-            <a:pPr indent="0" marL="0">
+            <a:pPr marL="0" indent="0">
               <a:buNone/>
             </a:pPr>
             <a:r>
@@ -4726,13 +4549,12 @@
             <a:avLst/>
           </a:prstGeom>
           <a:noFill/>
-          <a:ln/>
         </p:spPr>
         <p:txBody>
           <a:bodyPr wrap="square" lIns="0" tIns="0" rIns="0" bIns="0" rtlCol="0" anchor="ctr"/>
           <a:lstStyle/>
           <a:p>
-            <a:pPr indent="0" marL="0">
+            <a:pPr marL="0" indent="0">
               <a:buNone/>
             </a:pPr>
             <a:r>
@@ -4789,13 +4611,12 @@
             <a:avLst/>
           </a:prstGeom>
           <a:noFill/>
-          <a:ln/>
         </p:spPr>
         <p:txBody>
           <a:bodyPr wrap="square" lIns="0" tIns="0" rIns="0" bIns="0" rtlCol="0" anchor="ctr"/>
           <a:lstStyle/>
           <a:p>
-            <a:pPr indent="0" marL="0">
+            <a:pPr marL="0" indent="0">
               <a:buNone/>
             </a:pPr>
             <a:r>
@@ -4825,13 +4646,12 @@
             <a:avLst/>
           </a:prstGeom>
           <a:noFill/>
-          <a:ln/>
         </p:spPr>
         <p:txBody>
           <a:bodyPr wrap="square" lIns="0" tIns="0" rIns="0" bIns="0" rtlCol="0" anchor="ctr"/>
           <a:lstStyle/>
           <a:p>
-            <a:pPr indent="0" marL="0">
+            <a:pPr marL="0" indent="0">
               <a:buNone/>
             </a:pPr>
             <a:r>
@@ -4861,13 +4681,12 @@
             <a:avLst/>
           </a:prstGeom>
           <a:noFill/>
-          <a:ln/>
         </p:spPr>
         <p:txBody>
           <a:bodyPr wrap="square" lIns="254" tIns="254" rIns="254" bIns="254" rtlCol="0" anchor="ctr"/>
           <a:lstStyle/>
           <a:p>
-            <a:pPr indent="0" marL="0">
+            <a:pPr marL="0" indent="0">
               <a:buNone/>
             </a:pPr>
             <a:r>
@@ -4924,13 +4743,12 @@
             <a:avLst/>
           </a:prstGeom>
           <a:noFill/>
-          <a:ln/>
         </p:spPr>
         <p:txBody>
           <a:bodyPr wrap="square" lIns="254" tIns="254" rIns="254" bIns="254" rtlCol="0" anchor="ctr"/>
           <a:lstStyle/>
           <a:p>
-            <a:pPr indent="0" marL="0">
+            <a:pPr marL="0" indent="0">
               <a:buNone/>
             </a:pPr>
             <a:r>
@@ -4987,13 +4805,12 @@
             <a:avLst/>
           </a:prstGeom>
           <a:noFill/>
-          <a:ln/>
         </p:spPr>
         <p:txBody>
           <a:bodyPr wrap="square" lIns="0" tIns="0" rIns="0" bIns="0" rtlCol="0" anchor="ctr"/>
           <a:lstStyle/>
           <a:p>
-            <a:pPr indent="0" marL="0">
+            <a:pPr marL="0" indent="0">
               <a:buNone/>
             </a:pPr>
             <a:r>
@@ -5023,13 +4840,12 @@
             <a:avLst/>
           </a:prstGeom>
           <a:noFill/>
-          <a:ln/>
         </p:spPr>
         <p:txBody>
           <a:bodyPr wrap="square" lIns="0" tIns="0" rIns="0" bIns="0" rtlCol="0" anchor="ctr"/>
           <a:lstStyle/>
           <a:p>
-            <a:pPr indent="0" marL="0">
+            <a:pPr marL="0" indent="0">
               <a:buNone/>
             </a:pPr>
             <a:r>
@@ -5059,13 +4875,12 @@
             <a:avLst/>
           </a:prstGeom>
           <a:noFill/>
-          <a:ln/>
         </p:spPr>
         <p:txBody>
           <a:bodyPr wrap="square" lIns="254" tIns="254" rIns="254" bIns="254" rtlCol="0" anchor="ctr"/>
           <a:lstStyle/>
           <a:p>
-            <a:pPr indent="0" marL="0">
+            <a:pPr marL="0" indent="0">
               <a:buNone/>
             </a:pPr>
             <a:r>
@@ -5122,13 +4937,12 @@
             <a:avLst/>
           </a:prstGeom>
           <a:noFill/>
-          <a:ln/>
         </p:spPr>
         <p:txBody>
           <a:bodyPr wrap="square" lIns="254" tIns="254" rIns="254" bIns="254" rtlCol="0" anchor="ctr"/>
           <a:lstStyle/>
           <a:p>
-            <a:pPr indent="0" marL="0">
+            <a:pPr marL="0" indent="0">
               <a:buNone/>
             </a:pPr>
             <a:r>
@@ -5185,13 +4999,12 @@
             <a:avLst/>
           </a:prstGeom>
           <a:noFill/>
-          <a:ln/>
         </p:spPr>
         <p:txBody>
           <a:bodyPr wrap="square" lIns="0" tIns="0" rIns="0" bIns="0" rtlCol="0" anchor="ctr"/>
           <a:lstStyle/>
           <a:p>
-            <a:pPr indent="0" marL="0">
+            <a:pPr marL="0" indent="0">
               <a:buNone/>
             </a:pPr>
             <a:r>
@@ -5221,13 +5034,12 @@
             <a:avLst/>
           </a:prstGeom>
           <a:noFill/>
-          <a:ln/>
         </p:spPr>
         <p:txBody>
           <a:bodyPr wrap="square" lIns="0" tIns="0" rIns="0" bIns="0" rtlCol="0" anchor="ctr"/>
           <a:lstStyle/>
           <a:p>
-            <a:pPr indent="0" marL="0">
+            <a:pPr marL="0" indent="0">
               <a:buNone/>
             </a:pPr>
             <a:r>
@@ -5257,13 +5069,12 @@
             <a:avLst/>
           </a:prstGeom>
           <a:noFill/>
-          <a:ln/>
         </p:spPr>
         <p:txBody>
           <a:bodyPr wrap="square" lIns="254" tIns="254" rIns="254" bIns="254" rtlCol="0" anchor="ctr"/>
           <a:lstStyle/>
           <a:p>
-            <a:pPr indent="0" marL="0">
+            <a:pPr marL="0" indent="0">
               <a:buNone/>
             </a:pPr>
             <a:r>
@@ -5320,13 +5131,12 @@
             <a:avLst/>
           </a:prstGeom>
           <a:noFill/>
-          <a:ln/>
         </p:spPr>
         <p:txBody>
           <a:bodyPr wrap="square" lIns="254" tIns="254" rIns="254" bIns="254" rtlCol="0" anchor="ctr"/>
           <a:lstStyle/>
           <a:p>
-            <a:pPr indent="0" marL="0">
+            <a:pPr marL="0" indent="0">
               <a:buNone/>
             </a:pPr>
             <a:r>
@@ -5356,13 +5166,12 @@
             <a:avLst/>
           </a:prstGeom>
           <a:noFill/>
-          <a:ln/>
         </p:spPr>
         <p:txBody>
           <a:bodyPr wrap="square" lIns="0" tIns="0" rIns="0" bIns="0" rtlCol="0" anchor="ctr"/>
           <a:lstStyle/>
           <a:p>
-            <a:pPr indent="0" marL="0">
+            <a:pPr marL="0" indent="0">
               <a:buNone/>
             </a:pPr>
             <a:r>
@@ -5412,31 +5221,34 @@
         </p:nvSpPr>
         <p:spPr>
           <a:xfrm>
-            <a:off x="4983480" y="5678424"/>
+            <a:off x="4983480" y="5697474"/>
             <a:ext cx="1115568" cy="146304"/>
           </a:xfrm>
           <a:prstGeom prst="rect">
             <a:avLst/>
           </a:prstGeom>
           <a:noFill/>
-          <a:ln/>
         </p:spPr>
         <p:txBody>
           <a:bodyPr wrap="square" lIns="0" tIns="0" rIns="0" bIns="0" rtlCol="0" anchor="ctr"/>
           <a:lstStyle/>
           <a:p>
-            <a:pPr algn="ctr" indent="0" marL="0">
-              <a:buNone/>
-            </a:pPr>
-            <a:r>
-              <a:rPr lang="en-US" sz="720" b="1" dirty="0">
+            <a:pPr marL="0" indent="0" algn="ctr">
+              <a:buNone/>
+            </a:pPr>
+            <a:r>
+              <a:rPr lang="en-US" sz="1400" b="1" dirty="0">
                 <a:solidFill>
                   <a:srgbClr val="FFFFFF"/>
                 </a:solidFill>
               </a:rPr>
               <a:t>可观测</a:t>
             </a:r>
-            <a:endParaRPr lang="en-US" sz="720" dirty="0"/>
+            <a:endParaRPr lang="en-US" sz="1400" b="1" dirty="0">
+              <a:solidFill>
+                <a:srgbClr val="FFFFFF"/>
+              </a:solidFill>
+            </a:endParaRPr>
           </a:p>
         </p:txBody>
       </p:sp>
@@ -5475,31 +5287,34 @@
         </p:nvSpPr>
         <p:spPr>
           <a:xfrm>
-            <a:off x="6400800" y="5678424"/>
+            <a:off x="6400800" y="5697474"/>
             <a:ext cx="1115568" cy="146304"/>
           </a:xfrm>
           <a:prstGeom prst="rect">
             <a:avLst/>
           </a:prstGeom>
           <a:noFill/>
-          <a:ln/>
         </p:spPr>
         <p:txBody>
           <a:bodyPr wrap="square" lIns="0" tIns="0" rIns="0" bIns="0" rtlCol="0" anchor="ctr"/>
           <a:lstStyle/>
           <a:p>
-            <a:pPr algn="ctr" indent="0" marL="0">
-              <a:buNone/>
-            </a:pPr>
-            <a:r>
-              <a:rPr lang="en-US" sz="720" b="1" dirty="0">
+            <a:pPr marL="0" indent="0" algn="ctr">
+              <a:buNone/>
+            </a:pPr>
+            <a:r>
+              <a:rPr lang="en-US" sz="1400" b="1" dirty="0">
                 <a:solidFill>
                   <a:srgbClr val="FFFFFF"/>
                 </a:solidFill>
               </a:rPr>
               <a:t>可评价</a:t>
             </a:r>
-            <a:endParaRPr lang="en-US" sz="720" dirty="0"/>
+            <a:endParaRPr lang="en-US" sz="1400" b="1" dirty="0">
+              <a:solidFill>
+                <a:srgbClr val="FFFFFF"/>
+              </a:solidFill>
+            </a:endParaRPr>
           </a:p>
         </p:txBody>
       </p:sp>
@@ -5538,31 +5353,34 @@
         </p:nvSpPr>
         <p:spPr>
           <a:xfrm>
-            <a:off x="7818120" y="5678424"/>
+            <a:off x="7818120" y="5697474"/>
             <a:ext cx="1115568" cy="146304"/>
           </a:xfrm>
           <a:prstGeom prst="rect">
             <a:avLst/>
           </a:prstGeom>
           <a:noFill/>
-          <a:ln/>
         </p:spPr>
         <p:txBody>
           <a:bodyPr wrap="square" lIns="0" tIns="0" rIns="0" bIns="0" rtlCol="0" anchor="ctr"/>
           <a:lstStyle/>
           <a:p>
-            <a:pPr algn="ctr" indent="0" marL="0">
-              <a:buNone/>
-            </a:pPr>
-            <a:r>
-              <a:rPr lang="en-US" sz="720" b="1" dirty="0">
+            <a:pPr marL="0" indent="0" algn="ctr">
+              <a:buNone/>
+            </a:pPr>
+            <a:r>
+              <a:rPr lang="en-US" sz="1400" b="1" dirty="0">
                 <a:solidFill>
                   <a:srgbClr val="FFFFFF"/>
                 </a:solidFill>
               </a:rPr>
               <a:t>可择优</a:t>
             </a:r>
-            <a:endParaRPr lang="en-US" sz="720" dirty="0"/>
+            <a:endParaRPr lang="en-US" sz="1400" b="1" dirty="0">
+              <a:solidFill>
+                <a:srgbClr val="FFFFFF"/>
+              </a:solidFill>
+            </a:endParaRPr>
           </a:p>
         </p:txBody>
       </p:sp>
@@ -5576,12 +5394,13 @@
 
 <file path=ppt/slides/slide4.xml><?xml version="1.0" encoding="utf-8"?>
 <p:sld xmlns:a="http://schemas.openxmlformats.org/drawingml/2006/main" xmlns:r="http://schemas.openxmlformats.org/officeDocument/2006/relationships" xmlns:p="http://schemas.openxmlformats.org/presentationml/2006/main">
-  <p:cSld name="Slide 4">
+  <p:cSld>
     <p:bg>
       <p:bgPr>
         <a:solidFill>
           <a:srgbClr val="F7F9FB"/>
         </a:solidFill>
+        <a:effectLst/>
       </p:bgPr>
     </p:bg>
     <p:spTree>
@@ -5638,23 +5457,22 @@
             <a:avLst/>
           </a:prstGeom>
           <a:noFill/>
-          <a:ln/>
         </p:spPr>
         <p:txBody>
           <a:bodyPr wrap="square" rtlCol="0" anchor="ctr"/>
           <a:lstStyle/>
           <a:p>
-            <a:pPr indent="0" marL="0">
-              <a:buNone/>
-            </a:pPr>
-            <a:r>
-              <a:rPr lang="en-US" sz="850" b="1" spc="120" kern="0" dirty="0">
+            <a:pPr marL="0" indent="0">
+              <a:buNone/>
+            </a:pPr>
+            <a:r>
+              <a:rPr lang="en-US" sz="850" b="1" kern="0" spc="120" dirty="0">
                 <a:solidFill>
                   <a:srgbClr val="B7192E"/>
                 </a:solidFill>
-                <a:latin typeface="Microsoft YaHei" pitchFamily="34" charset="0"/>
-                <a:ea typeface="Microsoft YaHei" pitchFamily="34" charset="-122"/>
-                <a:cs typeface="Microsoft YaHei" pitchFamily="34" charset="-120"/>
+                <a:latin typeface="微软雅黑" panose="020B0503020204020204" pitchFamily="34" charset="-122"/>
+                <a:ea typeface="微软雅黑" panose="020B0503020204020204" pitchFamily="34" charset="-122"/>
+                <a:cs typeface="微软雅黑" panose="020B0503020204020204" pitchFamily="34" charset="-120"/>
               </a:rPr>
               <a:t>02  核心项目</a:t>
             </a:r>
@@ -5677,13 +5495,12 @@
             <a:avLst/>
           </a:prstGeom>
           <a:noFill/>
-          <a:ln/>
         </p:spPr>
         <p:txBody>
           <a:bodyPr wrap="square" lIns="0" tIns="0" rIns="0" bIns="0" rtlCol="0" anchor="ctr"/>
           <a:lstStyle/>
           <a:p>
-            <a:pPr indent="0" marL="0">
+            <a:pPr marL="0" indent="0">
               <a:buNone/>
             </a:pPr>
             <a:r>
@@ -5713,13 +5530,12 @@
             <a:avLst/>
           </a:prstGeom>
           <a:noFill/>
-          <a:ln/>
         </p:spPr>
         <p:txBody>
           <a:bodyPr wrap="square" lIns="0" tIns="0" rIns="0" bIns="0" rtlCol="0" anchor="ctr"/>
           <a:lstStyle/>
           <a:p>
-            <a:pPr indent="0" marL="0">
+            <a:pPr marL="0" indent="0">
               <a:buNone/>
             </a:pPr>
             <a:r>
@@ -5749,13 +5565,12 @@
             <a:avLst/>
           </a:prstGeom>
           <a:noFill/>
-          <a:ln/>
         </p:spPr>
         <p:txBody>
           <a:bodyPr wrap="square" lIns="0" tIns="0" rIns="0" bIns="0" rtlCol="0" anchor="ctr"/>
           <a:lstStyle/>
           <a:p>
-            <a:pPr indent="0" marL="0">
+            <a:pPr marL="0" indent="0">
               <a:buNone/>
             </a:pPr>
             <a:r>
@@ -5812,13 +5627,12 @@
             <a:avLst/>
           </a:prstGeom>
           <a:noFill/>
-          <a:ln/>
         </p:spPr>
         <p:txBody>
           <a:bodyPr wrap="square" lIns="0" tIns="0" rIns="0" bIns="0" rtlCol="0" anchor="ctr"/>
           <a:lstStyle/>
           <a:p>
-            <a:pPr algn="ctr" indent="0" marL="0">
+            <a:pPr marL="0" indent="0" algn="ctr">
               <a:buNone/>
             </a:pPr>
             <a:r>
@@ -5875,13 +5689,12 @@
             <a:avLst/>
           </a:prstGeom>
           <a:noFill/>
-          <a:ln/>
         </p:spPr>
         <p:txBody>
           <a:bodyPr wrap="square" lIns="0" tIns="0" rIns="0" bIns="0" rtlCol="0" anchor="ctr"/>
           <a:lstStyle/>
           <a:p>
-            <a:pPr algn="ctr" indent="0" marL="0">
+            <a:pPr marL="0" indent="0" algn="ctr">
               <a:buNone/>
             </a:pPr>
             <a:r>
@@ -5938,13 +5751,12 @@
             <a:avLst/>
           </a:prstGeom>
           <a:noFill/>
-          <a:ln/>
         </p:spPr>
         <p:txBody>
           <a:bodyPr wrap="square" lIns="0" tIns="0" rIns="0" bIns="0" rtlCol="0" anchor="ctr"/>
           <a:lstStyle/>
           <a:p>
-            <a:pPr algn="ctr" indent="0" marL="0">
+            <a:pPr marL="0" indent="0" algn="ctr">
               <a:buNone/>
             </a:pPr>
             <a:r>
@@ -5958,7 +5770,7 @@
             <a:endParaRPr lang="en-US" sz="950" dirty="0"/>
           </a:p>
           <a:p>
-            <a:pPr algn="ctr" indent="0" marL="0">
+            <a:pPr marL="0" indent="0" algn="ctr">
               <a:buNone/>
             </a:pPr>
             <a:r>
@@ -6015,13 +5827,12 @@
             <a:avLst/>
           </a:prstGeom>
           <a:noFill/>
-          <a:ln/>
         </p:spPr>
         <p:txBody>
           <a:bodyPr wrap="square" lIns="0" tIns="0" rIns="0" bIns="0" rtlCol="0" anchor="ctr"/>
           <a:lstStyle/>
           <a:p>
-            <a:pPr algn="ctr" indent="0" marL="0">
+            <a:pPr marL="0" indent="0" algn="ctr">
               <a:buNone/>
             </a:pPr>
             <a:r>
@@ -6035,7 +5846,7 @@
             <a:endParaRPr lang="en-US" sz="950" dirty="0"/>
           </a:p>
           <a:p>
-            <a:pPr algn="ctr" indent="0" marL="0">
+            <a:pPr marL="0" indent="0" algn="ctr">
               <a:buNone/>
             </a:pPr>
             <a:r>
@@ -6092,13 +5903,12 @@
             <a:avLst/>
           </a:prstGeom>
           <a:noFill/>
-          <a:ln/>
         </p:spPr>
         <p:txBody>
           <a:bodyPr wrap="square" lIns="0" tIns="0" rIns="0" bIns="0" rtlCol="0" anchor="ctr"/>
           <a:lstStyle/>
           <a:p>
-            <a:pPr algn="ctr" indent="0" marL="0">
+            <a:pPr marL="0" indent="0" algn="ctr">
               <a:buNone/>
             </a:pPr>
             <a:r>
@@ -6230,13 +6040,12 @@
             <a:avLst/>
           </a:prstGeom>
           <a:noFill/>
-          <a:ln/>
         </p:spPr>
         <p:txBody>
           <a:bodyPr wrap="square" lIns="0" tIns="0" rIns="0" bIns="0" rtlCol="0" anchor="ctr"/>
           <a:lstStyle/>
           <a:p>
-            <a:pPr algn="ctr" indent="0" marL="0">
+            <a:pPr marL="0" indent="0" algn="ctr">
               <a:buNone/>
             </a:pPr>
             <a:r>
@@ -6293,13 +6102,12 @@
             <a:avLst/>
           </a:prstGeom>
           <a:noFill/>
-          <a:ln/>
         </p:spPr>
         <p:txBody>
           <a:bodyPr wrap="square" lIns="0" tIns="0" rIns="0" bIns="0" rtlCol="0" anchor="ctr"/>
           <a:lstStyle/>
           <a:p>
-            <a:pPr algn="ctr" indent="0" marL="0">
+            <a:pPr marL="0" indent="0" algn="ctr">
               <a:buNone/>
             </a:pPr>
             <a:r>
@@ -6356,13 +6164,12 @@
             <a:avLst/>
           </a:prstGeom>
           <a:noFill/>
-          <a:ln/>
         </p:spPr>
         <p:txBody>
           <a:bodyPr wrap="square" lIns="0" tIns="0" rIns="0" bIns="0" rtlCol="0" anchor="ctr"/>
           <a:lstStyle/>
           <a:p>
-            <a:pPr algn="ctr" indent="0" marL="0">
+            <a:pPr marL="0" indent="0" algn="ctr">
               <a:buNone/>
             </a:pPr>
             <a:r>
@@ -6419,13 +6226,12 @@
             <a:avLst/>
           </a:prstGeom>
           <a:noFill/>
-          <a:ln/>
         </p:spPr>
         <p:txBody>
           <a:bodyPr wrap="square" lIns="0" tIns="0" rIns="0" bIns="0" rtlCol="0" anchor="ctr"/>
           <a:lstStyle/>
           <a:p>
-            <a:pPr algn="ctr" indent="0" marL="0">
+            <a:pPr marL="0" indent="0" algn="ctr">
               <a:buNone/>
             </a:pPr>
             <a:r>
@@ -6482,13 +6288,12 @@
             <a:avLst/>
           </a:prstGeom>
           <a:noFill/>
-          <a:ln/>
         </p:spPr>
         <p:txBody>
           <a:bodyPr wrap="square" lIns="0" tIns="0" rIns="0" bIns="0" rtlCol="0" anchor="ctr"/>
           <a:lstStyle/>
           <a:p>
-            <a:pPr algn="ctr" indent="0" marL="0">
+            <a:pPr marL="0" indent="0" algn="ctr">
               <a:buNone/>
             </a:pPr>
             <a:r>
@@ -6545,13 +6350,12 @@
             <a:avLst/>
           </a:prstGeom>
           <a:noFill/>
-          <a:ln/>
         </p:spPr>
         <p:txBody>
           <a:bodyPr wrap="square" lIns="0" tIns="0" rIns="0" bIns="0" rtlCol="0" anchor="ctr"/>
           <a:lstStyle/>
           <a:p>
-            <a:pPr algn="ctr" indent="0" marL="0">
+            <a:pPr marL="0" indent="0" algn="ctr">
               <a:buNone/>
             </a:pPr>
             <a:r>
@@ -6608,13 +6412,12 @@
             <a:avLst/>
           </a:prstGeom>
           <a:noFill/>
-          <a:ln/>
         </p:spPr>
         <p:txBody>
           <a:bodyPr wrap="square" lIns="0" tIns="0" rIns="0" bIns="0" rtlCol="0" anchor="ctr"/>
           <a:lstStyle/>
           <a:p>
-            <a:pPr algn="ctr" indent="0" marL="0">
+            <a:pPr marL="0" indent="0" algn="ctr">
               <a:buNone/>
             </a:pPr>
             <a:r>
@@ -6662,8 +6465,8 @@
         </p:nvSpPr>
         <p:spPr>
           <a:xfrm>
-            <a:off x="5852160" y="2734056"/>
-            <a:ext cx="1508760" cy="0"/>
+            <a:off x="7105015" y="2734310"/>
+            <a:ext cx="255905" cy="635"/>
           </a:xfrm>
           <a:prstGeom prst="line">
             <a:avLst/>
@@ -6686,9 +6489,9 @@
           <p:nvPr/>
         </p:nvSpPr>
         <p:spPr>
-          <a:xfrm>
-            <a:off x="7104888" y="2944368"/>
-            <a:ext cx="1901952" cy="484632"/>
+          <a:xfrm flipH="1">
+            <a:off x="7884795" y="2936240"/>
+            <a:ext cx="992505" cy="490220"/>
           </a:xfrm>
           <a:prstGeom prst="line">
             <a:avLst/>
@@ -6712,8 +6515,8 @@
         </p:nvSpPr>
         <p:spPr>
           <a:xfrm>
-            <a:off x="8412480" y="2944368"/>
-            <a:ext cx="594360" cy="484632"/>
+            <a:off x="9241155" y="2936240"/>
+            <a:ext cx="635" cy="492760"/>
           </a:xfrm>
           <a:prstGeom prst="line">
             <a:avLst/>
@@ -6737,31 +6540,30 @@
         </p:nvSpPr>
         <p:spPr>
           <a:xfrm>
-            <a:off x="7315200" y="3950208"/>
+            <a:off x="7360920" y="4070858"/>
             <a:ext cx="3840480" cy="182880"/>
           </a:xfrm>
           <a:prstGeom prst="rect">
             <a:avLst/>
           </a:prstGeom>
           <a:noFill/>
-          <a:ln/>
         </p:spPr>
         <p:txBody>
           <a:bodyPr wrap="square" lIns="0" tIns="0" rIns="0" bIns="0" rtlCol="0" anchor="ctr"/>
           <a:lstStyle/>
           <a:p>
-            <a:pPr algn="ctr" indent="0" marL="0">
-              <a:buNone/>
-            </a:pPr>
-            <a:r>
-              <a:rPr lang="en-US" sz="720" b="1" dirty="0">
+            <a:pPr marL="0" indent="0" algn="ctr">
+              <a:buNone/>
+            </a:pPr>
+            <a:r>
+              <a:rPr lang="en-US" sz="1200" b="1" dirty="0">
                 <a:solidFill>
                   <a:srgbClr val="B7192E"/>
                 </a:solidFill>
               </a:rPr>
               <a:t>3 个并行候选决策</a:t>
             </a:r>
-            <a:endParaRPr lang="en-US" sz="720" dirty="0"/>
+            <a:endParaRPr lang="en-US" sz="1200" dirty="0"/>
           </a:p>
         </p:txBody>
       </p:sp>
@@ -6807,13 +6609,12 @@
             <a:avLst/>
           </a:prstGeom>
           <a:noFill/>
-          <a:ln/>
         </p:spPr>
         <p:txBody>
           <a:bodyPr wrap="square" lIns="0" tIns="0" rIns="0" bIns="0" rtlCol="0" anchor="ctr"/>
           <a:lstStyle/>
           <a:p>
-            <a:pPr indent="0" marL="0">
+            <a:pPr marL="0" indent="0">
               <a:buNone/>
             </a:pPr>
             <a:r>
@@ -6822,9 +6623,13 @@
                   <a:srgbClr val="16836D"/>
                 </a:solidFill>
               </a:rPr>
-              <a:t>零侵入监控层</a:t>
-            </a:r>
-            <a:endParaRPr lang="en-US" sz="1000" dirty="0"/>
+              <a:t>低侵入监控层</a:t>
+            </a:r>
+            <a:endParaRPr lang="zh-CN" altLang="en-US" sz="1000" b="1" dirty="0">
+              <a:solidFill>
+                <a:srgbClr val="16836D"/>
+              </a:solidFill>
+            </a:endParaRPr>
           </a:p>
         </p:txBody>
       </p:sp>
@@ -6843,13 +6648,12 @@
             <a:avLst/>
           </a:prstGeom>
           <a:noFill/>
-          <a:ln/>
         </p:spPr>
         <p:txBody>
           <a:bodyPr wrap="square" lIns="0" tIns="0" rIns="0" bIns="0" rtlCol="0" anchor="ctr"/>
           <a:lstStyle/>
           <a:p>
-            <a:pPr indent="0" marL="0">
+            <a:pPr marL="0" indent="0">
               <a:buNone/>
             </a:pPr>
             <a:r>
@@ -6906,13 +6710,12 @@
             <a:avLst/>
           </a:prstGeom>
           <a:noFill/>
-          <a:ln/>
         </p:spPr>
         <p:txBody>
           <a:bodyPr wrap="square" lIns="0" tIns="0" rIns="0" bIns="0" rtlCol="0" anchor="ctr"/>
           <a:lstStyle/>
           <a:p>
-            <a:pPr algn="ctr" indent="0" marL="0">
+            <a:pPr marL="0" indent="0" algn="ctr">
               <a:buNone/>
             </a:pPr>
             <a:r>
@@ -6969,13 +6772,12 @@
             <a:avLst/>
           </a:prstGeom>
           <a:noFill/>
-          <a:ln/>
         </p:spPr>
         <p:txBody>
           <a:bodyPr wrap="square" lIns="0" tIns="0" rIns="0" bIns="0" rtlCol="0" anchor="ctr"/>
           <a:lstStyle/>
           <a:p>
-            <a:pPr algn="ctr" indent="0" marL="0">
+            <a:pPr marL="0" indent="0" algn="ctr">
               <a:buNone/>
             </a:pPr>
             <a:r>
@@ -7032,13 +6834,12 @@
             <a:avLst/>
           </a:prstGeom>
           <a:noFill/>
-          <a:ln/>
         </p:spPr>
         <p:txBody>
           <a:bodyPr wrap="square" lIns="0" tIns="0" rIns="0" bIns="0" rtlCol="0" anchor="ctr"/>
           <a:lstStyle/>
           <a:p>
-            <a:pPr algn="ctr" indent="0" marL="0">
+            <a:pPr marL="0" indent="0" algn="ctr">
               <a:buNone/>
             </a:pPr>
             <a:r>
@@ -7095,13 +6896,12 @@
             <a:avLst/>
           </a:prstGeom>
           <a:noFill/>
-          <a:ln/>
         </p:spPr>
         <p:txBody>
           <a:bodyPr wrap="square" lIns="0" tIns="0" rIns="0" bIns="0" rtlCol="0" anchor="ctr"/>
           <a:lstStyle/>
           <a:p>
-            <a:pPr algn="ctr" indent="0" marL="0">
+            <a:pPr marL="0" indent="0" algn="ctr">
               <a:buNone/>
             </a:pPr>
             <a:r>
@@ -7131,13 +6931,12 @@
             <a:avLst/>
           </a:prstGeom>
           <a:noFill/>
-          <a:ln/>
         </p:spPr>
         <p:txBody>
           <a:bodyPr wrap="square" lIns="0" tIns="0" rIns="0" bIns="0" rtlCol="0" anchor="ctr"/>
           <a:lstStyle/>
           <a:p>
-            <a:pPr algn="ctr" indent="0" marL="0">
+            <a:pPr marL="0" indent="0" algn="ctr">
               <a:buNone/>
             </a:pPr>
             <a:r>
@@ -7167,13 +6966,12 @@
             <a:avLst/>
           </a:prstGeom>
           <a:noFill/>
-          <a:ln/>
         </p:spPr>
         <p:txBody>
           <a:bodyPr wrap="square" lIns="0" tIns="0" rIns="0" bIns="0" rtlCol="0" anchor="ctr"/>
           <a:lstStyle/>
           <a:p>
-            <a:pPr algn="ctr" indent="0" marL="0">
+            <a:pPr marL="0" indent="0" algn="ctr">
               <a:buNone/>
             </a:pPr>
             <a:r>
@@ -7187,6 +6985,56 @@
             <a:endParaRPr lang="en-US" sz="950" dirty="0"/>
           </a:p>
         </p:txBody>
+      </p:sp>
+      <p:sp>
+        <p:nvSpPr>
+          <p:cNvPr id="52" name="Shape 33"/>
+          <p:cNvSpPr/>
+          <p:nvPr/>
+        </p:nvSpPr>
+        <p:spPr>
+          <a:xfrm>
+            <a:off x="8403590" y="2734310"/>
+            <a:ext cx="328930" cy="635"/>
+          </a:xfrm>
+          <a:prstGeom prst="line">
+            <a:avLst/>
+          </a:prstGeom>
+          <a:noFill/>
+          <a:ln w="15240">
+            <a:solidFill>
+              <a:srgbClr val="98A6B3"/>
+            </a:solidFill>
+            <a:prstDash val="solid"/>
+            <a:headEnd type="none"/>
+            <a:tailEnd type="triangle"/>
+          </a:ln>
+        </p:spPr>
+      </p:sp>
+      <p:sp>
+        <p:nvSpPr>
+          <p:cNvPr id="53" name="Shape 35"/>
+          <p:cNvSpPr/>
+          <p:nvPr/>
+        </p:nvSpPr>
+        <p:spPr>
+          <a:xfrm>
+            <a:off x="9566275" y="2950845"/>
+            <a:ext cx="973455" cy="475615"/>
+          </a:xfrm>
+          <a:prstGeom prst="line">
+            <a:avLst/>
+          </a:prstGeom>
+          <a:noFill/>
+          <a:ln w="15240">
+            <a:solidFill>
+              <a:srgbClr val="98A6B3"/>
+            </a:solidFill>
+            <a:prstDash val="solid"/>
+            <a:headEnd type="none"/>
+            <a:tailEnd type="triangle"/>
+          </a:ln>
+        </p:spPr>
       </p:sp>
     </p:spTree>
   </p:cSld>
@@ -7198,12 +7046,13 @@
 
 <file path=ppt/slides/slide5.xml><?xml version="1.0" encoding="utf-8"?>
 <p:sld xmlns:a="http://schemas.openxmlformats.org/drawingml/2006/main" xmlns:r="http://schemas.openxmlformats.org/officeDocument/2006/relationships" xmlns:p="http://schemas.openxmlformats.org/presentationml/2006/main">
-  <p:cSld name="Slide 5">
+  <p:cSld>
     <p:bg>
       <p:bgPr>
         <a:solidFill>
           <a:srgbClr val="F7F9FB"/>
         </a:solidFill>
+        <a:effectLst/>
       </p:bgPr>
     </p:bg>
     <p:spTree>
@@ -7260,23 +7109,22 @@
             <a:avLst/>
           </a:prstGeom>
           <a:noFill/>
-          <a:ln/>
         </p:spPr>
         <p:txBody>
           <a:bodyPr wrap="square" rtlCol="0" anchor="ctr"/>
           <a:lstStyle/>
           <a:p>
-            <a:pPr indent="0" marL="0">
-              <a:buNone/>
-            </a:pPr>
-            <a:r>
-              <a:rPr lang="en-US" sz="850" b="1" spc="120" kern="0" dirty="0">
+            <a:pPr marL="0" indent="0">
+              <a:buNone/>
+            </a:pPr>
+            <a:r>
+              <a:rPr lang="en-US" sz="850" b="1" kern="0" spc="120" dirty="0">
                 <a:solidFill>
                   <a:srgbClr val="B7192E"/>
                 </a:solidFill>
-                <a:latin typeface="Microsoft YaHei" pitchFamily="34" charset="0"/>
-                <a:ea typeface="Microsoft YaHei" pitchFamily="34" charset="-122"/>
-                <a:cs typeface="Microsoft YaHei" pitchFamily="34" charset="-120"/>
+                <a:latin typeface="微软雅黑" panose="020B0503020204020204" pitchFamily="34" charset="-122"/>
+                <a:ea typeface="微软雅黑" panose="020B0503020204020204" pitchFamily="34" charset="-122"/>
+                <a:cs typeface="微软雅黑" panose="020B0503020204020204" pitchFamily="34" charset="-120"/>
               </a:rPr>
               <a:t>02  核心项目</a:t>
             </a:r>
@@ -7299,13 +7147,12 @@
             <a:avLst/>
           </a:prstGeom>
           <a:noFill/>
-          <a:ln/>
         </p:spPr>
         <p:txBody>
           <a:bodyPr wrap="square" lIns="0" tIns="0" rIns="0" bIns="0" rtlCol="0" anchor="ctr"/>
           <a:lstStyle/>
           <a:p>
-            <a:pPr indent="0" marL="0">
+            <a:pPr marL="0" indent="0">
               <a:buNone/>
             </a:pPr>
             <a:r>
@@ -7335,13 +7182,12 @@
             <a:avLst/>
           </a:prstGeom>
           <a:noFill/>
-          <a:ln/>
         </p:spPr>
         <p:txBody>
           <a:bodyPr wrap="square" lIns="0" tIns="0" rIns="0" bIns="0" rtlCol="0" anchor="ctr"/>
           <a:lstStyle/>
           <a:p>
-            <a:pPr indent="0" marL="0">
+            <a:pPr marL="0" indent="0">
               <a:buNone/>
             </a:pPr>
             <a:r>
@@ -7371,13 +7217,12 @@
             <a:avLst/>
           </a:prstGeom>
           <a:noFill/>
-          <a:ln/>
         </p:spPr>
         <p:txBody>
           <a:bodyPr wrap="square" lIns="0" tIns="0" rIns="0" bIns="0" rtlCol="0" anchor="ctr"/>
           <a:lstStyle/>
           <a:p>
-            <a:pPr indent="0" marL="0">
+            <a:pPr marL="0" indent="0">
               <a:buNone/>
             </a:pPr>
             <a:r>
@@ -7396,7 +7241,11 @@
         <p:nvSpPr>
           <p:cNvPr id="7" name="Shape 5"/>
           <p:cNvSpPr/>
-          <p:nvPr/>
+          <p:nvPr>
+            <p:custDataLst>
+              <p:tags r:id="rId1"/>
+            </p:custDataLst>
+          </p:nvPr>
         </p:nvSpPr>
         <p:spPr>
           <a:xfrm>
@@ -7423,7 +7272,11 @@
         <p:nvSpPr>
           <p:cNvPr id="8" name="Text 6"/>
           <p:cNvSpPr/>
-          <p:nvPr/>
+          <p:nvPr>
+            <p:custDataLst>
+              <p:tags r:id="rId2"/>
+            </p:custDataLst>
+          </p:nvPr>
         </p:nvSpPr>
         <p:spPr>
           <a:xfrm>
@@ -7434,13 +7287,12 @@
             <a:avLst/>
           </a:prstGeom>
           <a:noFill/>
-          <a:ln/>
         </p:spPr>
         <p:txBody>
           <a:bodyPr wrap="square" lIns="0" tIns="0" rIns="0" bIns="0" rtlCol="0" anchor="ctr"/>
           <a:lstStyle/>
           <a:p>
-            <a:pPr indent="0" marL="0">
+            <a:pPr marL="0" indent="0">
               <a:buNone/>
             </a:pPr>
             <a:r>
@@ -7459,7 +7311,11 @@
         <p:nvSpPr>
           <p:cNvPr id="9" name="Text 7"/>
           <p:cNvSpPr/>
-          <p:nvPr/>
+          <p:nvPr>
+            <p:custDataLst>
+              <p:tags r:id="rId3"/>
+            </p:custDataLst>
+          </p:nvPr>
         </p:nvSpPr>
         <p:spPr>
           <a:xfrm>
@@ -7470,24 +7326,23 @@
             <a:avLst/>
           </a:prstGeom>
           <a:noFill/>
-          <a:ln/>
         </p:spPr>
         <p:txBody>
           <a:bodyPr wrap="square" lIns="0" tIns="0" rIns="0" bIns="0" rtlCol="0" anchor="ctr"/>
           <a:lstStyle/>
           <a:p>
-            <a:pPr indent="0" marL="0">
-              <a:buNone/>
-            </a:pPr>
-            <a:r>
-              <a:rPr lang="en-US" sz="820" dirty="0">
+            <a:pPr marL="0" indent="0">
+              <a:buNone/>
+            </a:pPr>
+            <a:r>
+              <a:rPr lang="en-US" sz="1200" dirty="0">
                 <a:solidFill>
                   <a:srgbClr val="18232D"/>
                 </a:solidFill>
               </a:rPr>
               <a:t>起止时间 / 输入输出 / 耗时 / Token / 状态 / 父子关系</a:t>
             </a:r>
-            <a:endParaRPr lang="en-US" sz="820" dirty="0"/>
+            <a:endParaRPr lang="en-US" sz="1200" dirty="0"/>
           </a:p>
         </p:txBody>
       </p:sp>
@@ -7495,7 +7350,11 @@
         <p:nvSpPr>
           <p:cNvPr id="10" name="Text 8"/>
           <p:cNvSpPr/>
-          <p:nvPr/>
+          <p:nvPr>
+            <p:custDataLst>
+              <p:tags r:id="rId4"/>
+            </p:custDataLst>
+          </p:nvPr>
         </p:nvSpPr>
         <p:spPr>
           <a:xfrm>
@@ -7506,7 +7365,6 @@
             <a:avLst/>
           </a:prstGeom>
           <a:noFill/>
-          <a:ln/>
         </p:spPr>
         <p:txBody>
           <a:bodyPr wrap="square" lIns="0" tIns="0" rIns="0" bIns="0" rtlCol="0" anchor="ctr">
@@ -7514,18 +7372,18 @@
           </a:bodyPr>
           <a:lstStyle/>
           <a:p>
-            <a:pPr indent="0" marL="0">
-              <a:buNone/>
-            </a:pPr>
-            <a:r>
-              <a:rPr lang="en-US" sz="720" b="1" dirty="0">
+            <a:pPr marL="0" indent="0">
+              <a:buNone/>
+            </a:pPr>
+            <a:r>
+              <a:rPr lang="en-US" sz="1000" b="1" dirty="0">
                 <a:solidFill>
                   <a:srgbClr val="66727D"/>
                 </a:solidFill>
               </a:rPr>
               <a:t>回答：谁在跑、跑到哪一步？</a:t>
             </a:r>
-            <a:endParaRPr lang="en-US" sz="720" dirty="0"/>
+            <a:endParaRPr lang="en-US" sz="1000" dirty="0"/>
           </a:p>
         </p:txBody>
       </p:sp>
@@ -7533,7 +7391,11 @@
         <p:nvSpPr>
           <p:cNvPr id="11" name="Shape 9"/>
           <p:cNvSpPr/>
-          <p:nvPr/>
+          <p:nvPr>
+            <p:custDataLst>
+              <p:tags r:id="rId5"/>
+            </p:custDataLst>
+          </p:nvPr>
         </p:nvSpPr>
         <p:spPr>
           <a:xfrm>
@@ -7560,7 +7422,11 @@
         <p:nvSpPr>
           <p:cNvPr id="12" name="Text 10"/>
           <p:cNvSpPr/>
-          <p:nvPr/>
+          <p:nvPr>
+            <p:custDataLst>
+              <p:tags r:id="rId6"/>
+            </p:custDataLst>
+          </p:nvPr>
         </p:nvSpPr>
         <p:spPr>
           <a:xfrm>
@@ -7571,13 +7437,12 @@
             <a:avLst/>
           </a:prstGeom>
           <a:noFill/>
-          <a:ln/>
         </p:spPr>
         <p:txBody>
           <a:bodyPr wrap="square" lIns="0" tIns="0" rIns="0" bIns="0" rtlCol="0" anchor="ctr"/>
           <a:lstStyle/>
           <a:p>
-            <a:pPr indent="0" marL="0">
+            <a:pPr marL="0" indent="0">
               <a:buNone/>
             </a:pPr>
             <a:r>
@@ -7596,7 +7461,11 @@
         <p:nvSpPr>
           <p:cNvPr id="13" name="Text 11"/>
           <p:cNvSpPr/>
-          <p:nvPr/>
+          <p:nvPr>
+            <p:custDataLst>
+              <p:tags r:id="rId7"/>
+            </p:custDataLst>
+          </p:nvPr>
         </p:nvSpPr>
         <p:spPr>
           <a:xfrm>
@@ -7607,24 +7476,23 @@
             <a:avLst/>
           </a:prstGeom>
           <a:noFill/>
-          <a:ln/>
         </p:spPr>
         <p:txBody>
           <a:bodyPr wrap="square" lIns="0" tIns="0" rIns="0" bIns="0" rtlCol="0" anchor="ctr"/>
           <a:lstStyle/>
           <a:p>
-            <a:pPr indent="0" marL="0">
-              <a:buNone/>
-            </a:pPr>
-            <a:r>
-              <a:rPr lang="en-US" sz="820" dirty="0">
+            <a:pPr marL="0" indent="0">
+              <a:buNone/>
+            </a:pPr>
+            <a:r>
+              <a:rPr lang="en-US" sz="1200" dirty="0">
                 <a:solidFill>
                   <a:srgbClr val="18232D"/>
                 </a:solidFill>
               </a:rPr>
               <a:t>执行层：超时/失败  ·  行为层：循环/缺节点  ·  输出层：空输出</a:t>
             </a:r>
-            <a:endParaRPr lang="en-US" sz="820" dirty="0"/>
+            <a:endParaRPr lang="en-US" sz="1200" dirty="0"/>
           </a:p>
         </p:txBody>
       </p:sp>
@@ -7632,7 +7500,11 @@
         <p:nvSpPr>
           <p:cNvPr id="14" name="Text 12"/>
           <p:cNvSpPr/>
-          <p:nvPr/>
+          <p:nvPr>
+            <p:custDataLst>
+              <p:tags r:id="rId8"/>
+            </p:custDataLst>
+          </p:nvPr>
         </p:nvSpPr>
         <p:spPr>
           <a:xfrm>
@@ -7643,7 +7515,6 @@
             <a:avLst/>
           </a:prstGeom>
           <a:noFill/>
-          <a:ln/>
         </p:spPr>
         <p:txBody>
           <a:bodyPr wrap="square" lIns="0" tIns="0" rIns="0" bIns="0" rtlCol="0" anchor="ctr">
@@ -7651,18 +7522,18 @@
           </a:bodyPr>
           <a:lstStyle/>
           <a:p>
-            <a:pPr indent="0" marL="0">
-              <a:buNone/>
-            </a:pPr>
-            <a:r>
-              <a:rPr lang="en-US" sz="720" b="1" dirty="0">
+            <a:pPr marL="0" indent="0">
+              <a:buNone/>
+            </a:pPr>
+            <a:r>
+              <a:rPr lang="en-US" sz="1000" b="1" dirty="0">
                 <a:solidFill>
                   <a:srgbClr val="66727D"/>
                 </a:solidFill>
               </a:rPr>
               <a:t>回答：执行过程是否异常？</a:t>
             </a:r>
-            <a:endParaRPr lang="en-US" sz="720" dirty="0"/>
+            <a:endParaRPr lang="en-US" sz="1000" dirty="0"/>
           </a:p>
         </p:txBody>
       </p:sp>
@@ -7670,7 +7541,11 @@
         <p:nvSpPr>
           <p:cNvPr id="15" name="Shape 13"/>
           <p:cNvSpPr/>
-          <p:nvPr/>
+          <p:nvPr>
+            <p:custDataLst>
+              <p:tags r:id="rId9"/>
+            </p:custDataLst>
+          </p:nvPr>
         </p:nvSpPr>
         <p:spPr>
           <a:xfrm>
@@ -7697,7 +7572,11 @@
         <p:nvSpPr>
           <p:cNvPr id="16" name="Text 14"/>
           <p:cNvSpPr/>
-          <p:nvPr/>
+          <p:nvPr>
+            <p:custDataLst>
+              <p:tags r:id="rId10"/>
+            </p:custDataLst>
+          </p:nvPr>
         </p:nvSpPr>
         <p:spPr>
           <a:xfrm>
@@ -7708,13 +7587,12 @@
             <a:avLst/>
           </a:prstGeom>
           <a:noFill/>
-          <a:ln/>
         </p:spPr>
         <p:txBody>
           <a:bodyPr wrap="square" lIns="0" tIns="0" rIns="0" bIns="0" rtlCol="0" anchor="ctr"/>
           <a:lstStyle/>
           <a:p>
-            <a:pPr indent="0" marL="0">
+            <a:pPr marL="0" indent="0">
               <a:buNone/>
             </a:pPr>
             <a:r>
@@ -7733,7 +7611,11 @@
         <p:nvSpPr>
           <p:cNvPr id="17" name="Text 15"/>
           <p:cNvSpPr/>
-          <p:nvPr/>
+          <p:nvPr>
+            <p:custDataLst>
+              <p:tags r:id="rId11"/>
+            </p:custDataLst>
+          </p:nvPr>
         </p:nvSpPr>
         <p:spPr>
           <a:xfrm>
@@ -7744,24 +7626,23 @@
             <a:avLst/>
           </a:prstGeom>
           <a:noFill/>
-          <a:ln/>
         </p:spPr>
         <p:txBody>
           <a:bodyPr wrap="square" lIns="0" tIns="0" rIns="0" bIns="0" rtlCol="0" anchor="ctr"/>
           <a:lstStyle/>
           <a:p>
-            <a:pPr indent="0" marL="0">
-              <a:buNone/>
-            </a:pPr>
-            <a:r>
-              <a:rPr lang="en-US" sz="820" dirty="0">
+            <a:pPr marL="0" indent="0">
+              <a:buNone/>
+            </a:pPr>
+            <a:r>
+              <a:rPr lang="en-US" sz="1200" dirty="0">
                 <a:solidFill>
                   <a:srgbClr val="18232D"/>
                 </a:solidFill>
               </a:rPr>
               <a:t>敏感词库句级检测；命中句标红、拦截并记录告警</a:t>
             </a:r>
-            <a:endParaRPr lang="en-US" sz="820" dirty="0"/>
+            <a:endParaRPr lang="en-US" sz="1200" dirty="0"/>
           </a:p>
         </p:txBody>
       </p:sp>
@@ -7769,7 +7650,11 @@
         <p:nvSpPr>
           <p:cNvPr id="18" name="Text 16"/>
           <p:cNvSpPr/>
-          <p:nvPr/>
+          <p:nvPr>
+            <p:custDataLst>
+              <p:tags r:id="rId12"/>
+            </p:custDataLst>
+          </p:nvPr>
         </p:nvSpPr>
         <p:spPr>
           <a:xfrm>
@@ -7780,7 +7665,6 @@
             <a:avLst/>
           </a:prstGeom>
           <a:noFill/>
-          <a:ln/>
         </p:spPr>
         <p:txBody>
           <a:bodyPr wrap="square" lIns="0" tIns="0" rIns="0" bIns="0" rtlCol="0" anchor="ctr">
@@ -7788,18 +7672,18 @@
           </a:bodyPr>
           <a:lstStyle/>
           <a:p>
-            <a:pPr indent="0" marL="0">
-              <a:buNone/>
-            </a:pPr>
-            <a:r>
-              <a:rPr lang="en-US" sz="720" b="1" dirty="0">
+            <a:pPr marL="0" indent="0">
+              <a:buNone/>
+            </a:pPr>
+            <a:r>
+              <a:rPr lang="en-US" sz="1000" b="1" dirty="0">
                 <a:solidFill>
                   <a:srgbClr val="66727D"/>
                 </a:solidFill>
               </a:rPr>
               <a:t>回答：结果能不能对外发布？</a:t>
             </a:r>
-            <a:endParaRPr lang="en-US" sz="720" dirty="0"/>
+            <a:endParaRPr lang="en-US" sz="1000" dirty="0"/>
           </a:p>
         </p:txBody>
       </p:sp>
@@ -7834,7 +7718,11 @@
         <p:nvSpPr>
           <p:cNvPr id="20" name="Text 18"/>
           <p:cNvSpPr/>
-          <p:nvPr/>
+          <p:nvPr>
+            <p:custDataLst>
+              <p:tags r:id="rId13"/>
+            </p:custDataLst>
+          </p:nvPr>
         </p:nvSpPr>
         <p:spPr>
           <a:xfrm>
@@ -7845,13 +7733,12 @@
             <a:avLst/>
           </a:prstGeom>
           <a:noFill/>
-          <a:ln/>
         </p:spPr>
         <p:txBody>
           <a:bodyPr wrap="square" lIns="0" tIns="0" rIns="0" bIns="0" rtlCol="0" anchor="ctr"/>
           <a:lstStyle/>
           <a:p>
-            <a:pPr indent="0" marL="0">
+            <a:pPr marL="0" indent="0">
               <a:buNone/>
             </a:pPr>
             <a:r>
@@ -7870,35 +7757,41 @@
         <p:nvSpPr>
           <p:cNvPr id="21" name="Text 19"/>
           <p:cNvSpPr/>
-          <p:nvPr/>
+          <p:nvPr>
+            <p:custDataLst>
+              <p:tags r:id="rId14"/>
+            </p:custDataLst>
+          </p:nvPr>
         </p:nvSpPr>
         <p:spPr>
           <a:xfrm>
             <a:off x="2468880" y="4526280"/>
-            <a:ext cx="4343400" cy="219456"/>
-          </a:xfrm>
-          <a:prstGeom prst="rect">
-            <a:avLst/>
-          </a:prstGeom>
-          <a:noFill/>
-          <a:ln/>
+            <a:ext cx="4343400" cy="327660"/>
+          </a:xfrm>
+          <a:prstGeom prst="rect">
+            <a:avLst/>
+          </a:prstGeom>
+          <a:noFill/>
         </p:spPr>
         <p:txBody>
           <a:bodyPr wrap="square" lIns="0" tIns="0" rIns="0" bIns="0" rtlCol="0" anchor="ctr"/>
           <a:lstStyle/>
           <a:p>
-            <a:pPr indent="0" marL="0">
-              <a:buNone/>
-            </a:pPr>
-            <a:r>
-              <a:rPr lang="en-US" sz="820" dirty="0">
+            <a:pPr marL="0" indent="0">
+              <a:lnSpc>
+                <a:spcPct val="150000"/>
+              </a:lnSpc>
+              <a:buNone/>
+            </a:pPr>
+            <a:r>
+              <a:rPr lang="en-US" sz="1200" dirty="0">
                 <a:solidFill>
                   <a:srgbClr val="18232D"/>
                 </a:solidFill>
               </a:rPr>
               <a:t>Trace 入库后通过 WebSocket 推送 Dashboard，展示拓扑、链路与告警</a:t>
             </a:r>
-            <a:endParaRPr lang="en-US" sz="820" dirty="0"/>
+            <a:endParaRPr lang="en-US" sz="1200" dirty="0"/>
           </a:p>
         </p:txBody>
       </p:sp>
@@ -7906,7 +7799,11 @@
         <p:nvSpPr>
           <p:cNvPr id="22" name="Text 20"/>
           <p:cNvSpPr/>
-          <p:nvPr/>
+          <p:nvPr>
+            <p:custDataLst>
+              <p:tags r:id="rId15"/>
+            </p:custDataLst>
+          </p:nvPr>
         </p:nvSpPr>
         <p:spPr>
           <a:xfrm>
@@ -7917,7 +7814,6 @@
             <a:avLst/>
           </a:prstGeom>
           <a:noFill/>
-          <a:ln/>
         </p:spPr>
         <p:txBody>
           <a:bodyPr wrap="square" lIns="0" tIns="0" rIns="0" bIns="0" rtlCol="0" anchor="ctr">
@@ -7925,18 +7821,18 @@
           </a:bodyPr>
           <a:lstStyle/>
           <a:p>
-            <a:pPr indent="0" marL="0">
-              <a:buNone/>
-            </a:pPr>
-            <a:r>
-              <a:rPr lang="en-US" sz="720" b="1" dirty="0">
+            <a:pPr marL="0" indent="0">
+              <a:buNone/>
+            </a:pPr>
+            <a:r>
+              <a:rPr lang="en-US" sz="1000" b="1" dirty="0">
                 <a:solidFill>
                   <a:srgbClr val="66727D"/>
                 </a:solidFill>
               </a:rPr>
               <a:t>回答：能否实时定位和回溯？</a:t>
             </a:r>
-            <a:endParaRPr lang="en-US" sz="720" dirty="0"/>
+            <a:endParaRPr lang="en-US" sz="1000" dirty="0"/>
           </a:p>
         </p:txBody>
       </p:sp>
@@ -8007,24 +7903,23 @@
             <a:avLst/>
           </a:prstGeom>
           <a:noFill/>
-          <a:ln/>
         </p:spPr>
         <p:txBody>
           <a:bodyPr wrap="square" lIns="0" tIns="0" rIns="0" bIns="0" rtlCol="0" anchor="ctr"/>
           <a:lstStyle/>
           <a:p>
-            <a:pPr indent="0" marL="0">
-              <a:buNone/>
-            </a:pPr>
-            <a:r>
-              <a:rPr lang="en-US" sz="1200" b="1" dirty="0">
+            <a:pPr marL="0" indent="0">
+              <a:buNone/>
+            </a:pPr>
+            <a:r>
+              <a:rPr lang="en-US" sz="1400" b="1" dirty="0">
                 <a:solidFill>
                   <a:srgbClr val="18232D"/>
                 </a:solidFill>
               </a:rPr>
               <a:t>异常处理边界</a:t>
             </a:r>
-            <a:endParaRPr lang="en-US" sz="1200" dirty="0"/>
+            <a:endParaRPr lang="en-US" sz="1400" dirty="0"/>
           </a:p>
         </p:txBody>
       </p:sp>
@@ -8043,86 +7938,106 @@
             <a:avLst/>
           </a:prstGeom>
           <a:noFill/>
-          <a:ln/>
         </p:spPr>
         <p:txBody>
           <a:bodyPr wrap="square" lIns="254" tIns="254" rIns="254" bIns="254" rtlCol="0" anchor="t">
-            <a:normAutofit/>
+            <a:normAutofit fontScale="90000" lnSpcReduction="20000"/>
           </a:bodyPr>
           <a:lstStyle/>
           <a:p>
-            <a:pPr indent="0" marL="0">
-              <a:buNone/>
-            </a:pPr>
-            <a:r>
-              <a:rPr lang="en-US" sz="920" dirty="0">
+            <a:pPr marL="0" indent="0">
+              <a:lnSpc>
+                <a:spcPct val="150000"/>
+              </a:lnSpc>
+              <a:buNone/>
+            </a:pPr>
+            <a:r>
+              <a:rPr lang="en-US" sz="1400" dirty="0">
                 <a:solidFill>
                   <a:srgbClr val="66727D"/>
                 </a:solidFill>
               </a:rPr>
               <a:t>• 异常检测以规则扫描为主</a:t>
             </a:r>
-            <a:endParaRPr lang="en-US" sz="920" dirty="0"/>
-          </a:p>
-          <a:p>
-            <a:pPr indent="0" marL="0">
-              <a:buNone/>
-            </a:pPr>
-            <a:endParaRPr lang="en-US" sz="920" dirty="0"/>
-          </a:p>
-          <a:p>
-            <a:pPr indent="0" marL="0">
-              <a:buNone/>
-            </a:pPr>
-            <a:r>
-              <a:rPr lang="en-US" sz="920" dirty="0">
+            <a:endParaRPr lang="en-US" sz="1400" dirty="0"/>
+          </a:p>
+          <a:p>
+            <a:pPr marL="0" indent="0">
+              <a:lnSpc>
+                <a:spcPct val="150000"/>
+              </a:lnSpc>
+              <a:buNone/>
+            </a:pPr>
+            <a:endParaRPr lang="en-US" sz="1400" dirty="0"/>
+          </a:p>
+          <a:p>
+            <a:pPr marL="0" indent="0">
+              <a:lnSpc>
+                <a:spcPct val="150000"/>
+              </a:lnSpc>
+              <a:buNone/>
+            </a:pPr>
+            <a:r>
+              <a:rPr lang="en-US" sz="1400" dirty="0">
                 <a:solidFill>
                   <a:srgbClr val="66727D"/>
                 </a:solidFill>
               </a:rPr>
               <a:t>• 无显式 Retry 机制</a:t>
             </a:r>
-            <a:endParaRPr lang="en-US" sz="920" dirty="0"/>
-          </a:p>
-          <a:p>
-            <a:pPr indent="0" marL="0">
-              <a:buNone/>
-            </a:pPr>
-            <a:endParaRPr lang="en-US" sz="920" dirty="0"/>
-          </a:p>
-          <a:p>
-            <a:pPr indent="0" marL="0">
-              <a:buNone/>
-            </a:pPr>
-            <a:r>
-              <a:rPr lang="en-US" sz="920" dirty="0">
+            <a:endParaRPr lang="en-US" sz="1400" dirty="0"/>
+          </a:p>
+          <a:p>
+            <a:pPr marL="0" indent="0">
+              <a:lnSpc>
+                <a:spcPct val="150000"/>
+              </a:lnSpc>
+              <a:buNone/>
+            </a:pPr>
+            <a:endParaRPr lang="en-US" sz="1400" dirty="0"/>
+          </a:p>
+          <a:p>
+            <a:pPr marL="0" indent="0">
+              <a:lnSpc>
+                <a:spcPct val="150000"/>
+              </a:lnSpc>
+              <a:buNone/>
+            </a:pPr>
+            <a:r>
+              <a:rPr lang="en-US" sz="1400" dirty="0">
                 <a:solidFill>
                   <a:srgbClr val="66727D"/>
                 </a:solidFill>
               </a:rPr>
               <a:t>• LLM 评价失败时采用降级兜底</a:t>
             </a:r>
-            <a:endParaRPr lang="en-US" sz="920" dirty="0"/>
-          </a:p>
-          <a:p>
-            <a:pPr indent="0" marL="0">
-              <a:buNone/>
-            </a:pPr>
-            <a:endParaRPr lang="en-US" sz="920" dirty="0"/>
-          </a:p>
-          <a:p>
-            <a:pPr indent="0" marL="0">
-              <a:buNone/>
-            </a:pPr>
-            <a:r>
-              <a:rPr lang="en-US" sz="920" dirty="0">
+            <a:endParaRPr lang="en-US" sz="1400" dirty="0"/>
+          </a:p>
+          <a:p>
+            <a:pPr marL="0" indent="0">
+              <a:lnSpc>
+                <a:spcPct val="150000"/>
+              </a:lnSpc>
+              <a:buNone/>
+            </a:pPr>
+            <a:endParaRPr lang="en-US" sz="1400" dirty="0"/>
+          </a:p>
+          <a:p>
+            <a:pPr marL="0" indent="0">
+              <a:lnSpc>
+                <a:spcPct val="150000"/>
+              </a:lnSpc>
+              <a:buNone/>
+            </a:pPr>
+            <a:r>
+              <a:rPr lang="en-US" sz="1400" dirty="0">
                 <a:solidFill>
                   <a:srgbClr val="66727D"/>
                 </a:solidFill>
               </a:rPr>
               <a:t>• LangGraph 使用内存 State，不宣称 Checkpoint 持久化</a:t>
             </a:r>
-            <a:endParaRPr lang="en-US" sz="920" dirty="0"/>
+            <a:endParaRPr lang="en-US" sz="1400" dirty="0"/>
           </a:p>
         </p:txBody>
       </p:sp>
@@ -8168,13 +8083,12 @@
             <a:avLst/>
           </a:prstGeom>
           <a:noFill/>
-          <a:ln/>
         </p:spPr>
         <p:txBody>
           <a:bodyPr wrap="square" lIns="0" tIns="0" rIns="0" bIns="0" rtlCol="0" anchor="ctr"/>
           <a:lstStyle/>
           <a:p>
-            <a:pPr algn="ctr" indent="0" marL="0">
+            <a:pPr marL="0" indent="0" algn="ctr">
               <a:buNone/>
             </a:pPr>
             <a:r>
@@ -8199,12 +8113,13 @@
 
 <file path=ppt/slides/slide6.xml><?xml version="1.0" encoding="utf-8"?>
 <p:sld xmlns:a="http://schemas.openxmlformats.org/drawingml/2006/main" xmlns:r="http://schemas.openxmlformats.org/officeDocument/2006/relationships" xmlns:p="http://schemas.openxmlformats.org/presentationml/2006/main">
-  <p:cSld name="Slide 6">
+  <p:cSld>
     <p:bg>
       <p:bgPr>
         <a:solidFill>
           <a:srgbClr val="F7F9FB"/>
         </a:solidFill>
+        <a:effectLst/>
       </p:bgPr>
     </p:bg>
     <p:spTree>
@@ -8261,23 +8176,22 @@
             <a:avLst/>
           </a:prstGeom>
           <a:noFill/>
-          <a:ln/>
         </p:spPr>
         <p:txBody>
           <a:bodyPr wrap="square" rtlCol="0" anchor="ctr"/>
           <a:lstStyle/>
           <a:p>
-            <a:pPr indent="0" marL="0">
-              <a:buNone/>
-            </a:pPr>
-            <a:r>
-              <a:rPr lang="en-US" sz="850" b="1" spc="120" kern="0" dirty="0">
+            <a:pPr marL="0" indent="0">
+              <a:buNone/>
+            </a:pPr>
+            <a:r>
+              <a:rPr lang="en-US" sz="850" b="1" kern="0" spc="120" dirty="0">
                 <a:solidFill>
                   <a:srgbClr val="B7192E"/>
                 </a:solidFill>
-                <a:latin typeface="Microsoft YaHei" pitchFamily="34" charset="0"/>
-                <a:ea typeface="Microsoft YaHei" pitchFamily="34" charset="-122"/>
-                <a:cs typeface="Microsoft YaHei" pitchFamily="34" charset="-120"/>
+                <a:latin typeface="微软雅黑" panose="020B0503020204020204" pitchFamily="34" charset="-122"/>
+                <a:ea typeface="微软雅黑" panose="020B0503020204020204" pitchFamily="34" charset="-122"/>
+                <a:cs typeface="微软雅黑" panose="020B0503020204020204" pitchFamily="34" charset="-120"/>
               </a:rPr>
               <a:t>02  核心项目</a:t>
             </a:r>
@@ -8300,13 +8214,12 @@
             <a:avLst/>
           </a:prstGeom>
           <a:noFill/>
-          <a:ln/>
         </p:spPr>
         <p:txBody>
           <a:bodyPr wrap="square" lIns="0" tIns="0" rIns="0" bIns="0" rtlCol="0" anchor="ctr"/>
           <a:lstStyle/>
           <a:p>
-            <a:pPr indent="0" marL="0">
+            <a:pPr marL="0" indent="0">
               <a:buNone/>
             </a:pPr>
             <a:r>
@@ -8336,13 +8249,12 @@
             <a:avLst/>
           </a:prstGeom>
           <a:noFill/>
-          <a:ln/>
         </p:spPr>
         <p:txBody>
           <a:bodyPr wrap="square" lIns="0" tIns="0" rIns="0" bIns="0" rtlCol="0" anchor="ctr"/>
           <a:lstStyle/>
           <a:p>
-            <a:pPr indent="0" marL="0">
+            <a:pPr marL="0" indent="0">
               <a:buNone/>
             </a:pPr>
             <a:r>
@@ -8372,13 +8284,12 @@
             <a:avLst/>
           </a:prstGeom>
           <a:noFill/>
-          <a:ln/>
         </p:spPr>
         <p:txBody>
           <a:bodyPr wrap="square" lIns="0" tIns="0" rIns="0" bIns="0" rtlCol="0" anchor="ctr"/>
           <a:lstStyle/>
           <a:p>
-            <a:pPr indent="0" marL="0">
+            <a:pPr marL="0" indent="0">
               <a:buNone/>
             </a:pPr>
             <a:r>
@@ -8435,13 +8346,12 @@
             <a:avLst/>
           </a:prstGeom>
           <a:noFill/>
-          <a:ln/>
         </p:spPr>
         <p:txBody>
           <a:bodyPr wrap="square" lIns="0" tIns="0" rIns="0" bIns="0" rtlCol="0" anchor="ctr"/>
           <a:lstStyle/>
           <a:p>
-            <a:pPr algn="ctr" indent="0" marL="0">
+            <a:pPr marL="0" indent="0" algn="ctr">
               <a:buNone/>
             </a:pPr>
             <a:r>
@@ -8498,13 +8408,12 @@
             <a:avLst/>
           </a:prstGeom>
           <a:noFill/>
-          <a:ln/>
         </p:spPr>
         <p:txBody>
           <a:bodyPr wrap="square" lIns="0" tIns="0" rIns="0" bIns="0" rtlCol="0" anchor="ctr"/>
           <a:lstStyle/>
           <a:p>
-            <a:pPr algn="ctr" indent="0" marL="0">
+            <a:pPr marL="0" indent="0" algn="ctr">
               <a:buNone/>
             </a:pPr>
             <a:r>
@@ -8561,13 +8470,12 @@
             <a:avLst/>
           </a:prstGeom>
           <a:noFill/>
-          <a:ln/>
         </p:spPr>
         <p:txBody>
           <a:bodyPr wrap="square" lIns="0" tIns="0" rIns="0" bIns="0" rtlCol="0" anchor="ctr"/>
           <a:lstStyle/>
           <a:p>
-            <a:pPr algn="ctr" indent="0" marL="0">
+            <a:pPr marL="0" indent="0" algn="ctr">
               <a:buNone/>
             </a:pPr>
             <a:r>
@@ -8597,13 +8505,12 @@
             <a:avLst/>
           </a:prstGeom>
           <a:noFill/>
-          <a:ln/>
         </p:spPr>
         <p:txBody>
           <a:bodyPr wrap="square" lIns="0" tIns="0" rIns="0" bIns="0" rtlCol="0" anchor="ctr"/>
           <a:lstStyle/>
           <a:p>
-            <a:pPr algn="ctr" indent="0" marL="0">
+            <a:pPr marL="0" indent="0" algn="ctr">
               <a:buNone/>
             </a:pPr>
             <a:r>
@@ -8685,13 +8592,12 @@
             <a:avLst/>
           </a:prstGeom>
           <a:noFill/>
-          <a:ln/>
         </p:spPr>
         <p:txBody>
           <a:bodyPr wrap="square" lIns="0" tIns="0" rIns="0" bIns="0" rtlCol="0" anchor="ctr"/>
           <a:lstStyle/>
           <a:p>
-            <a:pPr algn="ctr" indent="0" marL="0">
+            <a:pPr marL="0" indent="0" algn="ctr">
               <a:buNone/>
             </a:pPr>
             <a:r>
@@ -8721,7 +8627,6 @@
             <a:avLst/>
           </a:prstGeom>
           <a:noFill/>
-          <a:ln/>
         </p:spPr>
         <p:txBody>
           <a:bodyPr wrap="square" lIns="0" tIns="0" rIns="0" bIns="0" rtlCol="0" anchor="ctr">
@@ -8729,7 +8634,7 @@
           </a:bodyPr>
           <a:lstStyle/>
           <a:p>
-            <a:pPr algn="ctr" indent="0" marL="0">
+            <a:pPr marL="0" indent="0" algn="ctr">
               <a:buNone/>
             </a:pPr>
             <a:r>
@@ -8811,13 +8716,12 @@
             <a:avLst/>
           </a:prstGeom>
           <a:noFill/>
-          <a:ln/>
         </p:spPr>
         <p:txBody>
           <a:bodyPr wrap="square" lIns="0" tIns="0" rIns="0" bIns="0" rtlCol="0" anchor="ctr"/>
           <a:lstStyle/>
           <a:p>
-            <a:pPr algn="ctr" indent="0" marL="0">
+            <a:pPr marL="0" indent="0" algn="ctr">
               <a:buNone/>
             </a:pPr>
             <a:r>
@@ -8847,7 +8751,6 @@
             <a:avLst/>
           </a:prstGeom>
           <a:noFill/>
-          <a:ln/>
         </p:spPr>
         <p:txBody>
           <a:bodyPr wrap="square" lIns="0" tIns="0" rIns="0" bIns="0" rtlCol="0" anchor="ctr">
@@ -8855,7 +8758,7 @@
           </a:bodyPr>
           <a:lstStyle/>
           <a:p>
-            <a:pPr algn="ctr" indent="0" marL="0">
+            <a:pPr marL="0" indent="0" algn="ctr">
               <a:buNone/>
             </a:pPr>
             <a:r>
@@ -8937,13 +8840,12 @@
             <a:avLst/>
           </a:prstGeom>
           <a:noFill/>
-          <a:ln/>
         </p:spPr>
         <p:txBody>
           <a:bodyPr wrap="square" lIns="0" tIns="0" rIns="0" bIns="0" rtlCol="0" anchor="ctr"/>
           <a:lstStyle/>
           <a:p>
-            <a:pPr algn="ctr" indent="0" marL="0">
+            <a:pPr marL="0" indent="0" algn="ctr">
               <a:buNone/>
             </a:pPr>
             <a:r>
@@ -8973,7 +8875,6 @@
             <a:avLst/>
           </a:prstGeom>
           <a:noFill/>
-          <a:ln/>
         </p:spPr>
         <p:txBody>
           <a:bodyPr wrap="square" lIns="0" tIns="0" rIns="0" bIns="0" rtlCol="0" anchor="ctr">
@@ -8981,7 +8882,7 @@
           </a:bodyPr>
           <a:lstStyle/>
           <a:p>
-            <a:pPr algn="ctr" indent="0" marL="0">
+            <a:pPr marL="0" indent="0" algn="ctr">
               <a:buNone/>
             </a:pPr>
             <a:r>
@@ -9063,13 +8964,12 @@
             <a:avLst/>
           </a:prstGeom>
           <a:noFill/>
-          <a:ln/>
         </p:spPr>
         <p:txBody>
           <a:bodyPr wrap="square" lIns="0" tIns="0" rIns="0" bIns="0" rtlCol="0" anchor="ctr"/>
           <a:lstStyle/>
           <a:p>
-            <a:pPr algn="ctr" indent="0" marL="0">
+            <a:pPr marL="0" indent="0" algn="ctr">
               <a:buNone/>
             </a:pPr>
             <a:r>
@@ -9099,7 +8999,6 @@
             <a:avLst/>
           </a:prstGeom>
           <a:noFill/>
-          <a:ln/>
         </p:spPr>
         <p:txBody>
           <a:bodyPr wrap="square" lIns="0" tIns="0" rIns="0" bIns="0" rtlCol="0" anchor="ctr">
@@ -9107,7 +9006,7 @@
           </a:bodyPr>
           <a:lstStyle/>
           <a:p>
-            <a:pPr algn="ctr" indent="0" marL="0">
+            <a:pPr marL="0" indent="0" algn="ctr">
               <a:buNone/>
             </a:pPr>
             <a:r>
@@ -9189,13 +9088,12 @@
             <a:avLst/>
           </a:prstGeom>
           <a:noFill/>
-          <a:ln/>
         </p:spPr>
         <p:txBody>
           <a:bodyPr wrap="square" lIns="0" tIns="0" rIns="0" bIns="0" rtlCol="0" anchor="ctr"/>
           <a:lstStyle/>
           <a:p>
-            <a:pPr algn="ctr" indent="0" marL="0">
+            <a:pPr marL="0" indent="0" algn="ctr">
               <a:buNone/>
             </a:pPr>
             <a:r>
@@ -9277,13 +9175,12 @@
             <a:avLst/>
           </a:prstGeom>
           <a:noFill/>
-          <a:ln/>
         </p:spPr>
         <p:txBody>
           <a:bodyPr wrap="square" lIns="0" tIns="0" rIns="0" bIns="0" rtlCol="0" anchor="ctr"/>
           <a:lstStyle/>
           <a:p>
-            <a:pPr indent="0" marL="0">
+            <a:pPr marL="0" indent="0">
               <a:buNone/>
             </a:pPr>
             <a:r>
@@ -9313,7 +9210,6 @@
             <a:avLst/>
           </a:prstGeom>
           <a:noFill/>
-          <a:ln/>
         </p:spPr>
         <p:txBody>
           <a:bodyPr wrap="square" lIns="254" tIns="254" rIns="254" bIns="254" rtlCol="0" anchor="t">
@@ -9321,7 +9217,7 @@
           </a:bodyPr>
           <a:lstStyle/>
           <a:p>
-            <a:pPr indent="0" marL="0">
+            <a:pPr marL="0" indent="0">
               <a:buNone/>
             </a:pPr>
             <a:r>
@@ -9335,7 +9231,7 @@
             <a:endParaRPr lang="en-US" sz="920" dirty="0"/>
           </a:p>
           <a:p>
-            <a:pPr indent="0" marL="0">
+            <a:pPr marL="0" indent="0">
               <a:buNone/>
             </a:pPr>
             <a:r>
@@ -9417,13 +9313,12 @@
             <a:avLst/>
           </a:prstGeom>
           <a:noFill/>
-          <a:ln/>
         </p:spPr>
         <p:txBody>
           <a:bodyPr wrap="square" lIns="0" tIns="0" rIns="0" bIns="0" rtlCol="0" anchor="ctr"/>
           <a:lstStyle/>
           <a:p>
-            <a:pPr indent="0" marL="0">
+            <a:pPr marL="0" indent="0">
               <a:buNone/>
             </a:pPr>
             <a:r>
@@ -9453,7 +9348,6 @@
             <a:avLst/>
           </a:prstGeom>
           <a:noFill/>
-          <a:ln/>
         </p:spPr>
         <p:txBody>
           <a:bodyPr wrap="square" lIns="254" tIns="254" rIns="254" bIns="254" rtlCol="0" anchor="t">
@@ -9461,7 +9355,7 @@
           </a:bodyPr>
           <a:lstStyle/>
           <a:p>
-            <a:pPr indent="0" marL="0">
+            <a:pPr marL="0" indent="0">
               <a:buNone/>
             </a:pPr>
             <a:r>
@@ -9475,7 +9369,7 @@
             <a:endParaRPr lang="en-US" sz="920" dirty="0"/>
           </a:p>
           <a:p>
-            <a:pPr indent="0" marL="0">
+            <a:pPr marL="0" indent="0">
               <a:buNone/>
             </a:pPr>
             <a:r>
@@ -9489,6 +9383,56 @@
             <a:endParaRPr lang="en-US" sz="920" dirty="0"/>
           </a:p>
         </p:txBody>
+      </p:sp>
+      <p:sp>
+        <p:nvSpPr>
+          <p:cNvPr id="41" name="Shape 12"/>
+          <p:cNvSpPr/>
+          <p:nvPr/>
+        </p:nvSpPr>
+        <p:spPr>
+          <a:xfrm>
+            <a:off x="2514600" y="1710055"/>
+            <a:ext cx="675640" cy="349250"/>
+          </a:xfrm>
+          <a:prstGeom prst="line">
+            <a:avLst/>
+          </a:prstGeom>
+          <a:noFill/>
+          <a:ln w="15240">
+            <a:solidFill>
+              <a:srgbClr val="98A6B3"/>
+            </a:solidFill>
+            <a:prstDash val="solid"/>
+            <a:headEnd type="none"/>
+            <a:tailEnd type="triangle"/>
+          </a:ln>
+        </p:spPr>
+      </p:sp>
+      <p:sp>
+        <p:nvSpPr>
+          <p:cNvPr id="42" name="Shape 12"/>
+          <p:cNvSpPr/>
+          <p:nvPr/>
+        </p:nvSpPr>
+        <p:spPr>
+          <a:xfrm flipV="1">
+            <a:off x="2514600" y="2456180"/>
+            <a:ext cx="667385" cy="735330"/>
+          </a:xfrm>
+          <a:prstGeom prst="line">
+            <a:avLst/>
+          </a:prstGeom>
+          <a:noFill/>
+          <a:ln w="15240">
+            <a:solidFill>
+              <a:srgbClr val="98A6B3"/>
+            </a:solidFill>
+            <a:prstDash val="solid"/>
+            <a:headEnd type="none"/>
+            <a:tailEnd type="triangle"/>
+          </a:ln>
+        </p:spPr>
       </p:sp>
     </p:spTree>
   </p:cSld>
@@ -9500,12 +9444,13 @@
 
 <file path=ppt/slides/slide7.xml><?xml version="1.0" encoding="utf-8"?>
 <p:sld xmlns:a="http://schemas.openxmlformats.org/drawingml/2006/main" xmlns:r="http://schemas.openxmlformats.org/officeDocument/2006/relationships" xmlns:p="http://schemas.openxmlformats.org/presentationml/2006/main">
-  <p:cSld name="Slide 7">
+  <p:cSld>
     <p:bg>
       <p:bgPr>
         <a:solidFill>
           <a:srgbClr val="F7F9FB"/>
         </a:solidFill>
+        <a:effectLst/>
       </p:bgPr>
     </p:bg>
     <p:spTree>
@@ -9562,23 +9507,22 @@
             <a:avLst/>
           </a:prstGeom>
           <a:noFill/>
-          <a:ln/>
         </p:spPr>
         <p:txBody>
           <a:bodyPr wrap="square" rtlCol="0" anchor="ctr"/>
           <a:lstStyle/>
           <a:p>
-            <a:pPr indent="0" marL="0">
-              <a:buNone/>
-            </a:pPr>
-            <a:r>
-              <a:rPr lang="en-US" sz="850" b="1" spc="120" kern="0" dirty="0">
+            <a:pPr marL="0" indent="0">
+              <a:buNone/>
+            </a:pPr>
+            <a:r>
+              <a:rPr lang="en-US" sz="850" b="1" kern="0" spc="120" dirty="0">
                 <a:solidFill>
                   <a:srgbClr val="B7192E"/>
                 </a:solidFill>
-                <a:latin typeface="Microsoft YaHei" pitchFamily="34" charset="0"/>
-                <a:ea typeface="Microsoft YaHei" pitchFamily="34" charset="-122"/>
-                <a:cs typeface="Microsoft YaHei" pitchFamily="34" charset="-120"/>
+                <a:latin typeface="微软雅黑" panose="020B0503020204020204" pitchFamily="34" charset="-122"/>
+                <a:ea typeface="微软雅黑" panose="020B0503020204020204" pitchFamily="34" charset="-122"/>
+                <a:cs typeface="微软雅黑" panose="020B0503020204020204" pitchFamily="34" charset="-120"/>
               </a:rPr>
               <a:t>02  核心项目</a:t>
             </a:r>
@@ -9601,13 +9545,12 @@
             <a:avLst/>
           </a:prstGeom>
           <a:noFill/>
-          <a:ln/>
         </p:spPr>
         <p:txBody>
           <a:bodyPr wrap="square" lIns="0" tIns="0" rIns="0" bIns="0" rtlCol="0" anchor="ctr"/>
           <a:lstStyle/>
           <a:p>
-            <a:pPr indent="0" marL="0">
+            <a:pPr marL="0" indent="0">
               <a:buNone/>
             </a:pPr>
             <a:r>
@@ -9637,13 +9580,12 @@
             <a:avLst/>
           </a:prstGeom>
           <a:noFill/>
-          <a:ln/>
         </p:spPr>
         <p:txBody>
           <a:bodyPr wrap="square" lIns="0" tIns="0" rIns="0" bIns="0" rtlCol="0" anchor="ctr"/>
           <a:lstStyle/>
           <a:p>
-            <a:pPr indent="0" marL="0">
+            <a:pPr marL="0" indent="0">
               <a:buNone/>
             </a:pPr>
             <a:r>
@@ -9673,13 +9615,12 @@
             <a:avLst/>
           </a:prstGeom>
           <a:noFill/>
-          <a:ln/>
         </p:spPr>
         <p:txBody>
           <a:bodyPr wrap="square" lIns="0" tIns="0" rIns="0" bIns="0" rtlCol="0" anchor="ctr"/>
           <a:lstStyle/>
           <a:p>
-            <a:pPr indent="0" marL="0">
+            <a:pPr marL="0" indent="0">
               <a:buNone/>
             </a:pPr>
             <a:r>
@@ -9698,7 +9639,11 @@
         <p:nvSpPr>
           <p:cNvPr id="7" name="Shape 5"/>
           <p:cNvSpPr/>
-          <p:nvPr/>
+          <p:nvPr>
+            <p:custDataLst>
+              <p:tags r:id="rId1"/>
+            </p:custDataLst>
+          </p:nvPr>
         </p:nvSpPr>
         <p:spPr>
           <a:xfrm>
@@ -9725,7 +9670,11 @@
         <p:nvSpPr>
           <p:cNvPr id="8" name="Shape 6"/>
           <p:cNvSpPr/>
-          <p:nvPr/>
+          <p:nvPr>
+            <p:custDataLst>
+              <p:tags r:id="rId2"/>
+            </p:custDataLst>
+          </p:nvPr>
         </p:nvSpPr>
         <p:spPr>
           <a:xfrm>
@@ -9750,7 +9699,11 @@
         <p:nvSpPr>
           <p:cNvPr id="9" name="Text 7"/>
           <p:cNvSpPr/>
-          <p:nvPr/>
+          <p:nvPr>
+            <p:custDataLst>
+              <p:tags r:id="rId3"/>
+            </p:custDataLst>
+          </p:nvPr>
         </p:nvSpPr>
         <p:spPr>
           <a:xfrm>
@@ -9761,13 +9714,12 @@
             <a:avLst/>
           </a:prstGeom>
           <a:noFill/>
-          <a:ln/>
         </p:spPr>
         <p:txBody>
           <a:bodyPr wrap="square" lIns="0" tIns="0" rIns="0" bIns="0" rtlCol="0" anchor="ctr"/>
           <a:lstStyle/>
           <a:p>
-            <a:pPr indent="0" marL="0">
+            <a:pPr marL="0" indent="0">
               <a:buNone/>
             </a:pPr>
             <a:r>
@@ -9786,7 +9738,11 @@
         <p:nvSpPr>
           <p:cNvPr id="10" name="Text 8"/>
           <p:cNvSpPr/>
-          <p:nvPr/>
+          <p:nvPr>
+            <p:custDataLst>
+              <p:tags r:id="rId4"/>
+            </p:custDataLst>
+          </p:nvPr>
         </p:nvSpPr>
         <p:spPr>
           <a:xfrm>
@@ -9797,7 +9753,6 @@
             <a:avLst/>
           </a:prstGeom>
           <a:noFill/>
-          <a:ln/>
         </p:spPr>
         <p:txBody>
           <a:bodyPr wrap="square" lIns="254" tIns="254" rIns="254" bIns="254" rtlCol="0" anchor="t">
@@ -9805,100 +9760,132 @@
           </a:bodyPr>
           <a:lstStyle/>
           <a:p>
-            <a:pPr indent="0" marL="0">
-              <a:buNone/>
-            </a:pPr>
-            <a:r>
-              <a:rPr lang="en-US" sz="920" dirty="0">
+            <a:pPr marL="0" indent="0">
+              <a:lnSpc>
+                <a:spcPct val="150000"/>
+              </a:lnSpc>
+              <a:buNone/>
+            </a:pPr>
+            <a:r>
+              <a:rPr lang="en-US" sz="1200" dirty="0">
                 <a:solidFill>
                   <a:srgbClr val="66727D"/>
                 </a:solidFill>
               </a:rPr>
               <a:t>业务痛点</a:t>
             </a:r>
-            <a:endParaRPr lang="en-US" sz="920" dirty="0"/>
-          </a:p>
-          <a:p>
-            <a:pPr indent="0" marL="0">
-              <a:buNone/>
-            </a:pPr>
-            <a:r>
-              <a:rPr lang="en-US" sz="920" dirty="0">
+            <a:endParaRPr lang="en-US" sz="1200" dirty="0"/>
+          </a:p>
+          <a:p>
+            <a:pPr marL="0" indent="0">
+              <a:lnSpc>
+                <a:spcPct val="150000"/>
+              </a:lnSpc>
+              <a:buNone/>
+            </a:pPr>
+            <a:r>
+              <a:rPr lang="en-US" sz="1200" dirty="0">
                 <a:solidFill>
                   <a:srgbClr val="66727D"/>
                 </a:solidFill>
               </a:rPr>
               <a:t>多源信息、长分析链路，人工整合耗时。</a:t>
             </a:r>
-            <a:endParaRPr lang="en-US" sz="920" dirty="0"/>
-          </a:p>
-          <a:p>
-            <a:pPr indent="0" marL="0">
-              <a:buNone/>
-            </a:pPr>
-            <a:endParaRPr lang="en-US" sz="920" dirty="0"/>
-          </a:p>
-          <a:p>
-            <a:pPr indent="0" marL="0">
-              <a:buNone/>
-            </a:pPr>
-            <a:r>
-              <a:rPr lang="en-US" sz="920" dirty="0">
+            <a:endParaRPr lang="en-US" sz="1200" dirty="0"/>
+          </a:p>
+          <a:p>
+            <a:pPr marL="0" indent="0">
+              <a:lnSpc>
+                <a:spcPct val="150000"/>
+              </a:lnSpc>
+              <a:buNone/>
+            </a:pPr>
+            <a:endParaRPr lang="en-US" sz="1200" dirty="0"/>
+          </a:p>
+          <a:p>
+            <a:pPr marL="0" indent="0">
+              <a:lnSpc>
+                <a:spcPct val="150000"/>
+              </a:lnSpc>
+              <a:buNone/>
+            </a:pPr>
+            <a:r>
+              <a:rPr lang="en-US" sz="1200" dirty="0">
                 <a:solidFill>
                   <a:srgbClr val="66727D"/>
                 </a:solidFill>
               </a:rPr>
               <a:t>项目能力</a:t>
             </a:r>
-            <a:endParaRPr lang="en-US" sz="920" dirty="0"/>
-          </a:p>
-          <a:p>
-            <a:pPr indent="0" marL="0">
-              <a:buNone/>
-            </a:pPr>
-            <a:r>
-              <a:rPr lang="en-US" sz="920" dirty="0">
+            <a:endParaRPr lang="en-US" sz="1200" dirty="0"/>
+          </a:p>
+          <a:p>
+            <a:pPr marL="0" indent="0">
+              <a:lnSpc>
+                <a:spcPct val="150000"/>
+              </a:lnSpc>
+              <a:buNone/>
+            </a:pPr>
+            <a:r>
+              <a:rPr lang="en-US" sz="1200" dirty="0">
                 <a:solidFill>
                   <a:srgbClr val="66727D"/>
                 </a:solidFill>
               </a:rPr>
               <a:t>七 Agent 分工完成数据采集、技术面、基本面、风控和多策略决策。</a:t>
             </a:r>
-            <a:endParaRPr lang="en-US" sz="920" dirty="0"/>
-          </a:p>
-          <a:p>
-            <a:pPr indent="0" marL="0">
-              <a:buNone/>
-            </a:pPr>
-            <a:endParaRPr lang="en-US" sz="920" dirty="0"/>
-          </a:p>
-          <a:p>
-            <a:pPr indent="0" marL="0">
-              <a:buNone/>
-            </a:pPr>
-            <a:r>
-              <a:rPr lang="en-US" sz="920" dirty="0">
+            <a:r>
+              <a:rPr lang="zh-CN" altLang="en-US" sz="1200" dirty="0">
                 <a:solidFill>
                   <a:srgbClr val="66727D"/>
                 </a:solidFill>
               </a:rPr>
+              <a:t>！！！</a:t>
+            </a:r>
+            <a:endParaRPr lang="en-US" sz="1200" dirty="0"/>
+          </a:p>
+          <a:p>
+            <a:pPr marL="0" indent="0">
+              <a:lnSpc>
+                <a:spcPct val="150000"/>
+              </a:lnSpc>
+              <a:buNone/>
+            </a:pPr>
+            <a:endParaRPr lang="en-US" sz="1200" dirty="0"/>
+          </a:p>
+          <a:p>
+            <a:pPr marL="0" indent="0">
+              <a:lnSpc>
+                <a:spcPct val="150000"/>
+              </a:lnSpc>
+              <a:buNone/>
+            </a:pPr>
+            <a:r>
+              <a:rPr lang="en-US" sz="1200" dirty="0">
+                <a:solidFill>
+                  <a:srgbClr val="66727D"/>
+                </a:solidFill>
+              </a:rPr>
               <a:t>价值</a:t>
             </a:r>
-            <a:endParaRPr lang="en-US" sz="920" dirty="0"/>
-          </a:p>
-          <a:p>
-            <a:pPr indent="0" marL="0">
-              <a:buNone/>
-            </a:pPr>
-            <a:r>
-              <a:rPr lang="en-US" sz="920" dirty="0">
+            <a:endParaRPr lang="en-US" sz="1200" dirty="0"/>
+          </a:p>
+          <a:p>
+            <a:pPr marL="0" indent="0">
+              <a:lnSpc>
+                <a:spcPct val="150000"/>
+              </a:lnSpc>
+              <a:buNone/>
+            </a:pPr>
+            <a:r>
+              <a:rPr lang="en-US" sz="1200" dirty="0">
                 <a:solidFill>
                   <a:srgbClr val="66727D"/>
                 </a:solidFill>
               </a:rPr>
               <a:t>自动化重复分析步骤，让研究人员更聚焦研判。</a:t>
             </a:r>
-            <a:endParaRPr lang="en-US" sz="920" dirty="0"/>
+            <a:endParaRPr lang="en-US" sz="1200" dirty="0"/>
           </a:p>
         </p:txBody>
       </p:sp>
@@ -9906,7 +9893,11 @@
         <p:nvSpPr>
           <p:cNvPr id="11" name="Shape 9"/>
           <p:cNvSpPr/>
-          <p:nvPr/>
+          <p:nvPr>
+            <p:custDataLst>
+              <p:tags r:id="rId5"/>
+            </p:custDataLst>
+          </p:nvPr>
         </p:nvSpPr>
         <p:spPr>
           <a:xfrm>
@@ -9933,7 +9924,11 @@
         <p:nvSpPr>
           <p:cNvPr id="12" name="Shape 10"/>
           <p:cNvSpPr/>
-          <p:nvPr/>
+          <p:nvPr>
+            <p:custDataLst>
+              <p:tags r:id="rId6"/>
+            </p:custDataLst>
+          </p:nvPr>
         </p:nvSpPr>
         <p:spPr>
           <a:xfrm>
@@ -9958,7 +9953,11 @@
         <p:nvSpPr>
           <p:cNvPr id="13" name="Text 11"/>
           <p:cNvSpPr/>
-          <p:nvPr/>
+          <p:nvPr>
+            <p:custDataLst>
+              <p:tags r:id="rId7"/>
+            </p:custDataLst>
+          </p:nvPr>
         </p:nvSpPr>
         <p:spPr>
           <a:xfrm>
@@ -9969,13 +9968,12 @@
             <a:avLst/>
           </a:prstGeom>
           <a:noFill/>
-          <a:ln/>
         </p:spPr>
         <p:txBody>
           <a:bodyPr wrap="square" lIns="0" tIns="0" rIns="0" bIns="0" rtlCol="0" anchor="ctr"/>
           <a:lstStyle/>
           <a:p>
-            <a:pPr indent="0" marL="0">
+            <a:pPr marL="0" indent="0">
               <a:buNone/>
             </a:pPr>
             <a:r>
@@ -9994,7 +9992,11 @@
         <p:nvSpPr>
           <p:cNvPr id="14" name="Text 12"/>
           <p:cNvSpPr/>
-          <p:nvPr/>
+          <p:nvPr>
+            <p:custDataLst>
+              <p:tags r:id="rId8"/>
+            </p:custDataLst>
+          </p:nvPr>
         </p:nvSpPr>
         <p:spPr>
           <a:xfrm>
@@ -10005,7 +10007,6 @@
             <a:avLst/>
           </a:prstGeom>
           <a:noFill/>
-          <a:ln/>
         </p:spPr>
         <p:txBody>
           <a:bodyPr wrap="square" lIns="254" tIns="254" rIns="254" bIns="254" rtlCol="0" anchor="t">
@@ -10013,100 +10014,132 @@
           </a:bodyPr>
           <a:lstStyle/>
           <a:p>
-            <a:pPr indent="0" marL="0">
-              <a:buNone/>
-            </a:pPr>
-            <a:r>
-              <a:rPr lang="en-US" sz="920" dirty="0">
+            <a:pPr marL="0" indent="0">
+              <a:lnSpc>
+                <a:spcPct val="150000"/>
+              </a:lnSpc>
+              <a:buNone/>
+            </a:pPr>
+            <a:r>
+              <a:rPr lang="en-US" sz="1200" dirty="0">
                 <a:solidFill>
                   <a:srgbClr val="66727D"/>
                 </a:solidFill>
               </a:rPr>
               <a:t>业务痛点</a:t>
             </a:r>
-            <a:endParaRPr lang="en-US" sz="920" dirty="0"/>
-          </a:p>
-          <a:p>
-            <a:pPr indent="0" marL="0">
-              <a:buNone/>
-            </a:pPr>
-            <a:r>
-              <a:rPr lang="en-US" sz="920" dirty="0">
+            <a:endParaRPr lang="en-US" sz="1200" dirty="0"/>
+          </a:p>
+          <a:p>
+            <a:pPr marL="0" indent="0">
+              <a:lnSpc>
+                <a:spcPct val="150000"/>
+              </a:lnSpc>
+              <a:buNone/>
+            </a:pPr>
+            <a:r>
+              <a:rPr lang="en-US" sz="1200" dirty="0">
                 <a:solidFill>
                   <a:srgbClr val="66727D"/>
                 </a:solidFill>
               </a:rPr>
               <a:t>多步骤问答质量要求高，同时存在严格合规约束。</a:t>
             </a:r>
-            <a:endParaRPr lang="en-US" sz="920" dirty="0"/>
-          </a:p>
-          <a:p>
-            <a:pPr indent="0" marL="0">
-              <a:buNone/>
-            </a:pPr>
-            <a:endParaRPr lang="en-US" sz="920" dirty="0"/>
-          </a:p>
-          <a:p>
-            <a:pPr indent="0" marL="0">
-              <a:buNone/>
-            </a:pPr>
-            <a:r>
-              <a:rPr lang="en-US" sz="920" dirty="0">
+            <a:endParaRPr lang="en-US" sz="1200" dirty="0"/>
+          </a:p>
+          <a:p>
+            <a:pPr marL="0" indent="0">
+              <a:lnSpc>
+                <a:spcPct val="150000"/>
+              </a:lnSpc>
+              <a:buNone/>
+            </a:pPr>
+            <a:endParaRPr lang="en-US" sz="1200" dirty="0"/>
+          </a:p>
+          <a:p>
+            <a:pPr marL="0" indent="0">
+              <a:lnSpc>
+                <a:spcPct val="150000"/>
+              </a:lnSpc>
+              <a:buNone/>
+            </a:pPr>
+            <a:r>
+              <a:rPr lang="en-US" sz="1200" dirty="0">
                 <a:solidFill>
                   <a:srgbClr val="66727D"/>
                 </a:solidFill>
               </a:rPr>
               <a:t>项目能力</a:t>
             </a:r>
-            <a:endParaRPr lang="en-US" sz="920" dirty="0"/>
-          </a:p>
-          <a:p>
-            <a:pPr indent="0" marL="0">
-              <a:buNone/>
-            </a:pPr>
-            <a:r>
-              <a:rPr lang="en-US" sz="920" dirty="0">
+            <a:endParaRPr lang="en-US" sz="1200" dirty="0"/>
+          </a:p>
+          <a:p>
+            <a:pPr marL="0" indent="0">
+              <a:lnSpc>
+                <a:spcPct val="150000"/>
+              </a:lnSpc>
+              <a:buNone/>
+            </a:pPr>
+            <a:r>
+              <a:rPr lang="en-US" sz="1200" dirty="0">
                 <a:solidFill>
                   <a:srgbClr val="66727D"/>
                 </a:solidFill>
               </a:rPr>
               <a:t>上下文记忆 + 句级敏感词检测与拦截 + 质量评价。</a:t>
             </a:r>
-            <a:endParaRPr lang="en-US" sz="920" dirty="0"/>
-          </a:p>
-          <a:p>
-            <a:pPr indent="0" marL="0">
-              <a:buNone/>
-            </a:pPr>
-            <a:endParaRPr lang="en-US" sz="920" dirty="0"/>
-          </a:p>
-          <a:p>
-            <a:pPr indent="0" marL="0">
-              <a:buNone/>
-            </a:pPr>
-            <a:r>
-              <a:rPr lang="en-US" sz="920" dirty="0">
+            <a:r>
+              <a:rPr lang="zh-CN" altLang="en-US" sz="1200" dirty="0">
                 <a:solidFill>
                   <a:srgbClr val="66727D"/>
                 </a:solidFill>
               </a:rPr>
+              <a:t>！！！</a:t>
+            </a:r>
+            <a:endParaRPr lang="en-US" sz="1200" dirty="0"/>
+          </a:p>
+          <a:p>
+            <a:pPr marL="0" indent="0">
+              <a:lnSpc>
+                <a:spcPct val="150000"/>
+              </a:lnSpc>
+              <a:buNone/>
+            </a:pPr>
+            <a:endParaRPr lang="en-US" sz="1200" dirty="0"/>
+          </a:p>
+          <a:p>
+            <a:pPr marL="0" indent="0">
+              <a:lnSpc>
+                <a:spcPct val="150000"/>
+              </a:lnSpc>
+              <a:buNone/>
+            </a:pPr>
+            <a:r>
+              <a:rPr lang="en-US" sz="1200" dirty="0">
+                <a:solidFill>
+                  <a:srgbClr val="66727D"/>
+                </a:solidFill>
+              </a:rPr>
               <a:t>价值</a:t>
             </a:r>
-            <a:endParaRPr lang="en-US" sz="920" dirty="0"/>
-          </a:p>
-          <a:p>
-            <a:pPr indent="0" marL="0">
-              <a:buNone/>
-            </a:pPr>
-            <a:r>
-              <a:rPr lang="en-US" sz="920" dirty="0">
+            <a:endParaRPr lang="en-US" sz="1200" dirty="0"/>
+          </a:p>
+          <a:p>
+            <a:pPr marL="0" indent="0">
+              <a:lnSpc>
+                <a:spcPct val="150000"/>
+              </a:lnSpc>
+              <a:buNone/>
+            </a:pPr>
+            <a:r>
+              <a:rPr lang="en-US" sz="1200" dirty="0">
                 <a:solidFill>
                   <a:srgbClr val="66727D"/>
                 </a:solidFill>
               </a:rPr>
               <a:t>辅助生成更可控的回答，降低违规表述直接输出的风险。</a:t>
             </a:r>
-            <a:endParaRPr lang="en-US" sz="920" dirty="0"/>
+            <a:endParaRPr lang="en-US" sz="1200" dirty="0"/>
           </a:p>
         </p:txBody>
       </p:sp>
@@ -10114,7 +10147,11 @@
         <p:nvSpPr>
           <p:cNvPr id="15" name="Shape 13"/>
           <p:cNvSpPr/>
-          <p:nvPr/>
+          <p:nvPr>
+            <p:custDataLst>
+              <p:tags r:id="rId9"/>
+            </p:custDataLst>
+          </p:nvPr>
         </p:nvSpPr>
         <p:spPr>
           <a:xfrm>
@@ -10141,7 +10178,11 @@
         <p:nvSpPr>
           <p:cNvPr id="16" name="Shape 14"/>
           <p:cNvSpPr/>
-          <p:nvPr/>
+          <p:nvPr>
+            <p:custDataLst>
+              <p:tags r:id="rId10"/>
+            </p:custDataLst>
+          </p:nvPr>
         </p:nvSpPr>
         <p:spPr>
           <a:xfrm>
@@ -10166,7 +10207,11 @@
         <p:nvSpPr>
           <p:cNvPr id="17" name="Text 15"/>
           <p:cNvSpPr/>
-          <p:nvPr/>
+          <p:nvPr>
+            <p:custDataLst>
+              <p:tags r:id="rId11"/>
+            </p:custDataLst>
+          </p:nvPr>
         </p:nvSpPr>
         <p:spPr>
           <a:xfrm>
@@ -10177,13 +10222,12 @@
             <a:avLst/>
           </a:prstGeom>
           <a:noFill/>
-          <a:ln/>
         </p:spPr>
         <p:txBody>
           <a:bodyPr wrap="square" lIns="0" tIns="0" rIns="0" bIns="0" rtlCol="0" anchor="ctr"/>
           <a:lstStyle/>
           <a:p>
-            <a:pPr indent="0" marL="0">
+            <a:pPr marL="0" indent="0">
               <a:buNone/>
             </a:pPr>
             <a:r>
@@ -10202,7 +10246,11 @@
         <p:nvSpPr>
           <p:cNvPr id="18" name="Text 16"/>
           <p:cNvSpPr/>
-          <p:nvPr/>
+          <p:nvPr>
+            <p:custDataLst>
+              <p:tags r:id="rId12"/>
+            </p:custDataLst>
+          </p:nvPr>
         </p:nvSpPr>
         <p:spPr>
           <a:xfrm>
@@ -10213,7 +10261,6 @@
             <a:avLst/>
           </a:prstGeom>
           <a:noFill/>
-          <a:ln/>
         </p:spPr>
         <p:txBody>
           <a:bodyPr wrap="square" lIns="254" tIns="254" rIns="254" bIns="254" rtlCol="0" anchor="t">
@@ -10221,100 +10268,124 @@
           </a:bodyPr>
           <a:lstStyle/>
           <a:p>
-            <a:pPr indent="0" marL="0">
-              <a:buNone/>
-            </a:pPr>
-            <a:r>
-              <a:rPr lang="en-US" sz="920" dirty="0">
+            <a:pPr marL="0" indent="0">
+              <a:lnSpc>
+                <a:spcPct val="150000"/>
+              </a:lnSpc>
+              <a:buNone/>
+            </a:pPr>
+            <a:r>
+              <a:rPr lang="en-US" sz="1200" dirty="0">
                 <a:solidFill>
                   <a:srgbClr val="66727D"/>
                 </a:solidFill>
               </a:rPr>
               <a:t>业务痛点</a:t>
             </a:r>
-            <a:endParaRPr lang="en-US" sz="920" dirty="0"/>
-          </a:p>
-          <a:p>
-            <a:pPr indent="0" marL="0">
-              <a:buNone/>
-            </a:pPr>
-            <a:r>
-              <a:rPr lang="en-US" sz="920" dirty="0">
+            <a:endParaRPr lang="en-US" sz="1200" dirty="0"/>
+          </a:p>
+          <a:p>
+            <a:pPr marL="0" indent="0">
+              <a:lnSpc>
+                <a:spcPct val="150000"/>
+              </a:lnSpc>
+              <a:buNone/>
+            </a:pPr>
+            <a:r>
+              <a:rPr lang="en-US" sz="1200" dirty="0">
                 <a:solidFill>
                   <a:srgbClr val="66727D"/>
                 </a:solidFill>
               </a:rPr>
               <a:t>Agent 化流程难追踪，异常定位与审计困难。</a:t>
             </a:r>
-            <a:endParaRPr lang="en-US" sz="920" dirty="0"/>
-          </a:p>
-          <a:p>
-            <a:pPr indent="0" marL="0">
-              <a:buNone/>
-            </a:pPr>
-            <a:endParaRPr lang="en-US" sz="920" dirty="0"/>
-          </a:p>
-          <a:p>
-            <a:pPr indent="0" marL="0">
-              <a:buNone/>
-            </a:pPr>
-            <a:r>
-              <a:rPr lang="en-US" sz="920" dirty="0">
+            <a:endParaRPr lang="en-US" sz="1200" dirty="0"/>
+          </a:p>
+          <a:p>
+            <a:pPr marL="0" indent="0">
+              <a:lnSpc>
+                <a:spcPct val="150000"/>
+              </a:lnSpc>
+              <a:buNone/>
+            </a:pPr>
+            <a:endParaRPr lang="en-US" sz="1200" dirty="0"/>
+          </a:p>
+          <a:p>
+            <a:pPr marL="0" indent="0">
+              <a:lnSpc>
+                <a:spcPct val="150000"/>
+              </a:lnSpc>
+              <a:buNone/>
+            </a:pPr>
+            <a:r>
+              <a:rPr lang="en-US" sz="1200" dirty="0">
                 <a:solidFill>
                   <a:srgbClr val="66727D"/>
                 </a:solidFill>
               </a:rPr>
               <a:t>项目能力</a:t>
             </a:r>
-            <a:endParaRPr lang="en-US" sz="920" dirty="0"/>
-          </a:p>
-          <a:p>
-            <a:pPr indent="0" marL="0">
-              <a:buNone/>
-            </a:pPr>
-            <a:r>
-              <a:rPr lang="en-US" sz="920" dirty="0">
+            <a:endParaRPr lang="en-US" sz="1200" dirty="0"/>
+          </a:p>
+          <a:p>
+            <a:pPr marL="0" indent="0">
+              <a:lnSpc>
+                <a:spcPct val="150000"/>
+              </a:lnSpc>
+              <a:buNone/>
+            </a:pPr>
+            <a:r>
+              <a:rPr lang="en-US" sz="1200" dirty="0">
                 <a:solidFill>
                   <a:srgbClr val="66727D"/>
                 </a:solidFill>
               </a:rPr>
               <a:t>全链路 Trace、异常告警、拓扑可视化、结果回溯。</a:t>
             </a:r>
-            <a:endParaRPr lang="en-US" sz="920" dirty="0"/>
-          </a:p>
-          <a:p>
-            <a:pPr indent="0" marL="0">
-              <a:buNone/>
-            </a:pPr>
-            <a:endParaRPr lang="en-US" sz="920" dirty="0"/>
-          </a:p>
-          <a:p>
-            <a:pPr indent="0" marL="0">
-              <a:buNone/>
-            </a:pPr>
-            <a:r>
-              <a:rPr lang="en-US" sz="920" dirty="0">
+            <a:endParaRPr lang="en-US" sz="1200" dirty="0"/>
+          </a:p>
+          <a:p>
+            <a:pPr marL="0" indent="0">
+              <a:lnSpc>
+                <a:spcPct val="150000"/>
+              </a:lnSpc>
+              <a:buNone/>
+            </a:pPr>
+            <a:endParaRPr lang="en-US" sz="1200" dirty="0"/>
+          </a:p>
+          <a:p>
+            <a:pPr marL="0" indent="0">
+              <a:lnSpc>
+                <a:spcPct val="150000"/>
+              </a:lnSpc>
+              <a:buNone/>
+            </a:pPr>
+            <a:r>
+              <a:rPr lang="en-US" sz="1200" dirty="0">
                 <a:solidFill>
                   <a:srgbClr val="66727D"/>
                 </a:solidFill>
               </a:rPr>
               <a:t>价值</a:t>
             </a:r>
-            <a:endParaRPr lang="en-US" sz="920" dirty="0"/>
-          </a:p>
-          <a:p>
-            <a:pPr indent="0" marL="0">
-              <a:buNone/>
-            </a:pPr>
-            <a:r>
-              <a:rPr lang="en-US" sz="920" dirty="0">
+            <a:endParaRPr lang="en-US" sz="1200" dirty="0"/>
+          </a:p>
+          <a:p>
+            <a:pPr marL="0" indent="0">
+              <a:lnSpc>
+                <a:spcPct val="150000"/>
+              </a:lnSpc>
+              <a:buNone/>
+            </a:pPr>
+            <a:r>
+              <a:rPr lang="en-US" sz="1200" dirty="0">
                 <a:solidFill>
                   <a:srgbClr val="66727D"/>
                 </a:solidFill>
               </a:rPr>
               <a:t>让自动化流程“可观测、可审计、可追溯”。</a:t>
             </a:r>
-            <a:endParaRPr lang="en-US" sz="920" dirty="0"/>
+            <a:endParaRPr lang="en-US" sz="1200" dirty="0"/>
           </a:p>
         </p:txBody>
       </p:sp>
@@ -10333,13 +10404,12 @@
             <a:avLst/>
           </a:prstGeom>
           <a:noFill/>
-          <a:ln/>
         </p:spPr>
         <p:txBody>
           <a:bodyPr wrap="square" lIns="0" tIns="0" rIns="0" bIns="0" rtlCol="0" anchor="ctr"/>
           <a:lstStyle/>
           <a:p>
-            <a:pPr algn="ctr" indent="0" marL="0">
+            <a:pPr marL="0" indent="0" algn="ctr">
               <a:buNone/>
             </a:pPr>
             <a:r>
@@ -10364,12 +10434,13 @@
 
 <file path=ppt/slides/slide8.xml><?xml version="1.0" encoding="utf-8"?>
 <p:sld xmlns:a="http://schemas.openxmlformats.org/drawingml/2006/main" xmlns:r="http://schemas.openxmlformats.org/officeDocument/2006/relationships" xmlns:p="http://schemas.openxmlformats.org/presentationml/2006/main">
-  <p:cSld name="Slide 8">
+  <p:cSld>
     <p:bg>
       <p:bgPr>
         <a:solidFill>
           <a:srgbClr val="F7F9FB"/>
         </a:solidFill>
+        <a:effectLst/>
       </p:bgPr>
     </p:bg>
     <p:spTree>
@@ -10426,23 +10497,22 @@
             <a:avLst/>
           </a:prstGeom>
           <a:noFill/>
-          <a:ln/>
         </p:spPr>
         <p:txBody>
           <a:bodyPr wrap="square" rtlCol="0" anchor="ctr"/>
           <a:lstStyle/>
           <a:p>
-            <a:pPr indent="0" marL="0">
-              <a:buNone/>
-            </a:pPr>
-            <a:r>
-              <a:rPr lang="en-US" sz="850" b="1" spc="120" kern="0" dirty="0">
+            <a:pPr marL="0" indent="0">
+              <a:buNone/>
+            </a:pPr>
+            <a:r>
+              <a:rPr lang="en-US" sz="850" b="1" kern="0" spc="120" dirty="0">
                 <a:solidFill>
                   <a:srgbClr val="B7192E"/>
                 </a:solidFill>
-                <a:latin typeface="Microsoft YaHei" pitchFamily="34" charset="0"/>
-                <a:ea typeface="Microsoft YaHei" pitchFamily="34" charset="-122"/>
-                <a:cs typeface="Microsoft YaHei" pitchFamily="34" charset="-120"/>
+                <a:latin typeface="微软雅黑" panose="020B0503020204020204" pitchFamily="34" charset="-122"/>
+                <a:ea typeface="微软雅黑" panose="020B0503020204020204" pitchFamily="34" charset="-122"/>
+                <a:cs typeface="微软雅黑" panose="020B0503020204020204" pitchFamily="34" charset="-120"/>
               </a:rPr>
               <a:t>02  核心项目</a:t>
             </a:r>
@@ -10465,13 +10535,12 @@
             <a:avLst/>
           </a:prstGeom>
           <a:noFill/>
-          <a:ln/>
         </p:spPr>
         <p:txBody>
           <a:bodyPr wrap="square" lIns="0" tIns="0" rIns="0" bIns="0" rtlCol="0" anchor="ctr"/>
           <a:lstStyle/>
           <a:p>
-            <a:pPr indent="0" marL="0">
+            <a:pPr marL="0" indent="0">
               <a:buNone/>
             </a:pPr>
             <a:r>
@@ -10501,13 +10570,12 @@
             <a:avLst/>
           </a:prstGeom>
           <a:noFill/>
-          <a:ln/>
         </p:spPr>
         <p:txBody>
           <a:bodyPr wrap="square" lIns="0" tIns="0" rIns="0" bIns="0" rtlCol="0" anchor="ctr"/>
           <a:lstStyle/>
           <a:p>
-            <a:pPr indent="0" marL="0">
+            <a:pPr marL="0" indent="0">
               <a:buNone/>
             </a:pPr>
             <a:r>
@@ -10516,7 +10584,7 @@
                   <a:srgbClr val="66727D"/>
                 </a:solidFill>
               </a:rPr>
-              <a:t>Demo Case：分析 600519 贵州茅台  ·  建议视频 45–60 秒</a:t>
+              <a:t>Demo Case：分析 600519 贵州茅台 </a:t>
             </a:r>
             <a:endParaRPr lang="en-US" sz="950" dirty="0"/>
           </a:p>
@@ -10537,13 +10605,12 @@
             <a:avLst/>
           </a:prstGeom>
           <a:noFill/>
-          <a:ln/>
         </p:spPr>
         <p:txBody>
           <a:bodyPr wrap="square" lIns="0" tIns="0" rIns="0" bIns="0" rtlCol="0" anchor="ctr"/>
           <a:lstStyle/>
           <a:p>
-            <a:pPr indent="0" marL="0">
+            <a:pPr marL="0" indent="0">
               <a:buNone/>
             </a:pPr>
             <a:r>
@@ -10587,139 +10654,6 @@
       </p:sp>
       <p:sp>
         <p:nvSpPr>
-          <p:cNvPr id="8" name="Shape 6"/>
-          <p:cNvSpPr/>
-          <p:nvPr/>
-        </p:nvSpPr>
-        <p:spPr>
-          <a:xfrm>
-            <a:off x="4443984" y="3090672"/>
-            <a:ext cx="713232" cy="713232"/>
-          </a:xfrm>
-          <a:prstGeom prst="ellipse">
-            <a:avLst/>
-          </a:prstGeom>
-          <a:solidFill>
-            <a:srgbClr val="B7192E"/>
-          </a:solidFill>
-          <a:ln w="12700">
-            <a:solidFill>
-              <a:srgbClr val="B7192E"/>
-            </a:solidFill>
-            <a:prstDash val="solid"/>
-          </a:ln>
-        </p:spPr>
-      </p:sp>
-      <p:sp>
-        <p:nvSpPr>
-          <p:cNvPr id="9" name="Text 7"/>
-          <p:cNvSpPr/>
-          <p:nvPr/>
-        </p:nvSpPr>
-        <p:spPr>
-          <a:xfrm>
-            <a:off x="4617720" y="3255264"/>
-            <a:ext cx="347472" cy="201168"/>
-          </a:xfrm>
-          <a:prstGeom prst="rect">
-            <a:avLst/>
-          </a:prstGeom>
-          <a:noFill/>
-          <a:ln/>
-        </p:spPr>
-        <p:txBody>
-          <a:bodyPr wrap="square" lIns="0" tIns="0" rIns="0" bIns="0" rtlCol="0" anchor="ctr"/>
-          <a:lstStyle/>
-          <a:p>
-            <a:pPr algn="ctr" indent="0" marL="0">
-              <a:buNone/>
-            </a:pPr>
-            <a:r>
-              <a:rPr lang="en-US" sz="1500" b="1" dirty="0">
-                <a:solidFill>
-                  <a:srgbClr val="FFFFFF"/>
-                </a:solidFill>
-              </a:rPr>
-              <a:t>▶</a:t>
-            </a:r>
-            <a:endParaRPr lang="en-US" sz="1500" dirty="0"/>
-          </a:p>
-        </p:txBody>
-      </p:sp>
-      <p:sp>
-        <p:nvSpPr>
-          <p:cNvPr id="10" name="Text 8"/>
-          <p:cNvSpPr/>
-          <p:nvPr/>
-        </p:nvSpPr>
-        <p:spPr>
-          <a:xfrm>
-            <a:off x="3108960" y="4041648"/>
-            <a:ext cx="3749040" cy="228600"/>
-          </a:xfrm>
-          <a:prstGeom prst="rect">
-            <a:avLst/>
-          </a:prstGeom>
-          <a:noFill/>
-          <a:ln/>
-        </p:spPr>
-        <p:txBody>
-          <a:bodyPr wrap="square" lIns="0" tIns="0" rIns="0" bIns="0" rtlCol="0" anchor="ctr"/>
-          <a:lstStyle/>
-          <a:p>
-            <a:pPr algn="ctr" indent="0" marL="0">
-              <a:buNone/>
-            </a:pPr>
-            <a:r>
-              <a:rPr lang="en-US" sz="1100" b="1" dirty="0">
-                <a:solidFill>
-                  <a:srgbClr val="FFFFFF"/>
-                </a:solidFill>
-              </a:rPr>
-              <a:t>在此插入项目实机演示视频</a:t>
-            </a:r>
-            <a:endParaRPr lang="en-US" sz="1100" dirty="0"/>
-          </a:p>
-        </p:txBody>
-      </p:sp>
-      <p:sp>
-        <p:nvSpPr>
-          <p:cNvPr id="11" name="Text 9"/>
-          <p:cNvSpPr/>
-          <p:nvPr/>
-        </p:nvSpPr>
-        <p:spPr>
-          <a:xfrm>
-            <a:off x="2788920" y="4407408"/>
-            <a:ext cx="4389120" cy="182880"/>
-          </a:xfrm>
-          <a:prstGeom prst="rect">
-            <a:avLst/>
-          </a:prstGeom>
-          <a:noFill/>
-          <a:ln/>
-        </p:spPr>
-        <p:txBody>
-          <a:bodyPr wrap="square" lIns="0" tIns="0" rIns="0" bIns="0" rtlCol="0" anchor="ctr"/>
-          <a:lstStyle/>
-          <a:p>
-            <a:pPr algn="ctr" indent="0" marL="0">
-              <a:buNone/>
-            </a:pPr>
-            <a:r>
-              <a:rPr lang="en-US" sz="750" dirty="0">
-                <a:solidFill>
-                  <a:srgbClr val="A8B4BF"/>
-                </a:solidFill>
-              </a:rPr>
-              <a:t>推荐展示：正常查询 → 候选排名 → 合规拦截 → Trace / 告警</a:t>
-            </a:r>
-            <a:endParaRPr lang="en-US" sz="750" dirty="0"/>
-          </a:p>
-        </p:txBody>
-      </p:sp>
-      <p:sp>
-        <p:nvSpPr>
           <p:cNvPr id="12" name="Text 10"/>
           <p:cNvSpPr/>
           <p:nvPr/>
@@ -10733,13 +10667,12 @@
             <a:avLst/>
           </a:prstGeom>
           <a:noFill/>
-          <a:ln/>
         </p:spPr>
         <p:txBody>
           <a:bodyPr wrap="square" lIns="0" tIns="0" rIns="0" bIns="0" rtlCol="0" anchor="ctr"/>
           <a:lstStyle/>
           <a:p>
-            <a:pPr indent="0" marL="0">
+            <a:pPr marL="0" indent="0">
               <a:buNone/>
             </a:pPr>
             <a:r>
@@ -10769,13 +10702,12 @@
             <a:avLst/>
           </a:prstGeom>
           <a:noFill/>
-          <a:ln/>
         </p:spPr>
         <p:txBody>
           <a:bodyPr wrap="square" lIns="0" tIns="0" rIns="0" bIns="0" rtlCol="0" anchor="ctr"/>
           <a:lstStyle/>
           <a:p>
-            <a:pPr indent="0" marL="0">
+            <a:pPr marL="0" indent="0">
               <a:buNone/>
             </a:pPr>
             <a:r>
@@ -10805,13 +10737,12 @@
             <a:avLst/>
           </a:prstGeom>
           <a:noFill/>
-          <a:ln/>
         </p:spPr>
         <p:txBody>
           <a:bodyPr wrap="square" lIns="0" tIns="0" rIns="0" bIns="0" rtlCol="0" anchor="ctr"/>
           <a:lstStyle/>
           <a:p>
-            <a:pPr indent="0" marL="0">
+            <a:pPr marL="0" indent="0">
               <a:buNone/>
             </a:pPr>
             <a:r>
@@ -10841,7 +10772,6 @@
             <a:avLst/>
           </a:prstGeom>
           <a:noFill/>
-          <a:ln/>
         </p:spPr>
         <p:txBody>
           <a:bodyPr wrap="square" lIns="0" tIns="0" rIns="0" bIns="0" rtlCol="0" anchor="ctr">
@@ -10849,7 +10779,7 @@
           </a:bodyPr>
           <a:lstStyle/>
           <a:p>
-            <a:pPr indent="0" marL="0">
+            <a:pPr marL="0" indent="0">
               <a:buNone/>
             </a:pPr>
             <a:r>
@@ -10879,13 +10809,12 @@
             <a:avLst/>
           </a:prstGeom>
           <a:noFill/>
-          <a:ln/>
         </p:spPr>
         <p:txBody>
           <a:bodyPr wrap="square" lIns="0" tIns="0" rIns="0" bIns="0" rtlCol="0" anchor="ctr"/>
           <a:lstStyle/>
           <a:p>
-            <a:pPr indent="0" marL="0">
+            <a:pPr marL="0" indent="0">
               <a:buNone/>
             </a:pPr>
             <a:r>
@@ -10915,13 +10844,12 @@
             <a:avLst/>
           </a:prstGeom>
           <a:noFill/>
-          <a:ln/>
         </p:spPr>
         <p:txBody>
           <a:bodyPr wrap="square" lIns="0" tIns="0" rIns="0" bIns="0" rtlCol="0" anchor="ctr"/>
           <a:lstStyle/>
           <a:p>
-            <a:pPr indent="0" marL="0">
+            <a:pPr marL="0" indent="0">
               <a:buNone/>
             </a:pPr>
             <a:r>
@@ -10951,7 +10879,6 @@
             <a:avLst/>
           </a:prstGeom>
           <a:noFill/>
-          <a:ln/>
         </p:spPr>
         <p:txBody>
           <a:bodyPr wrap="square" lIns="0" tIns="0" rIns="0" bIns="0" rtlCol="0" anchor="ctr">
@@ -10959,7 +10886,7 @@
           </a:bodyPr>
           <a:lstStyle/>
           <a:p>
-            <a:pPr indent="0" marL="0">
+            <a:pPr marL="0" indent="0">
               <a:buNone/>
             </a:pPr>
             <a:r>
@@ -10989,13 +10916,12 @@
             <a:avLst/>
           </a:prstGeom>
           <a:noFill/>
-          <a:ln/>
         </p:spPr>
         <p:txBody>
           <a:bodyPr wrap="square" lIns="0" tIns="0" rIns="0" bIns="0" rtlCol="0" anchor="ctr"/>
           <a:lstStyle/>
           <a:p>
-            <a:pPr indent="0" marL="0">
+            <a:pPr marL="0" indent="0">
               <a:buNone/>
             </a:pPr>
             <a:r>
@@ -11025,13 +10951,12 @@
             <a:avLst/>
           </a:prstGeom>
           <a:noFill/>
-          <a:ln/>
         </p:spPr>
         <p:txBody>
           <a:bodyPr wrap="square" lIns="0" tIns="0" rIns="0" bIns="0" rtlCol="0" anchor="ctr"/>
           <a:lstStyle/>
           <a:p>
-            <a:pPr indent="0" marL="0">
+            <a:pPr marL="0" indent="0">
               <a:buNone/>
             </a:pPr>
             <a:r>
@@ -11061,7 +10986,6 @@
             <a:avLst/>
           </a:prstGeom>
           <a:noFill/>
-          <a:ln/>
         </p:spPr>
         <p:txBody>
           <a:bodyPr wrap="square" lIns="0" tIns="0" rIns="0" bIns="0" rtlCol="0" anchor="ctr">
@@ -11069,7 +10993,7 @@
           </a:bodyPr>
           <a:lstStyle/>
           <a:p>
-            <a:pPr indent="0" marL="0">
+            <a:pPr marL="0" indent="0">
               <a:buNone/>
             </a:pPr>
             <a:r>
@@ -11099,13 +11023,12 @@
             <a:avLst/>
           </a:prstGeom>
           <a:noFill/>
-          <a:ln/>
         </p:spPr>
         <p:txBody>
           <a:bodyPr wrap="square" lIns="0" tIns="0" rIns="0" bIns="0" rtlCol="0" anchor="ctr"/>
           <a:lstStyle/>
           <a:p>
-            <a:pPr indent="0" marL="0">
+            <a:pPr marL="0" indent="0">
               <a:buNone/>
             </a:pPr>
             <a:r>
@@ -11135,13 +11058,12 @@
             <a:avLst/>
           </a:prstGeom>
           <a:noFill/>
-          <a:ln/>
         </p:spPr>
         <p:txBody>
           <a:bodyPr wrap="square" lIns="0" tIns="0" rIns="0" bIns="0" rtlCol="0" anchor="ctr"/>
           <a:lstStyle/>
           <a:p>
-            <a:pPr indent="0" marL="0">
+            <a:pPr marL="0" indent="0">
               <a:buNone/>
             </a:pPr>
             <a:r>
@@ -11171,7 +11093,6 @@
             <a:avLst/>
           </a:prstGeom>
           <a:noFill/>
-          <a:ln/>
         </p:spPr>
         <p:txBody>
           <a:bodyPr wrap="square" lIns="0" tIns="0" rIns="0" bIns="0" rtlCol="0" anchor="ctr">
@@ -11179,7 +11100,7 @@
           </a:bodyPr>
           <a:lstStyle/>
           <a:p>
-            <a:pPr indent="0" marL="0">
+            <a:pPr marL="0" indent="0">
               <a:buNone/>
             </a:pPr>
             <a:r>
@@ -11204,12 +11125,13 @@
 
 <file path=ppt/slides/slide9.xml><?xml version="1.0" encoding="utf-8"?>
 <p:sld xmlns:a="http://schemas.openxmlformats.org/drawingml/2006/main" xmlns:r="http://schemas.openxmlformats.org/officeDocument/2006/relationships" xmlns:p="http://schemas.openxmlformats.org/presentationml/2006/main">
-  <p:cSld name="Slide 9">
+  <p:cSld>
     <p:bg>
       <p:bgPr>
         <a:solidFill>
           <a:srgbClr val="F7F9FB"/>
         </a:solidFill>
+        <a:effectLst/>
       </p:bgPr>
     </p:bg>
     <p:spTree>
@@ -11266,23 +11188,22 @@
             <a:avLst/>
           </a:prstGeom>
           <a:noFill/>
-          <a:ln/>
         </p:spPr>
         <p:txBody>
           <a:bodyPr wrap="square" rtlCol="0" anchor="ctr"/>
           <a:lstStyle/>
           <a:p>
-            <a:pPr indent="0" marL="0">
-              <a:buNone/>
-            </a:pPr>
-            <a:r>
-              <a:rPr lang="en-US" sz="850" b="1" spc="120" kern="0" dirty="0">
+            <a:pPr marL="0" indent="0">
+              <a:buNone/>
+            </a:pPr>
+            <a:r>
+              <a:rPr lang="en-US" sz="850" b="1" kern="0" spc="120" dirty="0">
                 <a:solidFill>
                   <a:srgbClr val="B7192E"/>
                 </a:solidFill>
-                <a:latin typeface="Microsoft YaHei" pitchFamily="34" charset="0"/>
-                <a:ea typeface="Microsoft YaHei" pitchFamily="34" charset="-122"/>
-                <a:cs typeface="Microsoft YaHei" pitchFamily="34" charset="-120"/>
+                <a:latin typeface="微软雅黑" panose="020B0503020204020204" pitchFamily="34" charset="-122"/>
+                <a:ea typeface="微软雅黑" panose="020B0503020204020204" pitchFamily="34" charset="-122"/>
+                <a:cs typeface="微软雅黑" panose="020B0503020204020204" pitchFamily="34" charset="-120"/>
               </a:rPr>
               <a:t>03  实习收获</a:t>
             </a:r>
@@ -11305,13 +11226,12 @@
             <a:avLst/>
           </a:prstGeom>
           <a:noFill/>
-          <a:ln/>
         </p:spPr>
         <p:txBody>
           <a:bodyPr wrap="square" lIns="0" tIns="0" rIns="0" bIns="0" rtlCol="0" anchor="ctr"/>
           <a:lstStyle/>
           <a:p>
-            <a:pPr indent="0" marL="0">
+            <a:pPr marL="0" indent="0">
               <a:buNone/>
             </a:pPr>
             <a:r>
@@ -11341,13 +11261,12 @@
             <a:avLst/>
           </a:prstGeom>
           <a:noFill/>
-          <a:ln/>
         </p:spPr>
         <p:txBody>
           <a:bodyPr wrap="square" lIns="0" tIns="0" rIns="0" bIns="0" rtlCol="0" anchor="ctr"/>
           <a:lstStyle/>
           <a:p>
-            <a:pPr indent="0" marL="0">
+            <a:pPr marL="0" indent="0">
               <a:buNone/>
             </a:pPr>
             <a:r>
@@ -11377,13 +11296,12 @@
             <a:avLst/>
           </a:prstGeom>
           <a:noFill/>
-          <a:ln/>
         </p:spPr>
         <p:txBody>
           <a:bodyPr wrap="square" lIns="0" tIns="0" rIns="0" bIns="0" rtlCol="0" anchor="ctr"/>
           <a:lstStyle/>
           <a:p>
-            <a:pPr indent="0" marL="0">
+            <a:pPr marL="0" indent="0">
               <a:buNone/>
             </a:pPr>
             <a:r>
@@ -11402,7 +11320,11 @@
         <p:nvSpPr>
           <p:cNvPr id="7" name="Shape 5"/>
           <p:cNvSpPr/>
-          <p:nvPr/>
+          <p:nvPr>
+            <p:custDataLst>
+              <p:tags r:id="rId1"/>
+            </p:custDataLst>
+          </p:nvPr>
         </p:nvSpPr>
         <p:spPr>
           <a:xfrm>
@@ -11429,7 +11351,11 @@
         <p:nvSpPr>
           <p:cNvPr id="8" name="Shape 6"/>
           <p:cNvSpPr/>
-          <p:nvPr/>
+          <p:nvPr>
+            <p:custDataLst>
+              <p:tags r:id="rId2"/>
+            </p:custDataLst>
+          </p:nvPr>
         </p:nvSpPr>
         <p:spPr>
           <a:xfrm>
@@ -11454,7 +11380,11 @@
         <p:nvSpPr>
           <p:cNvPr id="9" name="Text 7"/>
           <p:cNvSpPr/>
-          <p:nvPr/>
+          <p:nvPr>
+            <p:custDataLst>
+              <p:tags r:id="rId3"/>
+            </p:custDataLst>
+          </p:nvPr>
         </p:nvSpPr>
         <p:spPr>
           <a:xfrm>
@@ -11465,13 +11395,12 @@
             <a:avLst/>
           </a:prstGeom>
           <a:noFill/>
-          <a:ln/>
         </p:spPr>
         <p:txBody>
           <a:bodyPr wrap="square" lIns="0" tIns="0" rIns="0" bIns="0" rtlCol="0" anchor="ctr"/>
           <a:lstStyle/>
           <a:p>
-            <a:pPr indent="0" marL="0">
+            <a:pPr marL="0" indent="0">
               <a:buNone/>
             </a:pPr>
             <a:r>
@@ -11490,7 +11419,11 @@
         <p:nvSpPr>
           <p:cNvPr id="10" name="Text 8"/>
           <p:cNvSpPr/>
-          <p:nvPr/>
+          <p:nvPr>
+            <p:custDataLst>
+              <p:tags r:id="rId4"/>
+            </p:custDataLst>
+          </p:nvPr>
         </p:nvSpPr>
         <p:spPr>
           <a:xfrm>
@@ -11501,7 +11434,6 @@
             <a:avLst/>
           </a:prstGeom>
           <a:noFill/>
-          <a:ln/>
         </p:spPr>
         <p:txBody>
           <a:bodyPr wrap="square" lIns="254" tIns="254" rIns="254" bIns="254" rtlCol="0" anchor="t">
@@ -11509,58 +11441,73 @@
           </a:bodyPr>
           <a:lstStyle/>
           <a:p>
-            <a:pPr indent="0" marL="0">
-              <a:buNone/>
-            </a:pPr>
-            <a:r>
-              <a:rPr lang="en-US" sz="920" dirty="0">
+            <a:pPr marL="0" indent="0">
+              <a:lnSpc>
+                <a:spcPct val="150000"/>
+              </a:lnSpc>
+              <a:buNone/>
+            </a:pPr>
+            <a:r>
+              <a:rPr lang="en-US" sz="1200" dirty="0">
                 <a:solidFill>
                   <a:srgbClr val="66727D"/>
                 </a:solidFill>
               </a:rPr>
               <a:t>从“先学全再做”到“边做边验证”</a:t>
             </a:r>
-            <a:endParaRPr lang="en-US" sz="920" dirty="0"/>
-          </a:p>
-          <a:p>
-            <a:pPr indent="0" marL="0">
-              <a:buNone/>
-            </a:pPr>
-            <a:endParaRPr lang="en-US" sz="920" dirty="0"/>
-          </a:p>
-          <a:p>
-            <a:pPr indent="0" marL="0">
-              <a:buNone/>
-            </a:pPr>
-            <a:r>
-              <a:rPr lang="en-US" sz="920" dirty="0">
+            <a:endParaRPr lang="en-US" sz="1200" dirty="0"/>
+          </a:p>
+          <a:p>
+            <a:pPr marL="0" indent="0">
+              <a:lnSpc>
+                <a:spcPct val="150000"/>
+              </a:lnSpc>
+              <a:buNone/>
+            </a:pPr>
+            <a:endParaRPr lang="en-US" sz="1200" dirty="0"/>
+          </a:p>
+          <a:p>
+            <a:pPr marL="0" indent="0">
+              <a:lnSpc>
+                <a:spcPct val="150000"/>
+              </a:lnSpc>
+              <a:buNone/>
+            </a:pPr>
+            <a:r>
+              <a:rPr lang="en-US" sz="1200" dirty="0">
                 <a:solidFill>
                   <a:srgbClr val="66727D"/>
                 </a:solidFill>
               </a:rPr>
               <a:t>先跑通最小链路，再逐层加入零侵入适配器、反馈闭环、多轮对话与合规拦截。</a:t>
             </a:r>
-            <a:endParaRPr lang="en-US" sz="920" dirty="0"/>
-          </a:p>
-          <a:p>
-            <a:pPr indent="0" marL="0">
-              <a:buNone/>
-            </a:pPr>
-            <a:endParaRPr lang="en-US" sz="920" dirty="0"/>
-          </a:p>
-          <a:p>
-            <a:pPr indent="0" marL="0">
-              <a:buNone/>
-            </a:pPr>
-            <a:r>
-              <a:rPr lang="en-US" sz="920" dirty="0">
+            <a:endParaRPr lang="en-US" sz="1200" dirty="0"/>
+          </a:p>
+          <a:p>
+            <a:pPr marL="0" indent="0">
+              <a:lnSpc>
+                <a:spcPct val="150000"/>
+              </a:lnSpc>
+              <a:buNone/>
+            </a:pPr>
+            <a:endParaRPr lang="en-US" sz="1200" dirty="0"/>
+          </a:p>
+          <a:p>
+            <a:pPr marL="0" indent="0">
+              <a:lnSpc>
+                <a:spcPct val="150000"/>
+              </a:lnSpc>
+              <a:buNone/>
+            </a:pPr>
+            <a:r>
+              <a:rPr lang="en-US" sz="1200" dirty="0">
                 <a:solidFill>
                   <a:srgbClr val="66727D"/>
                 </a:solidFill>
               </a:rPr>
               <a:t>关键词：最小验证 · 快速迭代</a:t>
             </a:r>
-            <a:endParaRPr lang="en-US" sz="920" dirty="0"/>
+            <a:endParaRPr lang="en-US" sz="1200" dirty="0"/>
           </a:p>
         </p:txBody>
       </p:sp>
@@ -11568,7 +11515,11 @@
         <p:nvSpPr>
           <p:cNvPr id="11" name="Shape 9"/>
           <p:cNvSpPr/>
-          <p:nvPr/>
+          <p:nvPr>
+            <p:custDataLst>
+              <p:tags r:id="rId5"/>
+            </p:custDataLst>
+          </p:nvPr>
         </p:nvSpPr>
         <p:spPr>
           <a:xfrm>
@@ -11595,7 +11546,11 @@
         <p:nvSpPr>
           <p:cNvPr id="12" name="Shape 10"/>
           <p:cNvSpPr/>
-          <p:nvPr/>
+          <p:nvPr>
+            <p:custDataLst>
+              <p:tags r:id="rId6"/>
+            </p:custDataLst>
+          </p:nvPr>
         </p:nvSpPr>
         <p:spPr>
           <a:xfrm>
@@ -11620,7 +11575,11 @@
         <p:nvSpPr>
           <p:cNvPr id="13" name="Text 11"/>
           <p:cNvSpPr/>
-          <p:nvPr/>
+          <p:nvPr>
+            <p:custDataLst>
+              <p:tags r:id="rId7"/>
+            </p:custDataLst>
+          </p:nvPr>
         </p:nvSpPr>
         <p:spPr>
           <a:xfrm>
@@ -11631,13 +11590,12 @@
             <a:avLst/>
           </a:prstGeom>
           <a:noFill/>
-          <a:ln/>
         </p:spPr>
         <p:txBody>
           <a:bodyPr wrap="square" lIns="0" tIns="0" rIns="0" bIns="0" rtlCol="0" anchor="ctr"/>
           <a:lstStyle/>
           <a:p>
-            <a:pPr indent="0" marL="0">
+            <a:pPr marL="0" indent="0">
               <a:buNone/>
             </a:pPr>
             <a:r>
@@ -11656,7 +11614,11 @@
         <p:nvSpPr>
           <p:cNvPr id="14" name="Text 12"/>
           <p:cNvSpPr/>
-          <p:nvPr/>
+          <p:nvPr>
+            <p:custDataLst>
+              <p:tags r:id="rId8"/>
+            </p:custDataLst>
+          </p:nvPr>
         </p:nvSpPr>
         <p:spPr>
           <a:xfrm>
@@ -11667,7 +11629,6 @@
             <a:avLst/>
           </a:prstGeom>
           <a:noFill/>
-          <a:ln/>
         </p:spPr>
         <p:txBody>
           <a:bodyPr wrap="square" lIns="254" tIns="254" rIns="254" bIns="254" rtlCol="0" anchor="t">
@@ -11675,58 +11636,73 @@
           </a:bodyPr>
           <a:lstStyle/>
           <a:p>
-            <a:pPr indent="0" marL="0">
-              <a:buNone/>
-            </a:pPr>
-            <a:r>
-              <a:rPr lang="en-US" sz="920" dirty="0">
+            <a:pPr marL="0" indent="0">
+              <a:lnSpc>
+                <a:spcPct val="150000"/>
+              </a:lnSpc>
+              <a:buNone/>
+            </a:pPr>
+            <a:r>
+              <a:rPr lang="en-US" sz="1200" dirty="0">
                 <a:solidFill>
                   <a:srgbClr val="66727D"/>
                 </a:solidFill>
               </a:rPr>
               <a:t>遇到问题先定位，再带着具体问题查源码与 issue。</a:t>
             </a:r>
-            <a:endParaRPr lang="en-US" sz="920" dirty="0"/>
-          </a:p>
-          <a:p>
-            <a:pPr indent="0" marL="0">
-              <a:buNone/>
-            </a:pPr>
-            <a:endParaRPr lang="en-US" sz="920" dirty="0"/>
-          </a:p>
-          <a:p>
-            <a:pPr indent="0" marL="0">
-              <a:buNone/>
-            </a:pPr>
-            <a:r>
-              <a:rPr lang="en-US" sz="920" dirty="0">
+            <a:endParaRPr lang="en-US" sz="1200" dirty="0"/>
+          </a:p>
+          <a:p>
+            <a:pPr marL="0" indent="0">
+              <a:lnSpc>
+                <a:spcPct val="150000"/>
+              </a:lnSpc>
+              <a:buNone/>
+            </a:pPr>
+            <a:endParaRPr lang="en-US" sz="1200" dirty="0"/>
+          </a:p>
+          <a:p>
+            <a:pPr marL="0" indent="0">
+              <a:lnSpc>
+                <a:spcPct val="150000"/>
+              </a:lnSpc>
+              <a:buNone/>
+            </a:pPr>
+            <a:r>
+              <a:rPr lang="en-US" sz="1200" dirty="0">
                 <a:solidFill>
                   <a:srgbClr val="66727D"/>
                 </a:solidFill>
               </a:rPr>
               <a:t>LangGraph 版本变化导致旧回调无法采集 Trace，最终通过阅读源码切换到 astream_events。</a:t>
             </a:r>
-            <a:endParaRPr lang="en-US" sz="920" dirty="0"/>
-          </a:p>
-          <a:p>
-            <a:pPr indent="0" marL="0">
-              <a:buNone/>
-            </a:pPr>
-            <a:endParaRPr lang="en-US" sz="920" dirty="0"/>
-          </a:p>
-          <a:p>
-            <a:pPr indent="0" marL="0">
-              <a:buNone/>
-            </a:pPr>
-            <a:r>
-              <a:rPr lang="en-US" sz="920" dirty="0">
+            <a:endParaRPr lang="en-US" sz="1200" dirty="0"/>
+          </a:p>
+          <a:p>
+            <a:pPr marL="0" indent="0">
+              <a:lnSpc>
+                <a:spcPct val="150000"/>
+              </a:lnSpc>
+              <a:buNone/>
+            </a:pPr>
+            <a:endParaRPr lang="en-US" sz="1200" dirty="0"/>
+          </a:p>
+          <a:p>
+            <a:pPr marL="0" indent="0">
+              <a:lnSpc>
+                <a:spcPct val="150000"/>
+              </a:lnSpc>
+              <a:buNone/>
+            </a:pPr>
+            <a:r>
+              <a:rPr lang="en-US" sz="1200" dirty="0">
                 <a:solidFill>
                   <a:srgbClr val="66727D"/>
                 </a:solidFill>
               </a:rPr>
               <a:t>关键词：问题驱动 · 源码定位</a:t>
             </a:r>
-            <a:endParaRPr lang="en-US" sz="920" dirty="0"/>
+            <a:endParaRPr lang="en-US" sz="1200" dirty="0"/>
           </a:p>
         </p:txBody>
       </p:sp>
@@ -11734,7 +11710,11 @@
         <p:nvSpPr>
           <p:cNvPr id="15" name="Shape 13"/>
           <p:cNvSpPr/>
-          <p:nvPr/>
+          <p:nvPr>
+            <p:custDataLst>
+              <p:tags r:id="rId9"/>
+            </p:custDataLst>
+          </p:nvPr>
         </p:nvSpPr>
         <p:spPr>
           <a:xfrm>
@@ -11761,7 +11741,11 @@
         <p:nvSpPr>
           <p:cNvPr id="16" name="Shape 14"/>
           <p:cNvSpPr/>
-          <p:nvPr/>
+          <p:nvPr>
+            <p:custDataLst>
+              <p:tags r:id="rId10"/>
+            </p:custDataLst>
+          </p:nvPr>
         </p:nvSpPr>
         <p:spPr>
           <a:xfrm>
@@ -11786,7 +11770,11 @@
         <p:nvSpPr>
           <p:cNvPr id="17" name="Text 15"/>
           <p:cNvSpPr/>
-          <p:nvPr/>
+          <p:nvPr>
+            <p:custDataLst>
+              <p:tags r:id="rId11"/>
+            </p:custDataLst>
+          </p:nvPr>
         </p:nvSpPr>
         <p:spPr>
           <a:xfrm>
@@ -11797,13 +11785,12 @@
             <a:avLst/>
           </a:prstGeom>
           <a:noFill/>
-          <a:ln/>
         </p:spPr>
         <p:txBody>
           <a:bodyPr wrap="square" lIns="0" tIns="0" rIns="0" bIns="0" rtlCol="0" anchor="ctr"/>
           <a:lstStyle/>
           <a:p>
-            <a:pPr indent="0" marL="0">
+            <a:pPr marL="0" indent="0">
               <a:buNone/>
             </a:pPr>
             <a:r>
@@ -11822,7 +11809,11 @@
         <p:nvSpPr>
           <p:cNvPr id="18" name="Text 16"/>
           <p:cNvSpPr/>
-          <p:nvPr/>
+          <p:nvPr>
+            <p:custDataLst>
+              <p:tags r:id="rId12"/>
+            </p:custDataLst>
+          </p:nvPr>
         </p:nvSpPr>
         <p:spPr>
           <a:xfrm>
@@ -11833,7 +11824,6 @@
             <a:avLst/>
           </a:prstGeom>
           <a:noFill/>
-          <a:ln/>
         </p:spPr>
         <p:txBody>
           <a:bodyPr wrap="square" lIns="254" tIns="254" rIns="254" bIns="254" rtlCol="0" anchor="t">
@@ -11841,94 +11831,73 @@
           </a:bodyPr>
           <a:lstStyle/>
           <a:p>
-            <a:pPr indent="0" marL="0">
-              <a:buNone/>
-            </a:pPr>
-            <a:r>
-              <a:rPr lang="en-US" sz="920" dirty="0">
+            <a:pPr marL="0" indent="0">
+              <a:lnSpc>
+                <a:spcPct val="150000"/>
+              </a:lnSpc>
+              <a:buNone/>
+            </a:pPr>
+            <a:r>
+              <a:rPr lang="en-US" sz="1200" dirty="0">
                 <a:solidFill>
                   <a:srgbClr val="66727D"/>
                 </a:solidFill>
               </a:rPr>
               <a:t>把“接口边界”当成沟通语言。</a:t>
             </a:r>
-            <a:endParaRPr lang="en-US" sz="920" dirty="0"/>
-          </a:p>
-          <a:p>
-            <a:pPr indent="0" marL="0">
-              <a:buNone/>
-            </a:pPr>
-            <a:endParaRPr lang="en-US" sz="920" dirty="0"/>
-          </a:p>
-          <a:p>
-            <a:pPr indent="0" marL="0">
-              <a:buNone/>
-            </a:pPr>
-            <a:r>
-              <a:rPr lang="en-US" sz="920" dirty="0">
+            <a:endParaRPr lang="en-US" sz="1200" dirty="0"/>
+          </a:p>
+          <a:p>
+            <a:pPr marL="0" indent="0">
+              <a:lnSpc>
+                <a:spcPct val="150000"/>
+              </a:lnSpc>
+              <a:buNone/>
+            </a:pPr>
+            <a:endParaRPr lang="en-US" sz="1200" dirty="0"/>
+          </a:p>
+          <a:p>
+            <a:pPr marL="0" indent="0">
+              <a:lnSpc>
+                <a:spcPct val="150000"/>
+              </a:lnSpc>
+              <a:buNone/>
+            </a:pPr>
+            <a:r>
+              <a:rPr lang="en-US" sz="1200" dirty="0">
                 <a:solidFill>
                   <a:srgbClr val="66727D"/>
                 </a:solidFill>
               </a:rPr>
               <a:t>通过约定 Demo 与监控零侵入解耦、服务之间使用明确接口，让模块职责和协作边界更清楚。</a:t>
             </a:r>
-            <a:endParaRPr lang="en-US" sz="920" dirty="0"/>
-          </a:p>
-          <a:p>
-            <a:pPr indent="0" marL="0">
-              <a:buNone/>
-            </a:pPr>
-            <a:endParaRPr lang="en-US" sz="920" dirty="0"/>
-          </a:p>
-          <a:p>
-            <a:pPr indent="0" marL="0">
-              <a:buNone/>
-            </a:pPr>
-            <a:r>
-              <a:rPr lang="en-US" sz="920" dirty="0">
+            <a:endParaRPr lang="en-US" sz="1200" dirty="0"/>
+          </a:p>
+          <a:p>
+            <a:pPr marL="0" indent="0">
+              <a:lnSpc>
+                <a:spcPct val="150000"/>
+              </a:lnSpc>
+              <a:buNone/>
+            </a:pPr>
+            <a:endParaRPr lang="en-US" sz="1200" dirty="0"/>
+          </a:p>
+          <a:p>
+            <a:pPr marL="0" indent="0">
+              <a:lnSpc>
+                <a:spcPct val="150000"/>
+              </a:lnSpc>
+              <a:buNone/>
+            </a:pPr>
+            <a:r>
+              <a:rPr lang="en-US" sz="1200" dirty="0">
                 <a:solidFill>
                   <a:srgbClr val="66727D"/>
                 </a:solidFill>
               </a:rPr>
               <a:t>关键词：边界清晰 · 文档对齐</a:t>
             </a:r>
-            <a:endParaRPr lang="en-US" sz="920" dirty="0"/>
-          </a:p>
-        </p:txBody>
-      </p:sp>
-      <p:sp>
-        <p:nvSpPr>
-          <p:cNvPr id="19" name="Text 17"/>
-          <p:cNvSpPr/>
-          <p:nvPr/>
-        </p:nvSpPr>
-        <p:spPr>
-          <a:xfrm>
-            <a:off x="3063240" y="5897880"/>
-            <a:ext cx="6035040" cy="201168"/>
-          </a:xfrm>
-          <a:prstGeom prst="rect">
-            <a:avLst/>
-          </a:prstGeom>
-          <a:noFill/>
-          <a:ln/>
-        </p:spPr>
-        <p:txBody>
-          <a:bodyPr wrap="square" lIns="0" tIns="0" rIns="0" bIns="0" rtlCol="0" anchor="ctr"/>
-          <a:lstStyle/>
-          <a:p>
-            <a:pPr algn="ctr" indent="0" marL="0">
-              <a:buNone/>
-            </a:pPr>
-            <a:r>
-              <a:rPr lang="en-US" sz="900" b="1" dirty="0">
-                <a:solidFill>
-                  <a:srgbClr val="66727D"/>
-                </a:solidFill>
-              </a:rPr>
-              <a:t>企业文化认识：【待本人结合实际实习体验补充】</a:t>
-            </a:r>
-            <a:endParaRPr lang="en-US" sz="900" dirty="0"/>
+            <a:endParaRPr lang="en-US" sz="1200" dirty="0"/>
           </a:p>
         </p:txBody>
       </p:sp>
@@ -11938,6 +11907,240 @@
     <a:masterClrMapping/>
   </p:clrMapOvr>
 </p:sld>
+</file>
+
+<file path=ppt/tags/tag1.xml><?xml version="1.0" encoding="utf-8"?>
+<p:tagLst xmlns:p="http://schemas.openxmlformats.org/presentationml/2006/main">
+  <p:tag name="KSO_WM_DIAGRAM_VIRTUALLY_FRAME" val="{&quot;height&quot;:270.6,&quot;left&quot;:51.839999999999996,&quot;top&quot;:111.6,&quot;width&quot;:662.4}"/>
+</p:tagLst>
+</file>
+
+<file path=ppt/tags/tag10.xml><?xml version="1.0" encoding="utf-8"?>
+<p:tagLst xmlns:p="http://schemas.openxmlformats.org/presentationml/2006/main">
+  <p:tag name="KSO_WM_DIAGRAM_VIRTUALLY_FRAME" val="{&quot;height&quot;:270.6,&quot;left&quot;:51.839999999999996,&quot;top&quot;:111.6,&quot;width&quot;:662.4}"/>
+</p:tagLst>
+</file>
+
+<file path=ppt/tags/tag11.xml><?xml version="1.0" encoding="utf-8"?>
+<p:tagLst xmlns:p="http://schemas.openxmlformats.org/presentationml/2006/main">
+  <p:tag name="KSO_WM_DIAGRAM_VIRTUALLY_FRAME" val="{&quot;height&quot;:270.6,&quot;left&quot;:51.839999999999996,&quot;top&quot;:111.6,&quot;width&quot;:662.4}"/>
+</p:tagLst>
+</file>
+
+<file path=ppt/tags/tag12.xml><?xml version="1.0" encoding="utf-8"?>
+<p:tagLst xmlns:p="http://schemas.openxmlformats.org/presentationml/2006/main">
+  <p:tag name="KSO_WM_DIAGRAM_VIRTUALLY_FRAME" val="{&quot;height&quot;:270.6,&quot;left&quot;:51.839999999999996,&quot;top&quot;:111.6,&quot;width&quot;:662.4}"/>
+</p:tagLst>
+</file>
+
+<file path=ppt/tags/tag13.xml><?xml version="1.0" encoding="utf-8"?>
+<p:tagLst xmlns:p="http://schemas.openxmlformats.org/presentationml/2006/main">
+  <p:tag name="KSO_WM_DIAGRAM_VIRTUALLY_FRAME" val="{&quot;height&quot;:270.6,&quot;left&quot;:51.839999999999996,&quot;top&quot;:111.6,&quot;width&quot;:662.4}"/>
+</p:tagLst>
+</file>
+
+<file path=ppt/tags/tag14.xml><?xml version="1.0" encoding="utf-8"?>
+<p:tagLst xmlns:p="http://schemas.openxmlformats.org/presentationml/2006/main">
+  <p:tag name="KSO_WM_DIAGRAM_VIRTUALLY_FRAME" val="{&quot;height&quot;:270.6,&quot;left&quot;:51.839999999999996,&quot;top&quot;:111.6,&quot;width&quot;:662.4}"/>
+</p:tagLst>
+</file>
+
+<file path=ppt/tags/tag15.xml><?xml version="1.0" encoding="utf-8"?>
+<p:tagLst xmlns:p="http://schemas.openxmlformats.org/presentationml/2006/main">
+  <p:tag name="KSO_WM_DIAGRAM_VIRTUALLY_FRAME" val="{&quot;height&quot;:270.6,&quot;left&quot;:51.839999999999996,&quot;top&quot;:111.6,&quot;width&quot;:662.4}"/>
+</p:tagLst>
+</file>
+
+<file path=ppt/tags/tag16.xml><?xml version="1.0" encoding="utf-8"?>
+<p:tagLst xmlns:p="http://schemas.openxmlformats.org/presentationml/2006/main">
+  <p:tag name="KSO_WM_DIAGRAM_VIRTUALLY_FRAME" val="{&quot;height&quot;:334.8,&quot;left&quot;:50.4,&quot;top&quot;:115.2,&quot;width&quot;:860.4}"/>
+</p:tagLst>
+</file>
+
+<file path=ppt/tags/tag17.xml><?xml version="1.0" encoding="utf-8"?>
+<p:tagLst xmlns:p="http://schemas.openxmlformats.org/presentationml/2006/main">
+  <p:tag name="KSO_WM_DIAGRAM_VIRTUALLY_FRAME" val="{&quot;height&quot;:334.8,&quot;left&quot;:50.4,&quot;top&quot;:115.2,&quot;width&quot;:860.4}"/>
+</p:tagLst>
+</file>
+
+<file path=ppt/tags/tag18.xml><?xml version="1.0" encoding="utf-8"?>
+<p:tagLst xmlns:p="http://schemas.openxmlformats.org/presentationml/2006/main">
+  <p:tag name="KSO_WM_DIAGRAM_VIRTUALLY_FRAME" val="{&quot;height&quot;:334.8,&quot;left&quot;:50.4,&quot;top&quot;:115.2,&quot;width&quot;:860.4}"/>
+</p:tagLst>
+</file>
+
+<file path=ppt/tags/tag19.xml><?xml version="1.0" encoding="utf-8"?>
+<p:tagLst xmlns:p="http://schemas.openxmlformats.org/presentationml/2006/main">
+  <p:tag name="KSO_WM_DIAGRAM_VIRTUALLY_FRAME" val="{&quot;height&quot;:334.8,&quot;left&quot;:50.4,&quot;top&quot;:115.2,&quot;width&quot;:860.4}"/>
+</p:tagLst>
+</file>
+
+<file path=ppt/tags/tag2.xml><?xml version="1.0" encoding="utf-8"?>
+<p:tagLst xmlns:p="http://schemas.openxmlformats.org/presentationml/2006/main">
+  <p:tag name="KSO_WM_DIAGRAM_VIRTUALLY_FRAME" val="{&quot;height&quot;:270.6,&quot;left&quot;:51.839999999999996,&quot;top&quot;:111.6,&quot;width&quot;:662.4}"/>
+</p:tagLst>
+</file>
+
+<file path=ppt/tags/tag20.xml><?xml version="1.0" encoding="utf-8"?>
+<p:tagLst xmlns:p="http://schemas.openxmlformats.org/presentationml/2006/main">
+  <p:tag name="KSO_WM_DIAGRAM_VIRTUALLY_FRAME" val="{&quot;height&quot;:334.8,&quot;left&quot;:50.4,&quot;top&quot;:115.2,&quot;width&quot;:860.4}"/>
+</p:tagLst>
+</file>
+
+<file path=ppt/tags/tag21.xml><?xml version="1.0" encoding="utf-8"?>
+<p:tagLst xmlns:p="http://schemas.openxmlformats.org/presentationml/2006/main">
+  <p:tag name="KSO_WM_DIAGRAM_VIRTUALLY_FRAME" val="{&quot;height&quot;:334.8,&quot;left&quot;:50.4,&quot;top&quot;:115.2,&quot;width&quot;:860.4}"/>
+</p:tagLst>
+</file>
+
+<file path=ppt/tags/tag22.xml><?xml version="1.0" encoding="utf-8"?>
+<p:tagLst xmlns:p="http://schemas.openxmlformats.org/presentationml/2006/main">
+  <p:tag name="KSO_WM_DIAGRAM_VIRTUALLY_FRAME" val="{&quot;height&quot;:334.8,&quot;left&quot;:50.4,&quot;top&quot;:115.2,&quot;width&quot;:860.4}"/>
+</p:tagLst>
+</file>
+
+<file path=ppt/tags/tag23.xml><?xml version="1.0" encoding="utf-8"?>
+<p:tagLst xmlns:p="http://schemas.openxmlformats.org/presentationml/2006/main">
+  <p:tag name="KSO_WM_DIAGRAM_VIRTUALLY_FRAME" val="{&quot;height&quot;:334.8,&quot;left&quot;:50.4,&quot;top&quot;:115.2,&quot;width&quot;:860.4}"/>
+</p:tagLst>
+</file>
+
+<file path=ppt/tags/tag24.xml><?xml version="1.0" encoding="utf-8"?>
+<p:tagLst xmlns:p="http://schemas.openxmlformats.org/presentationml/2006/main">
+  <p:tag name="KSO_WM_DIAGRAM_VIRTUALLY_FRAME" val="{&quot;height&quot;:334.8,&quot;left&quot;:50.4,&quot;top&quot;:115.2,&quot;width&quot;:860.4}"/>
+</p:tagLst>
+</file>
+
+<file path=ppt/tags/tag25.xml><?xml version="1.0" encoding="utf-8"?>
+<p:tagLst xmlns:p="http://schemas.openxmlformats.org/presentationml/2006/main">
+  <p:tag name="KSO_WM_DIAGRAM_VIRTUALLY_FRAME" val="{&quot;height&quot;:334.8,&quot;left&quot;:50.4,&quot;top&quot;:115.2,&quot;width&quot;:860.4}"/>
+</p:tagLst>
+</file>
+
+<file path=ppt/tags/tag26.xml><?xml version="1.0" encoding="utf-8"?>
+<p:tagLst xmlns:p="http://schemas.openxmlformats.org/presentationml/2006/main">
+  <p:tag name="KSO_WM_DIAGRAM_VIRTUALLY_FRAME" val="{&quot;height&quot;:334.8,&quot;left&quot;:50.4,&quot;top&quot;:115.2,&quot;width&quot;:860.4}"/>
+</p:tagLst>
+</file>
+
+<file path=ppt/tags/tag27.xml><?xml version="1.0" encoding="utf-8"?>
+<p:tagLst xmlns:p="http://schemas.openxmlformats.org/presentationml/2006/main">
+  <p:tag name="KSO_WM_DIAGRAM_VIRTUALLY_FRAME" val="{&quot;height&quot;:334.8,&quot;left&quot;:50.4,&quot;top&quot;:115.2,&quot;width&quot;:860.4}"/>
+</p:tagLst>
+</file>
+
+<file path=ppt/tags/tag28.xml><?xml version="1.0" encoding="utf-8"?>
+<p:tagLst xmlns:p="http://schemas.openxmlformats.org/presentationml/2006/main">
+  <p:tag name="KSO_WM_DIAGRAM_VIRTUALLY_FRAME" val="{&quot;height&quot;:324,&quot;left&quot;:54,&quot;top&quot;:118.8,&quot;width&quot;:851.76}"/>
+</p:tagLst>
+</file>
+
+<file path=ppt/tags/tag29.xml><?xml version="1.0" encoding="utf-8"?>
+<p:tagLst xmlns:p="http://schemas.openxmlformats.org/presentationml/2006/main">
+  <p:tag name="KSO_WM_DIAGRAM_VIRTUALLY_FRAME" val="{&quot;height&quot;:324,&quot;left&quot;:54,&quot;top&quot;:118.8,&quot;width&quot;:851.76}"/>
+</p:tagLst>
+</file>
+
+<file path=ppt/tags/tag3.xml><?xml version="1.0" encoding="utf-8"?>
+<p:tagLst xmlns:p="http://schemas.openxmlformats.org/presentationml/2006/main">
+  <p:tag name="KSO_WM_DIAGRAM_VIRTUALLY_FRAME" val="{&quot;height&quot;:270.6,&quot;left&quot;:51.839999999999996,&quot;top&quot;:111.6,&quot;width&quot;:662.4}"/>
+</p:tagLst>
+</file>
+
+<file path=ppt/tags/tag30.xml><?xml version="1.0" encoding="utf-8"?>
+<p:tagLst xmlns:p="http://schemas.openxmlformats.org/presentationml/2006/main">
+  <p:tag name="KSO_WM_DIAGRAM_VIRTUALLY_FRAME" val="{&quot;height&quot;:324,&quot;left&quot;:54,&quot;top&quot;:118.8,&quot;width&quot;:851.76}"/>
+</p:tagLst>
+</file>
+
+<file path=ppt/tags/tag31.xml><?xml version="1.0" encoding="utf-8"?>
+<p:tagLst xmlns:p="http://schemas.openxmlformats.org/presentationml/2006/main">
+  <p:tag name="KSO_WM_DIAGRAM_VIRTUALLY_FRAME" val="{&quot;height&quot;:324,&quot;left&quot;:54,&quot;top&quot;:118.8,&quot;width&quot;:851.76}"/>
+</p:tagLst>
+</file>
+
+<file path=ppt/tags/tag32.xml><?xml version="1.0" encoding="utf-8"?>
+<p:tagLst xmlns:p="http://schemas.openxmlformats.org/presentationml/2006/main">
+  <p:tag name="KSO_WM_DIAGRAM_VIRTUALLY_FRAME" val="{&quot;height&quot;:324,&quot;left&quot;:54,&quot;top&quot;:118.8,&quot;width&quot;:851.76}"/>
+</p:tagLst>
+</file>
+
+<file path=ppt/tags/tag33.xml><?xml version="1.0" encoding="utf-8"?>
+<p:tagLst xmlns:p="http://schemas.openxmlformats.org/presentationml/2006/main">
+  <p:tag name="KSO_WM_DIAGRAM_VIRTUALLY_FRAME" val="{&quot;height&quot;:324,&quot;left&quot;:54,&quot;top&quot;:118.8,&quot;width&quot;:851.76}"/>
+</p:tagLst>
+</file>
+
+<file path=ppt/tags/tag34.xml><?xml version="1.0" encoding="utf-8"?>
+<p:tagLst xmlns:p="http://schemas.openxmlformats.org/presentationml/2006/main">
+  <p:tag name="KSO_WM_DIAGRAM_VIRTUALLY_FRAME" val="{&quot;height&quot;:324,&quot;left&quot;:54,&quot;top&quot;:118.8,&quot;width&quot;:851.76}"/>
+</p:tagLst>
+</file>
+
+<file path=ppt/tags/tag35.xml><?xml version="1.0" encoding="utf-8"?>
+<p:tagLst xmlns:p="http://schemas.openxmlformats.org/presentationml/2006/main">
+  <p:tag name="KSO_WM_DIAGRAM_VIRTUALLY_FRAME" val="{&quot;height&quot;:324,&quot;left&quot;:54,&quot;top&quot;:118.8,&quot;width&quot;:851.76}"/>
+</p:tagLst>
+</file>
+
+<file path=ppt/tags/tag36.xml><?xml version="1.0" encoding="utf-8"?>
+<p:tagLst xmlns:p="http://schemas.openxmlformats.org/presentationml/2006/main">
+  <p:tag name="KSO_WM_DIAGRAM_VIRTUALLY_FRAME" val="{&quot;height&quot;:324,&quot;left&quot;:54,&quot;top&quot;:118.8,&quot;width&quot;:851.76}"/>
+</p:tagLst>
+</file>
+
+<file path=ppt/tags/tag37.xml><?xml version="1.0" encoding="utf-8"?>
+<p:tagLst xmlns:p="http://schemas.openxmlformats.org/presentationml/2006/main">
+  <p:tag name="KSO_WM_DIAGRAM_VIRTUALLY_FRAME" val="{&quot;height&quot;:324,&quot;left&quot;:54,&quot;top&quot;:118.8,&quot;width&quot;:851.76}"/>
+</p:tagLst>
+</file>
+
+<file path=ppt/tags/tag38.xml><?xml version="1.0" encoding="utf-8"?>
+<p:tagLst xmlns:p="http://schemas.openxmlformats.org/presentationml/2006/main">
+  <p:tag name="KSO_WM_DIAGRAM_VIRTUALLY_FRAME" val="{&quot;height&quot;:324,&quot;left&quot;:54,&quot;top&quot;:118.8,&quot;width&quot;:851.76}"/>
+</p:tagLst>
+</file>
+
+<file path=ppt/tags/tag39.xml><?xml version="1.0" encoding="utf-8"?>
+<p:tagLst xmlns:p="http://schemas.openxmlformats.org/presentationml/2006/main">
+  <p:tag name="KSO_WM_DIAGRAM_VIRTUALLY_FRAME" val="{&quot;height&quot;:324,&quot;left&quot;:54,&quot;top&quot;:118.8,&quot;width&quot;:851.76}"/>
+</p:tagLst>
+</file>
+
+<file path=ppt/tags/tag4.xml><?xml version="1.0" encoding="utf-8"?>
+<p:tagLst xmlns:p="http://schemas.openxmlformats.org/presentationml/2006/main">
+  <p:tag name="KSO_WM_DIAGRAM_VIRTUALLY_FRAME" val="{&quot;height&quot;:270.6,&quot;left&quot;:51.839999999999996,&quot;top&quot;:111.6,&quot;width&quot;:662.4}"/>
+</p:tagLst>
+</file>
+
+<file path=ppt/tags/tag5.xml><?xml version="1.0" encoding="utf-8"?>
+<p:tagLst xmlns:p="http://schemas.openxmlformats.org/presentationml/2006/main">
+  <p:tag name="KSO_WM_DIAGRAM_VIRTUALLY_FRAME" val="{&quot;height&quot;:270.6,&quot;left&quot;:51.839999999999996,&quot;top&quot;:111.6,&quot;width&quot;:662.4}"/>
+</p:tagLst>
+</file>
+
+<file path=ppt/tags/tag6.xml><?xml version="1.0" encoding="utf-8"?>
+<p:tagLst xmlns:p="http://schemas.openxmlformats.org/presentationml/2006/main">
+  <p:tag name="KSO_WM_DIAGRAM_VIRTUALLY_FRAME" val="{&quot;height&quot;:270.6,&quot;left&quot;:51.839999999999996,&quot;top&quot;:111.6,&quot;width&quot;:662.4}"/>
+</p:tagLst>
+</file>
+
+<file path=ppt/tags/tag7.xml><?xml version="1.0" encoding="utf-8"?>
+<p:tagLst xmlns:p="http://schemas.openxmlformats.org/presentationml/2006/main">
+  <p:tag name="KSO_WM_DIAGRAM_VIRTUALLY_FRAME" val="{&quot;height&quot;:270.6,&quot;left&quot;:51.839999999999996,&quot;top&quot;:111.6,&quot;width&quot;:662.4}"/>
+</p:tagLst>
+</file>
+
+<file path=ppt/tags/tag8.xml><?xml version="1.0" encoding="utf-8"?>
+<p:tagLst xmlns:p="http://schemas.openxmlformats.org/presentationml/2006/main">
+  <p:tag name="KSO_WM_DIAGRAM_VIRTUALLY_FRAME" val="{&quot;height&quot;:270.6,&quot;left&quot;:51.839999999999996,&quot;top&quot;:111.6,&quot;width&quot;:662.4}"/>
+</p:tagLst>
+</file>
+
+<file path=ppt/tags/tag9.xml><?xml version="1.0" encoding="utf-8"?>
+<p:tagLst xmlns:p="http://schemas.openxmlformats.org/presentationml/2006/main">
+  <p:tag name="KSO_WM_DIAGRAM_VIRTUALLY_FRAME" val="{&quot;height&quot;:270.6,&quot;left&quot;:51.839999999999996,&quot;top&quot;:111.6,&quot;width&quot;:662.4}"/>
+</p:tagLst>
 </file>
 
 <file path=ppt/theme/theme1.xml><?xml version="1.0" encoding="utf-8"?>
@@ -12016,23 +12219,6 @@
         <a:font script="Viet" typeface="Times New Roman"/>
         <a:font script="Uigh" typeface="Microsoft Uighur"/>
         <a:font script="Geor" typeface="Sylfaen"/>
-        <a:font script="Armn" typeface="Arial"/>
-        <a:font script="Bugi" typeface="Leelawadee UI"/>
-        <a:font script="Bopo" typeface="Microsoft JhengHei"/>
-        <a:font script="Java" typeface="Javanese Text"/>
-        <a:font script="Lisu" typeface="Segoe UI"/>
-        <a:font script="Mymr" typeface="Myanmar Text"/>
-        <a:font script="Nkoo" typeface="Ebrima"/>
-        <a:font script="Olck" typeface="Nirmala UI"/>
-        <a:font script="Osma" typeface="Ebrima"/>
-        <a:font script="Phag" typeface="Phagspa"/>
-        <a:font script="Syrn" typeface="Estrangelo Edessa"/>
-        <a:font script="Syrj" typeface="Estrangelo Edessa"/>
-        <a:font script="Syre" typeface="Estrangelo Edessa"/>
-        <a:font script="Sora" typeface="Nirmala UI"/>
-        <a:font script="Tale" typeface="Microsoft Tai Le"/>
-        <a:font script="Talu" typeface="Microsoft New Tai Lue"/>
-        <a:font script="Tfng" typeface="Ebrima"/>
       </a:majorFont>
       <a:minorFont>
         <a:latin typeface="Microsoft YaHei"/>
@@ -12068,23 +12254,6 @@
         <a:font script="Viet" typeface="Arial"/>
         <a:font script="Uigh" typeface="Microsoft Uighur"/>
         <a:font script="Geor" typeface="Sylfaen"/>
-        <a:font script="Armn" typeface="Arial"/>
-        <a:font script="Bugi" typeface="Leelawadee UI"/>
-        <a:font script="Bopo" typeface="Microsoft JhengHei"/>
-        <a:font script="Java" typeface="Javanese Text"/>
-        <a:font script="Lisu" typeface="Segoe UI"/>
-        <a:font script="Mymr" typeface="Myanmar Text"/>
-        <a:font script="Nkoo" typeface="Ebrima"/>
-        <a:font script="Olck" typeface="Nirmala UI"/>
-        <a:font script="Osma" typeface="Ebrima"/>
-        <a:font script="Phag" typeface="Phagspa"/>
-        <a:font script="Syrn" typeface="Estrangelo Edessa"/>
-        <a:font script="Syrj" typeface="Estrangelo Edessa"/>
-        <a:font script="Syre" typeface="Estrangelo Edessa"/>
-        <a:font script="Sora" typeface="Nirmala UI"/>
-        <a:font script="Tale" typeface="Microsoft Tai Le"/>
-        <a:font script="Talu" typeface="Microsoft New Tai Lue"/>
-        <a:font script="Tfng" typeface="Ebrima"/>
       </a:minorFont>
     </a:fontScheme>
     <a:fmtScheme name="Office">
@@ -12225,8 +12394,265 @@
       </a:bgFillStyleLst>
     </a:fmtScheme>
   </a:themeElements>
-  <a:objectDefaults/>
-  <a:extraClrSchemeLst/>
+  <a:extLst>
+    <a:ext uri="{05A4C25C-085E-4340-85A3-A5531E510DB2}">
+      <thm15:themeFamily xmlns:thm15="http://schemas.microsoft.com/office/thememl/2012/main" name="Office Theme" id="{62F939B6-93AF-4DB8-9C6B-D6C7DFDC589F}" vid="{4A3C46E8-61CC-4603-A589-7422A47A8E4A}"/>
+    </a:ext>
+  </a:extLst>
+</a:theme>
+</file>
+
+<file path=ppt/theme/theme2.xml><?xml version="1.0" encoding="utf-8"?>
+<a:theme xmlns:a="http://schemas.openxmlformats.org/drawingml/2006/main" name="Office Theme">
+  <a:themeElements>
+    <a:clrScheme name="Office">
+      <a:dk1>
+        <a:sysClr val="windowText" lastClr="000000"/>
+      </a:dk1>
+      <a:lt1>
+        <a:sysClr val="window" lastClr="FFFFFF"/>
+      </a:lt1>
+      <a:dk2>
+        <a:srgbClr val="44546A"/>
+      </a:dk2>
+      <a:lt2>
+        <a:srgbClr val="E7E6E6"/>
+      </a:lt2>
+      <a:accent1>
+        <a:srgbClr val="4472C4"/>
+      </a:accent1>
+      <a:accent2>
+        <a:srgbClr val="ED7D31"/>
+      </a:accent2>
+      <a:accent3>
+        <a:srgbClr val="A5A5A5"/>
+      </a:accent3>
+      <a:accent4>
+        <a:srgbClr val="FFC000"/>
+      </a:accent4>
+      <a:accent5>
+        <a:srgbClr val="5B9BD5"/>
+      </a:accent5>
+      <a:accent6>
+        <a:srgbClr val="70AD47"/>
+      </a:accent6>
+      <a:hlink>
+        <a:srgbClr val="0563C1"/>
+      </a:hlink>
+      <a:folHlink>
+        <a:srgbClr val="954F72"/>
+      </a:folHlink>
+    </a:clrScheme>
+    <a:fontScheme name="Office">
+      <a:majorFont>
+        <a:latin typeface="Microsoft YaHei"/>
+        <a:ea typeface=""/>
+        <a:cs typeface=""/>
+        <a:font script="Jpan" typeface="游ゴシック Light"/>
+        <a:font script="Hang" typeface="맑은 고딕"/>
+        <a:font script="Hans" typeface="等线 Light"/>
+        <a:font script="Hant" typeface="新細明體"/>
+        <a:font script="Arab" typeface="Times New Roman"/>
+        <a:font script="Hebr" typeface="Times New Roman"/>
+        <a:font script="Thai" typeface="Angsana New"/>
+        <a:font script="Ethi" typeface="Nyala"/>
+        <a:font script="Beng" typeface="Vrinda"/>
+        <a:font script="Gujr" typeface="Shruti"/>
+        <a:font script="Khmr" typeface="MoolBoran"/>
+        <a:font script="Knda" typeface="Tunga"/>
+        <a:font script="Guru" typeface="Raavi"/>
+        <a:font script="Cans" typeface="Euphemia"/>
+        <a:font script="Cher" typeface="Plantagenet Cherokee"/>
+        <a:font script="Yiii" typeface="Microsoft Yi Baiti"/>
+        <a:font script="Tibt" typeface="Microsoft Himalaya"/>
+        <a:font script="Thaa" typeface="MV Boli"/>
+        <a:font script="Deva" typeface="Mangal"/>
+        <a:font script="Telu" typeface="Gautami"/>
+        <a:font script="Taml" typeface="Latha"/>
+        <a:font script="Syrc" typeface="Estrangelo Edessa"/>
+        <a:font script="Orya" typeface="Kalinga"/>
+        <a:font script="Mlym" typeface="Kartika"/>
+        <a:font script="Laoo" typeface="DokChampa"/>
+        <a:font script="Sinh" typeface="Iskoola Pota"/>
+        <a:font script="Mong" typeface="Mongolian Baiti"/>
+        <a:font script="Viet" typeface="Times New Roman"/>
+        <a:font script="Uigh" typeface="Microsoft Uighur"/>
+        <a:font script="Geor" typeface="Sylfaen"/>
+      </a:majorFont>
+      <a:minorFont>
+        <a:latin typeface="Microsoft YaHei"/>
+        <a:ea typeface=""/>
+        <a:cs typeface=""/>
+        <a:font script="Jpan" typeface="游ゴシック"/>
+        <a:font script="Hang" typeface="맑은 고딕"/>
+        <a:font script="Hans" typeface="等线"/>
+        <a:font script="Hant" typeface="新細明體"/>
+        <a:font script="Arab" typeface="Arial"/>
+        <a:font script="Hebr" typeface="Arial"/>
+        <a:font script="Thai" typeface="Cordia New"/>
+        <a:font script="Ethi" typeface="Nyala"/>
+        <a:font script="Beng" typeface="Vrinda"/>
+        <a:font script="Gujr" typeface="Shruti"/>
+        <a:font script="Khmr" typeface="DaunPenh"/>
+        <a:font script="Knda" typeface="Tunga"/>
+        <a:font script="Guru" typeface="Raavi"/>
+        <a:font script="Cans" typeface="Euphemia"/>
+        <a:font script="Cher" typeface="Plantagenet Cherokee"/>
+        <a:font script="Yiii" typeface="Microsoft Yi Baiti"/>
+        <a:font script="Tibt" typeface="Microsoft Himalaya"/>
+        <a:font script="Thaa" typeface="MV Boli"/>
+        <a:font script="Deva" typeface="Mangal"/>
+        <a:font script="Telu" typeface="Gautami"/>
+        <a:font script="Taml" typeface="Latha"/>
+        <a:font script="Syrc" typeface="Estrangelo Edessa"/>
+        <a:font script="Orya" typeface="Kalinga"/>
+        <a:font script="Mlym" typeface="Kartika"/>
+        <a:font script="Laoo" typeface="DokChampa"/>
+        <a:font script="Sinh" typeface="Iskoola Pota"/>
+        <a:font script="Mong" typeface="Mongolian Baiti"/>
+        <a:font script="Viet" typeface="Arial"/>
+        <a:font script="Uigh" typeface="Microsoft Uighur"/>
+        <a:font script="Geor" typeface="Sylfaen"/>
+      </a:minorFont>
+    </a:fontScheme>
+    <a:fmtScheme name="Office">
+      <a:fillStyleLst>
+        <a:solidFill>
+          <a:schemeClr val="phClr"/>
+        </a:solidFill>
+        <a:gradFill rotWithShape="1">
+          <a:gsLst>
+            <a:gs pos="0">
+              <a:schemeClr val="phClr">
+                <a:lumMod val="110000"/>
+                <a:satMod val="105000"/>
+                <a:tint val="67000"/>
+              </a:schemeClr>
+            </a:gs>
+            <a:gs pos="50000">
+              <a:schemeClr val="phClr">
+                <a:lumMod val="105000"/>
+                <a:satMod val="103000"/>
+                <a:tint val="73000"/>
+              </a:schemeClr>
+            </a:gs>
+            <a:gs pos="100000">
+              <a:schemeClr val="phClr">
+                <a:lumMod val="105000"/>
+                <a:satMod val="109000"/>
+                <a:tint val="81000"/>
+              </a:schemeClr>
+            </a:gs>
+          </a:gsLst>
+          <a:lin ang="5400000" scaled="0"/>
+        </a:gradFill>
+        <a:gradFill rotWithShape="1">
+          <a:gsLst>
+            <a:gs pos="0">
+              <a:schemeClr val="phClr">
+                <a:satMod val="103000"/>
+                <a:lumMod val="102000"/>
+                <a:tint val="94000"/>
+              </a:schemeClr>
+            </a:gs>
+            <a:gs pos="50000">
+              <a:schemeClr val="phClr">
+                <a:satMod val="110000"/>
+                <a:lumMod val="100000"/>
+                <a:shade val="100000"/>
+              </a:schemeClr>
+            </a:gs>
+            <a:gs pos="100000">
+              <a:schemeClr val="phClr">
+                <a:lumMod val="99000"/>
+                <a:satMod val="120000"/>
+                <a:shade val="78000"/>
+              </a:schemeClr>
+            </a:gs>
+          </a:gsLst>
+          <a:lin ang="5400000" scaled="0"/>
+        </a:gradFill>
+      </a:fillStyleLst>
+      <a:lnStyleLst>
+        <a:ln w="6350" cap="flat" cmpd="sng" algn="ctr">
+          <a:solidFill>
+            <a:schemeClr val="phClr"/>
+          </a:solidFill>
+          <a:prstDash val="solid"/>
+          <a:miter lim="800000"/>
+        </a:ln>
+        <a:ln w="12700" cap="flat" cmpd="sng" algn="ctr">
+          <a:solidFill>
+            <a:schemeClr val="phClr"/>
+          </a:solidFill>
+          <a:prstDash val="solid"/>
+          <a:miter lim="800000"/>
+        </a:ln>
+        <a:ln w="19050" cap="flat" cmpd="sng" algn="ctr">
+          <a:solidFill>
+            <a:schemeClr val="phClr"/>
+          </a:solidFill>
+          <a:prstDash val="solid"/>
+          <a:miter lim="800000"/>
+        </a:ln>
+      </a:lnStyleLst>
+      <a:effectStyleLst>
+        <a:effectStyle>
+          <a:effectLst/>
+        </a:effectStyle>
+        <a:effectStyle>
+          <a:effectLst/>
+        </a:effectStyle>
+        <a:effectStyle>
+          <a:effectLst>
+            <a:outerShdw blurRad="57150" dist="19050" dir="5400000" algn="ctr" rotWithShape="0">
+              <a:srgbClr val="000000">
+                <a:alpha val="63000"/>
+              </a:srgbClr>
+            </a:outerShdw>
+          </a:effectLst>
+        </a:effectStyle>
+      </a:effectStyleLst>
+      <a:bgFillStyleLst>
+        <a:solidFill>
+          <a:schemeClr val="phClr"/>
+        </a:solidFill>
+        <a:solidFill>
+          <a:schemeClr val="phClr">
+            <a:tint val="95000"/>
+            <a:satMod val="170000"/>
+          </a:schemeClr>
+        </a:solidFill>
+        <a:gradFill rotWithShape="1">
+          <a:gsLst>
+            <a:gs pos="0">
+              <a:schemeClr val="phClr">
+                <a:tint val="93000"/>
+                <a:satMod val="150000"/>
+                <a:shade val="98000"/>
+                <a:lumMod val="102000"/>
+              </a:schemeClr>
+            </a:gs>
+            <a:gs pos="50000">
+              <a:schemeClr val="phClr">
+                <a:tint val="98000"/>
+                <a:satMod val="130000"/>
+                <a:shade val="90000"/>
+                <a:lumMod val="103000"/>
+              </a:schemeClr>
+            </a:gs>
+            <a:gs pos="100000">
+              <a:schemeClr val="phClr">
+                <a:shade val="63000"/>
+                <a:satMod val="120000"/>
+              </a:schemeClr>
+            </a:gs>
+          </a:gsLst>
+          <a:lin ang="5400000" scaled="0"/>
+        </a:gradFill>
+      </a:bgFillStyleLst>
+    </a:fmtScheme>
+  </a:themeElements>
   <a:extLst>
     <a:ext uri="{05A4C25C-085E-4340-85A3-A5531E510DB2}">
       <thm15:themeFamily xmlns:thm15="http://schemas.microsoft.com/office/thememl/2012/main" name="Office Theme" id="{62F939B6-93AF-4DB8-9C6B-D6C7DFDC589F}" vid="{4A3C46E8-61CC-4603-A589-7422A47A8E4A}"/>
